--- a/Capstone_Presentation.pptx
+++ b/Capstone_Presentation.pptx
@@ -20,6 +20,7 @@
     <p:sldId id="267" r:id="rId13"/>
     <p:sldId id="272" r:id="rId23"/>
     <p:sldId id="273" r:id="rId24"/>
+    <p:sldId id="274" r:id="rId25"/>
     <p:sldId id="268" r:id="rId14"/>
     <p:sldId id="269" r:id="rId15"/>
     <p:sldId id="270" r:id="rId16"/>
@@ -2741,7 +2742,7 @@
                 <a:ea typeface="Cambria" pitchFamily="34" charset="-122"/>
                 <a:cs typeface="Cambria" pitchFamily="34" charset="-120"/>
               </a:rPr>
-              <a:t>0.6619</a:t>
+              <a:t>0.6814</a:t>
             </a:r>
             <a:endParaRPr lang="en-US" sz="3000" dirty="0"/>
           </a:p>
@@ -2819,7 +2820,7 @@
                 <a:ea typeface="Cambria" pitchFamily="34" charset="-122"/>
                 <a:cs typeface="Cambria" pitchFamily="34" charset="-120"/>
               </a:rPr>
-              <a:t>8</a:t>
+              <a:t>9</a:t>
             </a:r>
             <a:endParaRPr lang="en-US" sz="3000" dirty="0"/>
           </a:p>
@@ -5980,7 +5981,7 @@
                 <a:ea typeface="Calibri" pitchFamily="34" charset="-122"/>
                 <a:cs typeface="Calibri" pitchFamily="34" charset="-120"/>
               </a:rPr>
-              <a:t>16</a:t>
+              <a:t>17</a:t>
             </a:r>
             <a:endParaRPr lang="en-US" sz="1000" dirty="0"/>
           </a:p>
@@ -6667,7 +6668,7 @@
                 <a:ea typeface="Calibri" pitchFamily="34" charset="-122"/>
                 <a:cs typeface="Calibri" pitchFamily="34" charset="-120"/>
               </a:rPr>
-              <a:t>17</a:t>
+              <a:t>18</a:t>
             </a:r>
             <a:endParaRPr lang="en-US" sz="1000" dirty="0"/>
           </a:p>
@@ -6875,7 +6876,7 @@
                 <a:ea typeface="Calibri" pitchFamily="34" charset="-122"/>
                 <a:cs typeface="Calibri" pitchFamily="34" charset="-120"/>
               </a:rPr>
-              <a:t>Every evaluation number comes from a real execution of the eval harness — final OVERALL F1 0.6619, recall essentially saturated — not a hand-picked or simulated result.</a:t>
+              <a:t>Every evaluation number comes from a real execution of the eval harness — final OVERALL F1 0.6814, recall fully saturated (2,150 of 2,150 spans) — not a hand-picked or simulated result.</a:t>
             </a:r>
             <a:endParaRPr lang="en-US" sz="1500" dirty="0"/>
           </a:p>
@@ -6973,7 +6974,7 @@
                 <a:ea typeface="Calibri" pitchFamily="34" charset="-122"/>
                 <a:cs typeface="Calibri" pitchFamily="34" charset="-120"/>
               </a:rPr>
-              <a:t>Every one of the eight bugs in this deck was found through genuine debugging, live testing, or systematic error analysis, and confirmed fixed with real evidence.</a:t>
+              <a:t>Every one of the nine bugs in this deck was found through genuine debugging, live testing, or systematic error analysis, and confirmed fixed with real evidence.</a:t>
             </a:r>
             <a:endParaRPr lang="en-US" sz="1500" dirty="0"/>
           </a:p>
@@ -9328,6 +9329,500 @@
                 <a:cs typeface="Calibri" pitchFamily="34" charset="-120"/>
               </a:rPr>
               <a:t>15</a:t>
+            </a:r>
+            <a:endParaRPr lang="en-US" sz="1000" dirty="0"/>
+          </a:p>
+        </p:txBody>
+      </p:sp>
+    </p:spTree>
+  </p:cSld>
+  <p:clrMapOvr>
+    <a:masterClrMapping/>
+  </p:clrMapOvr>
+</p:sld>
+</file>
+
+<file path=ppt/slides/slide19.xml><?xml version="1.0" encoding="utf-8"?>
+<p:sld xmlns:a="http://schemas.openxmlformats.org/drawingml/2006/main" xmlns:r="http://schemas.openxmlformats.org/officeDocument/2006/relationships" xmlns:p="http://schemas.openxmlformats.org/presentationml/2006/main">
+  <p:cSld name="Slide 19">
+    <p:bg>
+      <p:bgPr>
+        <a:solidFill>
+          <a:srgbClr val="FFFFFF"/>
+        </a:solidFill>
+      </p:bgPr>
+    </p:bg>
+    <p:spTree>
+      <p:nvGrpSpPr>
+        <p:cNvPr id="1" name=""/>
+        <p:cNvGrpSpPr/>
+        <p:nvPr/>
+      </p:nvGrpSpPr>
+      <p:grpSpPr>
+        <a:xfrm>
+          <a:off x="0" y="0"/>
+          <a:ext cx="0" cy="0"/>
+          <a:chOff x="0" y="0"/>
+          <a:chExt cx="0" cy="0"/>
+        </a:xfrm>
+      </p:grpSpPr>
+      <p:sp>
+        <p:nvSpPr>
+          <p:cNvPr id="2" name="Text 0"/>
+          <p:cNvSpPr/>
+          <p:nvPr/>
+        </p:nvSpPr>
+        <p:spPr>
+          <a:xfrm>
+            <a:off x="548640" y="365760"/>
+            <a:ext cx="7315200" cy="320040"/>
+          </a:xfrm>
+          <a:prstGeom prst="rect">
+            <a:avLst/>
+          </a:prstGeom>
+          <a:noFill/>
+          <a:ln/>
+        </p:spPr>
+        <p:txBody>
+          <a:bodyPr wrap="square" rtlCol="0" anchor="ctr"/>
+          <a:lstStyle/>
+          <a:p>
+            <a:pPr indent="0" marL="0">
+              <a:buNone/>
+            </a:pPr>
+            <a:r>
+              <a:rPr lang="en-US" sz="1200" b="1" spc="200" kern="0" dirty="0">
+                <a:solidFill>
+                  <a:srgbClr val="0F6E56"/>
+                </a:solidFill>
+                <a:latin typeface="Calibri" pitchFamily="34" charset="0"/>
+                <a:ea typeface="Calibri" pitchFamily="34" charset="-122"/>
+                <a:cs typeface="Calibri" pitchFamily="34" charset="-120"/>
+              </a:rPr>
+              <a:t>REAL BUGS FOUND &amp; FIXED — PART 6</a:t>
+            </a:r>
+            <a:endParaRPr lang="en-US" sz="1200" dirty="0"/>
+          </a:p>
+        </p:txBody>
+      </p:sp>
+      <p:sp>
+        <p:nvSpPr>
+          <p:cNvPr id="3" name="Text 1"/>
+          <p:cNvSpPr/>
+          <p:nvPr/>
+        </p:nvSpPr>
+        <p:spPr>
+          <a:xfrm>
+            <a:off x="548640" y="640080"/>
+            <a:ext cx="11064240" cy="822960"/>
+          </a:xfrm>
+          <a:prstGeom prst="rect">
+            <a:avLst/>
+          </a:prstGeom>
+          <a:noFill/>
+          <a:ln/>
+        </p:spPr>
+        <p:txBody>
+          <a:bodyPr wrap="square" rtlCol="0" anchor="ctr"/>
+          <a:lstStyle/>
+          <a:p>
+            <a:pPr algn="l" indent="0" marL="0">
+              <a:buNone/>
+            </a:pPr>
+            <a:r>
+              <a:rPr lang="en-US" sz="3000" b="1" dirty="0">
+                <a:solidFill>
+                  <a:srgbClr val="1F4E79"/>
+                </a:solidFill>
+                <a:latin typeface="Cambria" pitchFamily="34" charset="0"/>
+                <a:ea typeface="Cambria" pitchFamily="34" charset="-122"/>
+                <a:cs typeface="Cambria" pitchFamily="34" charset="-120"/>
+              </a:rPr>
+              <a:t>Found via eval error analysis after the first live Streamlit Cloud deployment</a:t>
+            </a:r>
+            <a:endParaRPr lang="en-US" sz="3000" dirty="0"/>
+          </a:p>
+        </p:txBody>
+      </p:sp>
+      <p:sp>
+        <p:nvSpPr>
+          <p:cNvPr id="4" name="Shape 2"/>
+          <p:cNvSpPr/>
+          <p:nvPr/>
+        </p:nvSpPr>
+        <p:spPr>
+          <a:xfrm>
+            <a:off x="548640" y="1691640"/>
+            <a:ext cx="11064240" cy="1965960"/>
+          </a:xfrm>
+          <a:prstGeom prst="roundRect">
+            <a:avLst>
+              <a:gd name="adj" fmla="val 3721"/>
+            </a:avLst>
+          </a:prstGeom>
+          <a:solidFill>
+            <a:srgbClr val="F7F9FB"/>
+          </a:solidFill>
+          <a:ln w="12700">
+            <a:solidFill>
+              <a:srgbClr val="E3E8EC"/>
+            </a:solidFill>
+            <a:prstDash val="solid"/>
+          </a:ln>
+          <a:effectLst>
+            <a:outerShdw sx="100000" sy="100000" kx="0" ky="0" algn="bl" rotWithShape="0" blurRad="76200" dist="25400" dir="5400000">
+              <a:srgbClr val="999999">
+                <a:alpha val="18000"/>
+              </a:srgbClr>
+            </a:outerShdw>
+          </a:effectLst>
+        </p:spPr>
+      </p:sp>
+      <p:sp>
+        <p:nvSpPr>
+          <p:cNvPr id="5" name="Shape 3"/>
+          <p:cNvSpPr/>
+          <p:nvPr/>
+        </p:nvSpPr>
+        <p:spPr>
+          <a:xfrm>
+            <a:off x="822960" y="1965960"/>
+            <a:ext cx="457200" cy="457200"/>
+          </a:xfrm>
+          <a:prstGeom prst="ellipse">
+            <a:avLst/>
+          </a:prstGeom>
+          <a:solidFill>
+            <a:srgbClr val="993C1D"/>
+          </a:solidFill>
+          <a:ln/>
+        </p:spPr>
+      </p:sp>
+      <p:sp>
+        <p:nvSpPr>
+          <p:cNvPr id="6" name="Text 4"/>
+          <p:cNvSpPr/>
+          <p:nvPr/>
+        </p:nvSpPr>
+        <p:spPr>
+          <a:xfrm>
+            <a:off x="822960" y="1965960"/>
+            <a:ext cx="457200" cy="457200"/>
+          </a:xfrm>
+          <a:prstGeom prst="rect">
+            <a:avLst/>
+          </a:prstGeom>
+          <a:noFill/>
+          <a:ln/>
+        </p:spPr>
+        <p:txBody>
+          <a:bodyPr wrap="square" rtlCol="0" anchor="ctr"/>
+          <a:lstStyle/>
+          <a:p>
+            <a:pPr algn="ctr" indent="0" marL="0">
+              <a:buNone/>
+            </a:pPr>
+            <a:r>
+              <a:rPr lang="en-US" sz="1600" b="1" dirty="0">
+                <a:solidFill>
+                  <a:srgbClr val="FFFFFF"/>
+                </a:solidFill>
+                <a:latin typeface="Cambria" pitchFamily="34" charset="0"/>
+                <a:ea typeface="Cambria" pitchFamily="34" charset="-122"/>
+                <a:cs typeface="Cambria" pitchFamily="34" charset="-120"/>
+              </a:rPr>
+              <a:t>9</a:t>
+            </a:r>
+            <a:endParaRPr lang="en-US" sz="1600" dirty="0"/>
+          </a:p>
+        </p:txBody>
+      </p:sp>
+      <p:sp>
+        <p:nvSpPr>
+          <p:cNvPr id="7" name="Shape 5"/>
+          <p:cNvSpPr/>
+          <p:nvPr/>
+        </p:nvSpPr>
+        <p:spPr>
+          <a:xfrm>
+            <a:off x="1463040" y="2011680"/>
+            <a:ext cx="3017520" cy="365760"/>
+          </a:xfrm>
+          <a:prstGeom prst="roundRect">
+            <a:avLst>
+              <a:gd name="adj" fmla="val 15000"/>
+            </a:avLst>
+          </a:prstGeom>
+          <a:solidFill>
+            <a:srgbClr val="FAEEDA"/>
+          </a:solidFill>
+          <a:ln/>
+        </p:spPr>
+      </p:sp>
+      <p:sp>
+        <p:nvSpPr>
+          <p:cNvPr id="8" name="Text 6"/>
+          <p:cNvSpPr/>
+          <p:nvPr/>
+        </p:nvSpPr>
+        <p:spPr>
+          <a:xfrm>
+            <a:off x="1463040" y="2011680"/>
+            <a:ext cx="3017520" cy="365760"/>
+          </a:xfrm>
+          <a:prstGeom prst="rect">
+            <a:avLst/>
+          </a:prstGeom>
+          <a:noFill/>
+          <a:ln/>
+        </p:spPr>
+        <p:txBody>
+          <a:bodyPr wrap="square" rtlCol="0" anchor="ctr"/>
+          <a:lstStyle/>
+          <a:p>
+            <a:pPr algn="ctr" indent="0" marL="0">
+              <a:buNone/>
+            </a:pPr>
+            <a:r>
+              <a:rPr lang="en-US" sz="1000" b="1" dirty="0">
+                <a:solidFill>
+                  <a:srgbClr val="7A4D08"/>
+                </a:solidFill>
+                <a:latin typeface="Calibri" pitchFamily="34" charset="0"/>
+                <a:ea typeface="Calibri" pitchFamily="34" charset="-122"/>
+                <a:cs typeface="Calibri" pitchFamily="34" charset="-120"/>
+              </a:rPr>
+              <a:t>IRRELEVANT RECOGNIZER COLLISION</a:t>
+            </a:r>
+            <a:endParaRPr lang="en-US" sz="1000" dirty="0"/>
+          </a:p>
+        </p:txBody>
+      </p:sp>
+      <p:sp>
+        <p:nvSpPr>
+          <p:cNvPr id="9" name="Text 7"/>
+          <p:cNvSpPr/>
+          <p:nvPr/>
+        </p:nvSpPr>
+        <p:spPr>
+          <a:xfrm>
+            <a:off x="822960" y="2514600"/>
+            <a:ext cx="10424160" cy="457200"/>
+          </a:xfrm>
+          <a:prstGeom prst="rect">
+            <a:avLst/>
+          </a:prstGeom>
+          <a:noFill/>
+          <a:ln/>
+        </p:spPr>
+        <p:txBody>
+          <a:bodyPr wrap="square" rtlCol="0" anchor="ctr"/>
+          <a:lstStyle/>
+          <a:p>
+            <a:pPr indent="0" marL="0">
+              <a:buNone/>
+            </a:pPr>
+            <a:r>
+              <a:rPr lang="en-US" sz="1500" b="1" dirty="0">
+                <a:solidFill>
+                  <a:srgbClr val="1A1A18"/>
+                </a:solidFill>
+                <a:latin typeface="Cambria" pitchFamily="34" charset="0"/>
+                <a:ea typeface="Cambria" pitchFamily="34" charset="-122"/>
+                <a:cs typeface="Cambria" pitchFamily="34" charset="-120"/>
+              </a:rPr>
+              <a:t>Two ordinary US phone numbers silently mislabeled as UK NHS numbers</a:t>
+            </a:r>
+            <a:endParaRPr lang="en-US" sz="1500" dirty="0"/>
+          </a:p>
+        </p:txBody>
+      </p:sp>
+      <p:sp>
+        <p:nvSpPr>
+          <p:cNvPr id="10" name="Text 8"/>
+          <p:cNvSpPr/>
+          <p:nvPr/>
+        </p:nvSpPr>
+        <p:spPr>
+          <a:xfrm>
+            <a:off x="822960" y="2971800"/>
+            <a:ext cx="10424160" cy="640080"/>
+          </a:xfrm>
+          <a:prstGeom prst="rect">
+            <a:avLst/>
+          </a:prstGeom>
+          <a:noFill/>
+          <a:ln/>
+        </p:spPr>
+        <p:txBody>
+          <a:bodyPr wrap="square" rtlCol="0" anchor="ctr"/>
+          <a:lstStyle/>
+          <a:p>
+            <a:pPr indent="0" marL="0">
+              <a:buNone/>
+            </a:pPr>
+            <a:r>
+              <a:rPr lang="en-US" sz="1150" dirty="0">
+                <a:solidFill>
+                  <a:srgbClr val="5F5E5A"/>
+                </a:solidFill>
+                <a:latin typeface="Calibri" pitchFamily="34" charset="0"/>
+                <a:ea typeface="Calibri" pitchFamily="34" charset="-122"/>
+                <a:cs typeface="Calibri" pitchFamily="34" charset="-120"/>
+              </a:rPr>
+              <a:t>Presidio ships a built-in NhsRecognizer (UK NHS number recognizer) that validates any 10-digit sequence against the real NHS Mod-11 checksum and returns a perfect 1.0 confidence, no UK context needed. Two ordinary US phone numbers happened to pass that checksum, so the NHS candidate beat this project's own PHONE_NUMBER detections in the overlap-resolution step — the span was still redacted (no PHI leak), just mislabeled.</a:t>
+            </a:r>
+            <a:endParaRPr lang="en-US" sz="1150" dirty="0"/>
+          </a:p>
+        </p:txBody>
+      </p:sp>
+      <p:sp>
+        <p:nvSpPr>
+          <p:cNvPr id="11" name="Shape 9"/>
+          <p:cNvSpPr/>
+          <p:nvPr/>
+        </p:nvSpPr>
+        <p:spPr>
+          <a:xfrm>
+            <a:off x="548640" y="3840480"/>
+            <a:ext cx="11064240" cy="1691640"/>
+          </a:xfrm>
+          <a:prstGeom prst="roundRect">
+            <a:avLst>
+              <a:gd name="adj" fmla="val 4324"/>
+            </a:avLst>
+          </a:prstGeom>
+          <a:solidFill>
+            <a:srgbClr val="E1F5EE"/>
+          </a:solidFill>
+          <a:ln w="12700">
+            <a:solidFill>
+              <a:srgbClr val="E1F5EE"/>
+            </a:solidFill>
+            <a:prstDash val="solid"/>
+          </a:ln>
+        </p:spPr>
+      </p:sp>
+      <p:sp>
+        <p:nvSpPr>
+          <p:cNvPr id="12" name="Text 10"/>
+          <p:cNvSpPr/>
+          <p:nvPr/>
+        </p:nvSpPr>
+        <p:spPr>
+          <a:xfrm>
+            <a:off x="822960" y="4023360"/>
+            <a:ext cx="10515600" cy="822960"/>
+          </a:xfrm>
+          <a:prstGeom prst="rect">
+            <a:avLst/>
+          </a:prstGeom>
+          <a:noFill/>
+          <a:ln/>
+        </p:spPr>
+        <p:txBody>
+          <a:bodyPr wrap="square" rtlCol="0" anchor="t"/>
+          <a:lstStyle/>
+          <a:p>
+            <a:pPr indent="0" marL="0">
+              <a:buNone/>
+            </a:pPr>
+            <a:r>
+              <a:rPr lang="en-US" sz="1300" b="1" dirty="0">
+                <a:solidFill>
+                  <a:srgbClr val="0F6E56"/>
+                </a:solidFill>
+              </a:rPr>
+              <a:t>Fix: </a:t>
+            </a:r>
+            <a:pPr indent="0" marL="0">
+              <a:buNone/>
+            </a:pPr>
+            <a:r>
+              <a:rPr lang="en-US" sz="1250" dirty="0">
+                <a:solidFill>
+                  <a:srgbClr val="0D5040"/>
+                </a:solidFill>
+              </a:rPr>
+              <a:t>Deregistered NhsRecognizer from the analyzer registry — same pattern already used to remove the irrelevant US_DRIVER_LICENSE recognizer, since neither is relevant to this project's all-US clinical documents.</a:t>
+            </a:r>
+            <a:endParaRPr lang="en-US" sz="1300" dirty="0"/>
+          </a:p>
+        </p:txBody>
+      </p:sp>
+      <p:sp>
+        <p:nvSpPr>
+          <p:cNvPr id="13" name="Text 11"/>
+          <p:cNvSpPr/>
+          <p:nvPr/>
+        </p:nvSpPr>
+        <p:spPr>
+          <a:xfrm>
+            <a:off x="822960" y="4937760"/>
+            <a:ext cx="10515600" cy="457200"/>
+          </a:xfrm>
+          <a:prstGeom prst="rect">
+            <a:avLst/>
+          </a:prstGeom>
+          <a:noFill/>
+          <a:ln/>
+        </p:spPr>
+        <p:txBody>
+          <a:bodyPr wrap="square" rtlCol="0" anchor="ctr"/>
+          <a:lstStyle/>
+          <a:p>
+            <a:pPr indent="0" marL="0">
+              <a:buNone/>
+            </a:pPr>
+            <a:r>
+              <a:rPr lang="en-US" sz="1250" b="1" dirty="0">
+                <a:solidFill>
+                  <a:srgbClr val="0D5040"/>
+                </a:solidFill>
+                <a:latin typeface="Calibri" pitchFamily="34" charset="0"/>
+                <a:ea typeface="Calibri" pitchFamily="34" charset="-122"/>
+                <a:cs typeface="Calibri" pitchFamily="34" charset="-120"/>
+              </a:rPr>
+              <a:t>OVERALL F1 improved 0.6619 → 0.6814, recall reached a perfect 2,150/2,150 labeled spans (zero false negatives) — confirmed by re-running the full eval suite. 57/57 tests still pass.</a:t>
+            </a:r>
+            <a:endParaRPr lang="en-US" sz="1250" dirty="0"/>
+          </a:p>
+        </p:txBody>
+      </p:sp>
+      <p:sp>
+        <p:nvSpPr>
+          <p:cNvPr id="14" name="Text 12"/>
+          <p:cNvSpPr/>
+          <p:nvPr/>
+        </p:nvSpPr>
+        <p:spPr>
+          <a:xfrm>
+            <a:off x="11612880" y="6492240"/>
+            <a:ext cx="457200" cy="274320"/>
+          </a:xfrm>
+          <a:prstGeom prst="rect">
+            <a:avLst/>
+          </a:prstGeom>
+          <a:noFill/>
+          <a:ln/>
+        </p:spPr>
+        <p:txBody>
+          <a:bodyPr wrap="square" rtlCol="0" anchor="ctr"/>
+          <a:lstStyle/>
+          <a:p>
+            <a:pPr algn="r" indent="0" marL="0">
+              <a:buNone/>
+            </a:pPr>
+            <a:r>
+              <a:rPr lang="en-US" sz="1000" dirty="0">
+                <a:solidFill>
+                  <a:srgbClr val="5F5E5A"/>
+                </a:solidFill>
+                <a:latin typeface="Calibri" pitchFamily="34" charset="0"/>
+                <a:ea typeface="Calibri" pitchFamily="34" charset="-122"/>
+                <a:cs typeface="Calibri" pitchFamily="34" charset="-120"/>
+              </a:rPr>
+              <a:t>16</a:t>
             </a:r>
             <a:endParaRPr lang="en-US" sz="1000" dirty="0"/>
           </a:p>

--- a/Capstone_Presentation.pptx
+++ b/Capstone_Presentation.pptx
@@ -2664,7 +2664,7 @@
                 <a:ea typeface="Cambria" pitchFamily="34" charset="-122"/>
                 <a:cs typeface="Cambria" pitchFamily="34" charset="-120"/>
               </a:rPr>
-              <a:t>354</a:t>
+              <a:t>350</a:t>
             </a:r>
             <a:endParaRPr lang="en-US" sz="3000" dirty="0"/>
           </a:p>
@@ -2742,7 +2742,7 @@
                 <a:ea typeface="Cambria" pitchFamily="34" charset="-122"/>
                 <a:cs typeface="Cambria" pitchFamily="34" charset="-120"/>
               </a:rPr>
-              <a:t>0.6814</a:t>
+              <a:t>0.6587</a:t>
             </a:r>
             <a:endParaRPr lang="en-US" sz="3000" dirty="0"/>
           </a:p>
@@ -2913,6 +2913,728 @@
 </file>
 
 <file path=ppt/slides/slide10.xml><?xml version="1.0" encoding="utf-8"?>
+<p:sld xmlns:a="http://schemas.openxmlformats.org/drawingml/2006/main" xmlns:r="http://schemas.openxmlformats.org/officeDocument/2006/relationships" xmlns:p="http://schemas.openxmlformats.org/presentationml/2006/main">
+  <p:cSld name="Slide 9">
+    <p:bg>
+      <p:bgPr>
+        <a:solidFill>
+          <a:srgbClr val="FFFFFF"/>
+        </a:solidFill>
+      </p:bgPr>
+    </p:bg>
+    <p:spTree>
+      <p:nvGrpSpPr>
+        <p:cNvPr id="1" name=""/>
+        <p:cNvGrpSpPr/>
+        <p:nvPr/>
+      </p:nvGrpSpPr>
+      <p:grpSpPr>
+        <a:xfrm>
+          <a:off x="0" y="0"/>
+          <a:ext cx="0" cy="0"/>
+          <a:chOff x="0" y="0"/>
+          <a:chExt cx="0" cy="0"/>
+        </a:xfrm>
+      </p:grpSpPr>
+      <p:sp>
+        <p:nvSpPr>
+          <p:cNvPr id="2" name="Text 0"/>
+          <p:cNvSpPr/>
+          <p:nvPr/>
+        </p:nvSpPr>
+        <p:spPr>
+          <a:xfrm>
+            <a:off x="548640" y="365760"/>
+            <a:ext cx="7315200" cy="320040"/>
+          </a:xfrm>
+          <a:prstGeom prst="rect">
+            <a:avLst/>
+          </a:prstGeom>
+          <a:noFill/>
+          <a:ln/>
+        </p:spPr>
+        <p:txBody>
+          <a:bodyPr wrap="square" rtlCol="0" anchor="ctr"/>
+          <a:lstStyle/>
+          <a:p>
+            <a:pPr indent="0" marL="0">
+              <a:buNone/>
+            </a:pPr>
+            <a:r>
+              <a:rPr lang="en-US" sz="1200" b="1" spc="200" kern="0" dirty="0">
+                <a:solidFill>
+                  <a:srgbClr val="0F6E56"/>
+                </a:solidFill>
+                <a:latin typeface="Calibri" pitchFamily="34" charset="0"/>
+                <a:ea typeface="Calibri" pitchFamily="34" charset="-122"/>
+                <a:cs typeface="Calibri" pitchFamily="34" charset="-120"/>
+              </a:rPr>
+              <a:t>ABLATION STUDY &amp; ERROR ANALYSIS</a:t>
+            </a:r>
+            <a:endParaRPr lang="en-US" sz="1200" dirty="0"/>
+          </a:p>
+        </p:txBody>
+      </p:sp>
+      <p:sp>
+        <p:nvSpPr>
+          <p:cNvPr id="3" name="Text 1"/>
+          <p:cNvSpPr/>
+          <p:nvPr/>
+        </p:nvSpPr>
+        <p:spPr>
+          <a:xfrm>
+            <a:off x="548640" y="640080"/>
+            <a:ext cx="11064240" cy="822960"/>
+          </a:xfrm>
+          <a:prstGeom prst="rect">
+            <a:avLst/>
+          </a:prstGeom>
+          <a:noFill/>
+          <a:ln/>
+        </p:spPr>
+        <p:txBody>
+          <a:bodyPr wrap="square" rtlCol="0" anchor="ctr"/>
+          <a:lstStyle/>
+          <a:p>
+            <a:pPr algn="l" indent="0" marL="0">
+              <a:buNone/>
+            </a:pPr>
+            <a:r>
+              <a:rPr lang="en-US" sz="3000" b="1" dirty="0">
+                <a:solidFill>
+                  <a:srgbClr val="1F4E79"/>
+                </a:solidFill>
+                <a:latin typeface="Cambria" pitchFamily="34" charset="0"/>
+                <a:ea typeface="Cambria" pitchFamily="34" charset="-122"/>
+                <a:cs typeface="Cambria" pitchFamily="34" charset="-120"/>
+              </a:rPr>
+              <a:t>Measured, not assumed: what is human review actually worth?</a:t>
+            </a:r>
+            <a:endParaRPr lang="en-US" sz="3000" dirty="0"/>
+          </a:p>
+        </p:txBody>
+      </p:sp>
+      <p:sp>
+        <p:nvSpPr>
+          <p:cNvPr id="4" name="Shape 2"/>
+          <p:cNvSpPr/>
+          <p:nvPr/>
+        </p:nvSpPr>
+        <p:spPr>
+          <a:xfrm>
+            <a:off x="548640" y="1645920"/>
+            <a:ext cx="5486400" cy="2788920"/>
+          </a:xfrm>
+          <a:prstGeom prst="roundRect">
+            <a:avLst>
+              <a:gd name="adj" fmla="val 2623"/>
+            </a:avLst>
+          </a:prstGeom>
+          <a:solidFill>
+            <a:srgbClr val="F7F9FB"/>
+          </a:solidFill>
+          <a:ln w="12700">
+            <a:solidFill>
+              <a:srgbClr val="E3E8EC"/>
+            </a:solidFill>
+            <a:prstDash val="solid"/>
+          </a:ln>
+          <a:effectLst>
+            <a:outerShdw sx="100000" sy="100000" kx="0" ky="0" algn="bl" rotWithShape="0" blurRad="76200" dist="25400" dir="5400000">
+              <a:srgbClr val="999999">
+                <a:alpha val="18000"/>
+              </a:srgbClr>
+            </a:outerShdw>
+          </a:effectLst>
+        </p:spPr>
+      </p:sp>
+      <p:sp>
+        <p:nvSpPr>
+          <p:cNvPr id="5" name="Text 3"/>
+          <p:cNvSpPr/>
+          <p:nvPr/>
+        </p:nvSpPr>
+        <p:spPr>
+          <a:xfrm>
+            <a:off x="822960" y="1783080"/>
+            <a:ext cx="5029200" cy="365760"/>
+          </a:xfrm>
+          <a:prstGeom prst="rect">
+            <a:avLst/>
+          </a:prstGeom>
+          <a:noFill/>
+          <a:ln/>
+        </p:spPr>
+        <p:txBody>
+          <a:bodyPr wrap="square" rtlCol="0" anchor="ctr"/>
+          <a:lstStyle/>
+          <a:p>
+            <a:pPr indent="0" marL="0">
+              <a:buNone/>
+            </a:pPr>
+            <a:r>
+              <a:rPr lang="en-US" sz="1450" b="1" dirty="0">
+                <a:solidFill>
+                  <a:srgbClr val="1A1A18"/>
+                </a:solidFill>
+                <a:latin typeface="Cambria" pitchFamily="34" charset="0"/>
+                <a:ea typeface="Cambria" pitchFamily="34" charset="-122"/>
+                <a:cs typeface="Cambria" pitchFamily="34" charset="-120"/>
+              </a:rPr>
+              <a:t>HumanReviewAgent: ON vs OFF</a:t>
+            </a:r>
+            <a:endParaRPr lang="en-US" sz="1450" dirty="0"/>
+          </a:p>
+        </p:txBody>
+      </p:sp>
+      <p:sp>
+        <p:nvSpPr>
+          <p:cNvPr id="6" name="Text 4"/>
+          <p:cNvSpPr/>
+          <p:nvPr/>
+        </p:nvSpPr>
+        <p:spPr>
+          <a:xfrm>
+            <a:off x="822960" y="2194560"/>
+            <a:ext cx="5029200" cy="640080"/>
+          </a:xfrm>
+          <a:prstGeom prst="rect">
+            <a:avLst/>
+          </a:prstGeom>
+          <a:noFill/>
+          <a:ln/>
+        </p:spPr>
+        <p:txBody>
+          <a:bodyPr wrap="square" rtlCol="0" anchor="ctr"/>
+          <a:lstStyle/>
+          <a:p>
+            <a:pPr indent="0" marL="0">
+              <a:buNone/>
+            </a:pPr>
+            <a:r>
+              <a:rPr lang="en-US" sz="1100" dirty="0">
+                <a:solidFill>
+                  <a:srgbClr val="5F5E5A"/>
+                </a:solidFill>
+                <a:latin typeface="Calibri" pitchFamily="34" charset="0"/>
+                <a:ea typeface="Calibri" pitchFamily="34" charset="-122"/>
+                <a:cs typeface="Calibri" pitchFamily="34" charset="-120"/>
+              </a:rPr>
+              <a:t>ON: low-confidence spans routed to a reviewer, correctly approved.</a:t>
+            </a:r>
+            <a:endParaRPr lang="en-US" sz="1100" dirty="0"/>
+          </a:p>
+          <a:p>
+            <a:pPr indent="0" marL="0">
+              <a:buNone/>
+            </a:pPr>
+            <a:r>
+              <a:rPr lang="en-US" sz="1100" dirty="0">
+                <a:solidFill>
+                  <a:srgbClr val="5F5E5A"/>
+                </a:solidFill>
+                <a:latin typeface="Calibri" pitchFamily="34" charset="0"/>
+                <a:ea typeface="Calibri" pitchFamily="34" charset="-122"/>
+                <a:cs typeface="Calibri" pitchFamily="34" charset="-120"/>
+              </a:rPr>
+              <a:t>OFF: low-confidence spans left un-redacted entirely.</a:t>
+            </a:r>
+            <a:endParaRPr lang="en-US" sz="1100" dirty="0"/>
+          </a:p>
+        </p:txBody>
+      </p:sp>
+      <p:sp>
+        <p:nvSpPr>
+          <p:cNvPr id="7" name="Text 5"/>
+          <p:cNvSpPr/>
+          <p:nvPr/>
+        </p:nvSpPr>
+        <p:spPr>
+          <a:xfrm>
+            <a:off x="822960" y="2926080"/>
+            <a:ext cx="3291840" cy="411480"/>
+          </a:xfrm>
+          <a:prstGeom prst="rect">
+            <a:avLst/>
+          </a:prstGeom>
+          <a:noFill/>
+          <a:ln/>
+        </p:spPr>
+        <p:txBody>
+          <a:bodyPr wrap="square" rtlCol="0" anchor="ctr"/>
+          <a:lstStyle/>
+          <a:p>
+            <a:pPr indent="0" marL="0">
+              <a:buNone/>
+            </a:pPr>
+            <a:r>
+              <a:rPr lang="en-US" sz="1250" dirty="0">
+                <a:solidFill>
+                  <a:srgbClr val="1A1A18"/>
+                </a:solidFill>
+                <a:latin typeface="Calibri" pitchFamily="34" charset="0"/>
+                <a:ea typeface="Calibri" pitchFamily="34" charset="-122"/>
+                <a:cs typeface="Calibri" pitchFamily="34" charset="-120"/>
+              </a:rPr>
+              <a:t>OVERLAP F1 — ON</a:t>
+            </a:r>
+            <a:endParaRPr lang="en-US" sz="1250" dirty="0"/>
+          </a:p>
+        </p:txBody>
+      </p:sp>
+      <p:sp>
+        <p:nvSpPr>
+          <p:cNvPr id="8" name="Text 6"/>
+          <p:cNvSpPr/>
+          <p:nvPr/>
+        </p:nvSpPr>
+        <p:spPr>
+          <a:xfrm>
+            <a:off x="4206240" y="2926080"/>
+            <a:ext cx="1645920" cy="411480"/>
+          </a:xfrm>
+          <a:prstGeom prst="rect">
+            <a:avLst/>
+          </a:prstGeom>
+          <a:noFill/>
+          <a:ln/>
+        </p:spPr>
+        <p:txBody>
+          <a:bodyPr wrap="square" rtlCol="0" anchor="ctr"/>
+          <a:lstStyle/>
+          <a:p>
+            <a:pPr algn="r" indent="0" marL="0">
+              <a:buNone/>
+            </a:pPr>
+            <a:r>
+              <a:rPr lang="en-US" sz="1300" b="1" dirty="0">
+                <a:solidFill>
+                  <a:srgbClr val="1A1A18"/>
+                </a:solidFill>
+                <a:latin typeface="Cambria" pitchFamily="34" charset="0"/>
+                <a:ea typeface="Cambria" pitchFamily="34" charset="-122"/>
+                <a:cs typeface="Cambria" pitchFamily="34" charset="-120"/>
+              </a:rPr>
+              <a:t>0.6587</a:t>
+            </a:r>
+            <a:endParaRPr lang="en-US" sz="1300" dirty="0"/>
+          </a:p>
+        </p:txBody>
+      </p:sp>
+      <p:sp>
+        <p:nvSpPr>
+          <p:cNvPr id="9" name="Text 7"/>
+          <p:cNvSpPr/>
+          <p:nvPr/>
+        </p:nvSpPr>
+        <p:spPr>
+          <a:xfrm>
+            <a:off x="822960" y="3383280"/>
+            <a:ext cx="3291840" cy="411480"/>
+          </a:xfrm>
+          <a:prstGeom prst="rect">
+            <a:avLst/>
+          </a:prstGeom>
+          <a:noFill/>
+          <a:ln/>
+        </p:spPr>
+        <p:txBody>
+          <a:bodyPr wrap="square" rtlCol="0" anchor="ctr"/>
+          <a:lstStyle/>
+          <a:p>
+            <a:pPr indent="0" marL="0">
+              <a:buNone/>
+            </a:pPr>
+            <a:r>
+              <a:rPr lang="en-US" sz="1250" dirty="0">
+                <a:solidFill>
+                  <a:srgbClr val="1A1A18"/>
+                </a:solidFill>
+                <a:latin typeface="Calibri" pitchFamily="34" charset="0"/>
+                <a:ea typeface="Calibri" pitchFamily="34" charset="-122"/>
+                <a:cs typeface="Calibri" pitchFamily="34" charset="-120"/>
+              </a:rPr>
+              <a:t>OVERLAP F1 — OFF</a:t>
+            </a:r>
+            <a:endParaRPr lang="en-US" sz="1250" dirty="0"/>
+          </a:p>
+        </p:txBody>
+      </p:sp>
+      <p:sp>
+        <p:nvSpPr>
+          <p:cNvPr id="10" name="Text 8"/>
+          <p:cNvSpPr/>
+          <p:nvPr/>
+        </p:nvSpPr>
+        <p:spPr>
+          <a:xfrm>
+            <a:off x="4206240" y="3383280"/>
+            <a:ext cx="1645920" cy="411480"/>
+          </a:xfrm>
+          <a:prstGeom prst="rect">
+            <a:avLst/>
+          </a:prstGeom>
+          <a:noFill/>
+          <a:ln/>
+        </p:spPr>
+        <p:txBody>
+          <a:bodyPr wrap="square" rtlCol="0" anchor="ctr"/>
+          <a:lstStyle/>
+          <a:p>
+            <a:pPr algn="r" indent="0" marL="0">
+              <a:buNone/>
+            </a:pPr>
+            <a:r>
+              <a:rPr lang="en-US" sz="1300" b="1" dirty="0">
+                <a:solidFill>
+                  <a:srgbClr val="1A1A18"/>
+                </a:solidFill>
+                <a:latin typeface="Cambria" pitchFamily="34" charset="0"/>
+                <a:ea typeface="Cambria" pitchFamily="34" charset="-122"/>
+                <a:cs typeface="Cambria" pitchFamily="34" charset="-120"/>
+              </a:rPr>
+              <a:t>0.6176</a:t>
+            </a:r>
+            <a:endParaRPr lang="en-US" sz="1300" dirty="0"/>
+          </a:p>
+        </p:txBody>
+      </p:sp>
+      <p:sp>
+        <p:nvSpPr>
+          <p:cNvPr id="11" name="Text 9"/>
+          <p:cNvSpPr/>
+          <p:nvPr/>
+        </p:nvSpPr>
+        <p:spPr>
+          <a:xfrm>
+            <a:off x="822960" y="3840480"/>
+            <a:ext cx="3291840" cy="411480"/>
+          </a:xfrm>
+          <a:prstGeom prst="rect">
+            <a:avLst/>
+          </a:prstGeom>
+          <a:noFill/>
+          <a:ln/>
+        </p:spPr>
+        <p:txBody>
+          <a:bodyPr wrap="square" rtlCol="0" anchor="ctr"/>
+          <a:lstStyle/>
+          <a:p>
+            <a:pPr indent="0" marL="0">
+              <a:buNone/>
+            </a:pPr>
+            <a:r>
+              <a:rPr lang="en-US" sz="1250" b="1" dirty="0">
+                <a:solidFill>
+                  <a:srgbClr val="0F6E56"/>
+                </a:solidFill>
+                <a:latin typeface="Calibri" pitchFamily="34" charset="0"/>
+                <a:ea typeface="Calibri" pitchFamily="34" charset="-122"/>
+                <a:cs typeface="Calibri" pitchFamily="34" charset="-120"/>
+              </a:rPr>
+              <a:t>F1 delta (ON − OFF)</a:t>
+            </a:r>
+            <a:endParaRPr lang="en-US" sz="1250" dirty="0"/>
+          </a:p>
+        </p:txBody>
+      </p:sp>
+      <p:sp>
+        <p:nvSpPr>
+          <p:cNvPr id="12" name="Text 10"/>
+          <p:cNvSpPr/>
+          <p:nvPr/>
+        </p:nvSpPr>
+        <p:spPr>
+          <a:xfrm>
+            <a:off x="4206240" y="3840480"/>
+            <a:ext cx="1645920" cy="411480"/>
+          </a:xfrm>
+          <a:prstGeom prst="rect">
+            <a:avLst/>
+          </a:prstGeom>
+          <a:noFill/>
+          <a:ln/>
+        </p:spPr>
+        <p:txBody>
+          <a:bodyPr wrap="square" rtlCol="0" anchor="ctr"/>
+          <a:lstStyle/>
+          <a:p>
+            <a:pPr algn="r" indent="0" marL="0">
+              <a:buNone/>
+            </a:pPr>
+            <a:r>
+              <a:rPr lang="en-US" sz="1300" b="1" dirty="0">
+                <a:solidFill>
+                  <a:srgbClr val="0F6E56"/>
+                </a:solidFill>
+                <a:latin typeface="Cambria" pitchFamily="34" charset="0"/>
+                <a:ea typeface="Cambria" pitchFamily="34" charset="-122"/>
+                <a:cs typeface="Cambria" pitchFamily="34" charset="-120"/>
+              </a:rPr>
+              <a:t>+0.0411</a:t>
+            </a:r>
+            <a:endParaRPr lang="en-US" sz="1300" dirty="0"/>
+          </a:p>
+        </p:txBody>
+      </p:sp>
+      <p:sp>
+        <p:nvSpPr>
+          <p:cNvPr id="13" name="Text 11"/>
+          <p:cNvSpPr/>
+          <p:nvPr/>
+        </p:nvSpPr>
+        <p:spPr>
+          <a:xfrm>
+            <a:off x="822960" y="4160520"/>
+            <a:ext cx="5029200" cy="228600"/>
+          </a:xfrm>
+          <a:prstGeom prst="rect">
+            <a:avLst/>
+          </a:prstGeom>
+          <a:noFill/>
+          <a:ln/>
+        </p:spPr>
+        <p:txBody>
+          <a:bodyPr wrap="square" rtlCol="0" anchor="ctr"/>
+          <a:lstStyle/>
+          <a:p>
+            <a:pPr indent="0" marL="0">
+              <a:buNone/>
+            </a:pPr>
+            <a:r>
+              <a:rPr lang="en-US" sz="1000" i="1" dirty="0">
+                <a:solidFill>
+                  <a:srgbClr val="5F5E5A"/>
+                </a:solidFill>
+                <a:latin typeface="Calibri" pitchFamily="34" charset="0"/>
+                <a:ea typeface="Calibri" pitchFamily="34" charset="-122"/>
+                <a:cs typeface="Calibri" pitchFamily="34" charset="-120"/>
+              </a:rPr>
+              <a:t>Positive delta both ways (STRICT +0.0625, OVERLAP +0.0411) — human review is measurably load-bearing, not decorative.</a:t>
+            </a:r>
+            <a:endParaRPr lang="en-US" sz="1000" dirty="0"/>
+          </a:p>
+        </p:txBody>
+      </p:sp>
+      <p:sp>
+        <p:nvSpPr>
+          <p:cNvPr id="14" name="Shape 12"/>
+          <p:cNvSpPr/>
+          <p:nvPr/>
+        </p:nvSpPr>
+        <p:spPr>
+          <a:xfrm>
+            <a:off x="6309360" y="1645920"/>
+            <a:ext cx="5303520" cy="2788920"/>
+          </a:xfrm>
+          <a:prstGeom prst="roundRect">
+            <a:avLst>
+              <a:gd name="adj" fmla="val 2623"/>
+            </a:avLst>
+          </a:prstGeom>
+          <a:solidFill>
+            <a:srgbClr val="FAEEDA"/>
+          </a:solidFill>
+          <a:ln w="12700">
+            <a:solidFill>
+              <a:srgbClr val="FAEEDA"/>
+            </a:solidFill>
+            <a:prstDash val="solid"/>
+          </a:ln>
+        </p:spPr>
+      </p:sp>
+      <p:sp>
+        <p:nvSpPr>
+          <p:cNvPr id="15" name="Text 13"/>
+          <p:cNvSpPr/>
+          <p:nvPr/>
+        </p:nvSpPr>
+        <p:spPr>
+          <a:xfrm>
+            <a:off x="6583680" y="1783080"/>
+            <a:ext cx="4754880" cy="548640"/>
+          </a:xfrm>
+          <a:prstGeom prst="rect">
+            <a:avLst/>
+          </a:prstGeom>
+          <a:noFill/>
+          <a:ln/>
+        </p:spPr>
+        <p:txBody>
+          <a:bodyPr wrap="square" rtlCol="0" anchor="ctr"/>
+          <a:lstStyle/>
+          <a:p>
+            <a:pPr indent="0" marL="0">
+              <a:buNone/>
+            </a:pPr>
+            <a:r>
+              <a:rPr lang="en-US" sz="1350" b="1" dirty="0">
+                <a:solidFill>
+                  <a:srgbClr val="7A4D08"/>
+                </a:solidFill>
+                <a:latin typeface="Cambria" pitchFamily="34" charset="0"/>
+                <a:ea typeface="Cambria" pitchFamily="34" charset="-122"/>
+                <a:cs typeface="Cambria" pitchFamily="34" charset="-120"/>
+              </a:rPr>
+              <a:t>Error analysis: real FP/FN examples, not aggregate counts</a:t>
+            </a:r>
+            <a:endParaRPr lang="en-US" sz="1350" dirty="0"/>
+          </a:p>
+        </p:txBody>
+      </p:sp>
+      <p:sp>
+        <p:nvSpPr>
+          <p:cNvPr id="16" name="Text 14"/>
+          <p:cNvSpPr/>
+          <p:nvPr/>
+        </p:nvSpPr>
+        <p:spPr>
+          <a:xfrm>
+            <a:off x="6583680" y="2377440"/>
+            <a:ext cx="4754880" cy="1371600"/>
+          </a:xfrm>
+          <a:prstGeom prst="rect">
+            <a:avLst/>
+          </a:prstGeom>
+          <a:noFill/>
+          <a:ln/>
+        </p:spPr>
+        <p:txBody>
+          <a:bodyPr wrap="square" rtlCol="0" anchor="ctr"/>
+          <a:lstStyle/>
+          <a:p>
+            <a:pPr indent="0" marL="0">
+              <a:buNone/>
+            </a:pPr>
+            <a:r>
+              <a:rPr lang="en-US" sz="1150" dirty="0">
+                <a:solidFill>
+                  <a:srgbClr val="7A4D08"/>
+                </a:solidFill>
+                <a:latin typeface="Calibri" pitchFamily="34" charset="0"/>
+                <a:ea typeface="Calibri" pitchFamily="34" charset="-122"/>
+                <a:cs typeface="Calibri" pitchFamily="34" charset="-120"/>
+              </a:rPr>
+              <a:t>eval/error_analysis.py pulls real spans with surrounding document context. Most FPs confirmed the known out-of-taxonomy story. One systematic FN pattern was new — see next slide.</a:t>
+            </a:r>
+            <a:endParaRPr lang="en-US" sz="1150" dirty="0"/>
+          </a:p>
+        </p:txBody>
+      </p:sp>
+      <p:sp>
+        <p:nvSpPr>
+          <p:cNvPr id="17" name="Shape 15"/>
+          <p:cNvSpPr/>
+          <p:nvPr/>
+        </p:nvSpPr>
+        <p:spPr>
+          <a:xfrm>
+            <a:off x="548640" y="4617720"/>
+            <a:ext cx="11064240" cy="1371600"/>
+          </a:xfrm>
+          <a:prstGeom prst="roundRect">
+            <a:avLst>
+              <a:gd name="adj" fmla="val 5333"/>
+            </a:avLst>
+          </a:prstGeom>
+          <a:solidFill>
+            <a:srgbClr val="E1F5EE"/>
+          </a:solidFill>
+          <a:ln w="12700">
+            <a:solidFill>
+              <a:srgbClr val="E1F5EE"/>
+            </a:solidFill>
+            <a:prstDash val="solid"/>
+          </a:ln>
+        </p:spPr>
+      </p:sp>
+      <p:sp>
+        <p:nvSpPr>
+          <p:cNvPr id="18" name="Text 16"/>
+          <p:cNvSpPr/>
+          <p:nvPr/>
+        </p:nvSpPr>
+        <p:spPr>
+          <a:xfrm>
+            <a:off x="822960" y="4617720"/>
+            <a:ext cx="10515600" cy="1371600"/>
+          </a:xfrm>
+          <a:prstGeom prst="rect">
+            <a:avLst/>
+          </a:prstGeom>
+          <a:noFill/>
+          <a:ln/>
+        </p:spPr>
+        <p:txBody>
+          <a:bodyPr wrap="square" rtlCol="0" anchor="ctr"/>
+          <a:lstStyle/>
+          <a:p>
+            <a:pPr indent="0" marL="0">
+              <a:buNone/>
+            </a:pPr>
+            <a:r>
+              <a:rPr lang="en-US" sz="1300" i="1" dirty="0">
+                <a:solidFill>
+                  <a:srgbClr val="0D5040"/>
+                </a:solidFill>
+                <a:latin typeface="Calibri" pitchFamily="34" charset="0"/>
+                <a:ea typeface="Calibri" pitchFamily="34" charset="-122"/>
+                <a:cs typeface="Calibri" pitchFamily="34" charset="-120"/>
+              </a:rPr>
+              <a:t>Both scripts run against the real 350-document Presidio-backend set — evidence, not estimation. Viewable live in the Streamlit UI's Evaluation dashboard.</a:t>
+            </a:r>
+            <a:endParaRPr lang="en-US" sz="1300" dirty="0"/>
+          </a:p>
+        </p:txBody>
+      </p:sp>
+      <p:sp>
+        <p:nvSpPr>
+          <p:cNvPr id="19" name="Text 17"/>
+          <p:cNvSpPr/>
+          <p:nvPr/>
+        </p:nvSpPr>
+        <p:spPr>
+          <a:xfrm>
+            <a:off x="11612880" y="6492240"/>
+            <a:ext cx="457200" cy="274320"/>
+          </a:xfrm>
+          <a:prstGeom prst="rect">
+            <a:avLst/>
+          </a:prstGeom>
+          <a:noFill/>
+          <a:ln/>
+        </p:spPr>
+        <p:txBody>
+          <a:bodyPr wrap="square" rtlCol="0" anchor="ctr"/>
+          <a:lstStyle/>
+          <a:p>
+            <a:pPr algn="r" indent="0" marL="0">
+              <a:buNone/>
+            </a:pPr>
+            <a:r>
+              <a:rPr lang="en-US" sz="1000" dirty="0">
+                <a:solidFill>
+                  <a:srgbClr val="5F5E5A"/>
+                </a:solidFill>
+                <a:latin typeface="Calibri" pitchFamily="34" charset="0"/>
+                <a:ea typeface="Calibri" pitchFamily="34" charset="-122"/>
+                <a:cs typeface="Calibri" pitchFamily="34" charset="-120"/>
+              </a:rPr>
+              <a:t>10</a:t>
+            </a:r>
+            <a:endParaRPr lang="en-US" sz="1000" dirty="0"/>
+          </a:p>
+        </p:txBody>
+      </p:sp>
+    </p:spTree>
+  </p:cSld>
+  <p:clrMapOvr>
+    <a:masterClrMapping/>
+  </p:clrMapOvr>
+</p:sld>
+</file>
+
+<file path=ppt/slides/slide11.xml><?xml version="1.0" encoding="utf-8"?>
 <p:sld xmlns:a="http://schemas.openxmlformats.org/drawingml/2006/main" xmlns:r="http://schemas.openxmlformats.org/officeDocument/2006/relationships" xmlns:p="http://schemas.openxmlformats.org/presentationml/2006/main">
   <p:cSld name="Slide 10">
     <p:bg>
@@ -3631,7 +4353,7 @@
 </p:sld>
 </file>
 
-<file path=ppt/slides/slide11.xml><?xml version="1.0" encoding="utf-8"?>
+<file path=ppt/slides/slide12.xml><?xml version="1.0" encoding="utf-8"?>
 <p:sld xmlns:a="http://schemas.openxmlformats.org/drawingml/2006/main" xmlns:r="http://schemas.openxmlformats.org/officeDocument/2006/relationships" xmlns:p="http://schemas.openxmlformats.org/presentationml/2006/main">
   <p:cSld name="Slide 11">
     <p:bg>
@@ -4350,7 +5072,7 @@
 </p:sld>
 </file>
 
-<file path=ppt/slides/slide12.xml><?xml version="1.0" encoding="utf-8"?>
+<file path=ppt/slides/slide13.xml><?xml version="1.0" encoding="utf-8"?>
 <p:sld xmlns:a="http://schemas.openxmlformats.org/drawingml/2006/main" xmlns:r="http://schemas.openxmlformats.org/officeDocument/2006/relationships" xmlns:p="http://schemas.openxmlformats.org/presentationml/2006/main">
   <p:cSld name="Slide 12">
     <p:bg>
@@ -4844,7 +5566,1714 @@
 </p:sld>
 </file>
 
-<file path=ppt/slides/slide13.xml><?xml version="1.0" encoding="utf-8"?>
+<file path=ppt/slides/slide14.xml><?xml version="1.0" encoding="utf-8"?>
+<p:sld xmlns:a="http://schemas.openxmlformats.org/drawingml/2006/main" xmlns:r="http://schemas.openxmlformats.org/officeDocument/2006/relationships" xmlns:p="http://schemas.openxmlformats.org/presentationml/2006/main">
+  <p:cSld name="Slide 11">
+    <p:bg>
+      <p:bgPr>
+        <a:solidFill>
+          <a:srgbClr val="FFFFFF"/>
+        </a:solidFill>
+      </p:bgPr>
+    </p:bg>
+    <p:spTree>
+      <p:nvGrpSpPr>
+        <p:cNvPr id="1" name=""/>
+        <p:cNvGrpSpPr/>
+        <p:nvPr/>
+      </p:nvGrpSpPr>
+      <p:grpSpPr>
+        <a:xfrm>
+          <a:off x="0" y="0"/>
+          <a:ext cx="0" cy="0"/>
+          <a:chOff x="0" y="0"/>
+          <a:chExt cx="0" cy="0"/>
+        </a:xfrm>
+      </p:grpSpPr>
+      <p:sp>
+        <p:nvSpPr>
+          <p:cNvPr id="2" name="Text 0"/>
+          <p:cNvSpPr/>
+          <p:nvPr/>
+        </p:nvSpPr>
+        <p:spPr>
+          <a:xfrm>
+            <a:off x="548640" y="365760"/>
+            <a:ext cx="7315200" cy="320040"/>
+          </a:xfrm>
+          <a:prstGeom prst="rect">
+            <a:avLst/>
+          </a:prstGeom>
+          <a:noFill/>
+          <a:ln/>
+        </p:spPr>
+        <p:txBody>
+          <a:bodyPr wrap="square" rtlCol="0" anchor="ctr"/>
+          <a:lstStyle/>
+          <a:p>
+            <a:pPr indent="0" marL="0">
+              <a:buNone/>
+            </a:pPr>
+            <a:r>
+              <a:rPr lang="en-US" sz="1200" b="1" spc="200" kern="0" dirty="0">
+                <a:solidFill>
+                  <a:srgbClr val="0F6E56"/>
+                </a:solidFill>
+                <a:latin typeface="Calibri" pitchFamily="34" charset="0"/>
+                <a:ea typeface="Calibri" pitchFamily="34" charset="-122"/>
+                <a:cs typeface="Calibri" pitchFamily="34" charset="-120"/>
+              </a:rPr>
+              <a:t>REAL BUGS FOUND &amp; FIXED — PART 4</a:t>
+            </a:r>
+            <a:endParaRPr lang="en-US" sz="1200" dirty="0"/>
+          </a:p>
+        </p:txBody>
+      </p:sp>
+      <p:sp>
+        <p:nvSpPr>
+          <p:cNvPr id="3" name="Text 1"/>
+          <p:cNvSpPr/>
+          <p:nvPr/>
+        </p:nvSpPr>
+        <p:spPr>
+          <a:xfrm>
+            <a:off x="548640" y="640080"/>
+            <a:ext cx="11064240" cy="822960"/>
+          </a:xfrm>
+          <a:prstGeom prst="rect">
+            <a:avLst/>
+          </a:prstGeom>
+          <a:noFill/>
+          <a:ln/>
+        </p:spPr>
+        <p:txBody>
+          <a:bodyPr wrap="square" rtlCol="0" anchor="ctr"/>
+          <a:lstStyle/>
+          <a:p>
+            <a:pPr algn="l" indent="0" marL="0">
+              <a:buNone/>
+            </a:pPr>
+            <a:r>
+              <a:rPr lang="en-US" sz="3000" b="1" dirty="0">
+                <a:solidFill>
+                  <a:srgbClr val="1F4E79"/>
+                </a:solidFill>
+                <a:latin typeface="Cambria" pitchFamily="34" charset="0"/>
+                <a:ea typeface="Cambria" pitchFamily="34" charset="-122"/>
+                <a:cs typeface="Cambria" pitchFamily="34" charset="-120"/>
+              </a:rPr>
+              <a:t>Both found through real end-to-end testing this session, not code review</a:t>
+            </a:r>
+            <a:endParaRPr lang="en-US" sz="3000" dirty="0"/>
+          </a:p>
+        </p:txBody>
+      </p:sp>
+      <p:sp>
+        <p:nvSpPr>
+          <p:cNvPr id="4" name="Shape 2"/>
+          <p:cNvSpPr/>
+          <p:nvPr/>
+        </p:nvSpPr>
+        <p:spPr>
+          <a:xfrm>
+            <a:off x="548640" y="1600200"/>
+            <a:ext cx="5394960" cy="4160520"/>
+          </a:xfrm>
+          <a:prstGeom prst="roundRect">
+            <a:avLst>
+              <a:gd name="adj" fmla="val 1758"/>
+            </a:avLst>
+          </a:prstGeom>
+          <a:solidFill>
+            <a:srgbClr val="F7F9FB"/>
+          </a:solidFill>
+          <a:ln w="12700">
+            <a:solidFill>
+              <a:srgbClr val="E3E8EC"/>
+            </a:solidFill>
+            <a:prstDash val="solid"/>
+          </a:ln>
+          <a:effectLst>
+            <a:outerShdw sx="100000" sy="100000" kx="0" ky="0" algn="bl" rotWithShape="0" blurRad="76200" dist="25400" dir="5400000">
+              <a:srgbClr val="999999">
+                <a:alpha val="18000"/>
+              </a:srgbClr>
+            </a:outerShdw>
+          </a:effectLst>
+        </p:spPr>
+      </p:sp>
+      <p:sp>
+        <p:nvSpPr>
+          <p:cNvPr id="5" name="Shape 3"/>
+          <p:cNvSpPr/>
+          <p:nvPr/>
+        </p:nvSpPr>
+        <p:spPr>
+          <a:xfrm>
+            <a:off x="822960" y="1874520"/>
+            <a:ext cx="457200" cy="457200"/>
+          </a:xfrm>
+          <a:prstGeom prst="ellipse">
+            <a:avLst/>
+          </a:prstGeom>
+          <a:solidFill>
+            <a:srgbClr val="993C1D"/>
+          </a:solidFill>
+          <a:ln/>
+        </p:spPr>
+      </p:sp>
+      <p:sp>
+        <p:nvSpPr>
+          <p:cNvPr id="6" name="Text 4"/>
+          <p:cNvSpPr/>
+          <p:nvPr/>
+        </p:nvSpPr>
+        <p:spPr>
+          <a:xfrm>
+            <a:off x="822960" y="1874520"/>
+            <a:ext cx="457200" cy="457200"/>
+          </a:xfrm>
+          <a:prstGeom prst="rect">
+            <a:avLst/>
+          </a:prstGeom>
+          <a:noFill/>
+          <a:ln/>
+        </p:spPr>
+        <p:txBody>
+          <a:bodyPr wrap="square" rtlCol="0" anchor="ctr"/>
+          <a:lstStyle/>
+          <a:p>
+            <a:pPr algn="ctr" indent="0" marL="0">
+              <a:buNone/>
+            </a:pPr>
+            <a:r>
+              <a:rPr lang="en-US" sz="1600" b="1" dirty="0">
+                <a:solidFill>
+                  <a:srgbClr val="FFFFFF"/>
+                </a:solidFill>
+                <a:latin typeface="Cambria" pitchFamily="34" charset="0"/>
+                <a:ea typeface="Cambria" pitchFamily="34" charset="-122"/>
+                <a:cs typeface="Cambria" pitchFamily="34" charset="-120"/>
+              </a:rPr>
+              <a:t>6</a:t>
+            </a:r>
+            <a:endParaRPr lang="en-US" sz="1600" dirty="0"/>
+          </a:p>
+        </p:txBody>
+      </p:sp>
+      <p:sp>
+        <p:nvSpPr>
+          <p:cNvPr id="7" name="Shape 5"/>
+          <p:cNvSpPr/>
+          <p:nvPr/>
+        </p:nvSpPr>
+        <p:spPr>
+          <a:xfrm>
+            <a:off x="1463040" y="1920240"/>
+            <a:ext cx="2103120" cy="365760"/>
+          </a:xfrm>
+          <a:prstGeom prst="roundRect">
+            <a:avLst>
+              <a:gd name="adj" fmla="val 15000"/>
+            </a:avLst>
+          </a:prstGeom>
+          <a:solidFill>
+            <a:srgbClr val="EBF3FB"/>
+          </a:solidFill>
+          <a:ln/>
+        </p:spPr>
+      </p:sp>
+      <p:sp>
+        <p:nvSpPr>
+          <p:cNvPr id="8" name="Text 6"/>
+          <p:cNvSpPr/>
+          <p:nvPr/>
+        </p:nvSpPr>
+        <p:spPr>
+          <a:xfrm>
+            <a:off x="1463040" y="1920240"/>
+            <a:ext cx="2103120" cy="365760"/>
+          </a:xfrm>
+          <a:prstGeom prst="rect">
+            <a:avLst/>
+          </a:prstGeom>
+          <a:noFill/>
+          <a:ln/>
+        </p:spPr>
+        <p:txBody>
+          <a:bodyPr wrap="square" rtlCol="0" anchor="ctr"/>
+          <a:lstStyle/>
+          <a:p>
+            <a:pPr algn="ctr" indent="0" marL="0">
+              <a:buNone/>
+            </a:pPr>
+            <a:r>
+              <a:rPr lang="en-US" sz="1000" b="1" dirty="0">
+                <a:solidFill>
+                  <a:srgbClr val="1F4E79"/>
+                </a:solidFill>
+                <a:latin typeface="Calibri" pitchFamily="34" charset="0"/>
+                <a:ea typeface="Calibri" pitchFamily="34" charset="-122"/>
+                <a:cs typeface="Calibri" pitchFamily="34" charset="-120"/>
+              </a:rPr>
+              <a:t>CUMULATIVE SPAN REPORTING</a:t>
+            </a:r>
+            <a:endParaRPr lang="en-US" sz="1000" dirty="0"/>
+          </a:p>
+        </p:txBody>
+      </p:sp>
+      <p:sp>
+        <p:nvSpPr>
+          <p:cNvPr id="9" name="Text 7"/>
+          <p:cNvSpPr/>
+          <p:nvPr/>
+        </p:nvSpPr>
+        <p:spPr>
+          <a:xfrm>
+            <a:off x="822960" y="2468880"/>
+            <a:ext cx="4846320" cy="594360"/>
+          </a:xfrm>
+          <a:prstGeom prst="rect">
+            <a:avLst/>
+          </a:prstGeom>
+          <a:noFill/>
+          <a:ln/>
+        </p:spPr>
+        <p:txBody>
+          <a:bodyPr wrap="square" rtlCol="0" anchor="ctr"/>
+          <a:lstStyle/>
+          <a:p>
+            <a:pPr indent="0" marL="0">
+              <a:buNone/>
+            </a:pPr>
+            <a:r>
+              <a:rPr lang="en-US" sz="1500" b="1" dirty="0">
+                <a:solidFill>
+                  <a:srgbClr val="1A1A18"/>
+                </a:solidFill>
+                <a:latin typeface="Cambria" pitchFamily="34" charset="0"/>
+                <a:ea typeface="Cambria" pitchFamily="34" charset="-122"/>
+                <a:cs typeface="Cambria" pitchFamily="34" charset="-120"/>
+              </a:rPr>
+              <a:t>A retry pass silently discarded everything found earlier in the run</a:t>
+            </a:r>
+            <a:endParaRPr lang="en-US" sz="1500" dirty="0"/>
+          </a:p>
+        </p:txBody>
+      </p:sp>
+      <p:sp>
+        <p:nvSpPr>
+          <p:cNvPr id="10" name="Text 8"/>
+          <p:cNvSpPr/>
+          <p:nvPr/>
+        </p:nvSpPr>
+        <p:spPr>
+          <a:xfrm>
+            <a:off x="822960" y="3108960"/>
+            <a:ext cx="4846320" cy="1463040"/>
+          </a:xfrm>
+          <a:prstGeom prst="rect">
+            <a:avLst/>
+          </a:prstGeom>
+          <a:noFill/>
+          <a:ln/>
+        </p:spPr>
+        <p:txBody>
+          <a:bodyPr wrap="square" rtlCol="0" anchor="ctr"/>
+          <a:lstStyle/>
+          <a:p>
+            <a:pPr indent="0" marL="0">
+              <a:buNone/>
+            </a:pPr>
+            <a:r>
+              <a:rPr lang="en-US" sz="1100" dirty="0">
+                <a:solidFill>
+                  <a:srgbClr val="5F5E5A"/>
+                </a:solidFill>
+                <a:latin typeface="Calibri" pitchFamily="34" charset="0"/>
+                <a:ea typeface="Calibri" pitchFamily="34" charset="-122"/>
+                <a:cs typeface="Calibri" pitchFamily="34" charset="-120"/>
+              </a:rPr>
+              <a:t>Submitting the PDF sample through the Streamlit UI showed only 1 PHI span detected, with MRN and PERSON reported as missing — yet the redacted output clearly showed both redacted. PHIDetectionAgent re-scans only the current redacted_text on a retry (by design), but PHIValidationAgent and AuditReportAgent read phi_spans, which gets replaced, not merged, on every pass.</a:t>
+            </a:r>
+            <a:endParaRPr lang="en-US" sz="1100" dirty="0"/>
+          </a:p>
+        </p:txBody>
+      </p:sp>
+      <p:sp>
+        <p:nvSpPr>
+          <p:cNvPr id="11" name="Text 9"/>
+          <p:cNvSpPr/>
+          <p:nvPr/>
+        </p:nvSpPr>
+        <p:spPr>
+          <a:xfrm>
+            <a:off x="822960" y="4663440"/>
+            <a:ext cx="4846320" cy="960120"/>
+          </a:xfrm>
+          <a:prstGeom prst="rect">
+            <a:avLst/>
+          </a:prstGeom>
+          <a:noFill/>
+          <a:ln/>
+        </p:spPr>
+        <p:txBody>
+          <a:bodyPr wrap="square" rtlCol="0" anchor="ctr"/>
+          <a:lstStyle/>
+          <a:p>
+            <a:pPr indent="0" marL="0">
+              <a:buNone/>
+            </a:pPr>
+            <a:r>
+              <a:rPr lang="en-US" sz="1100" b="1" dirty="0">
+                <a:solidFill>
+                  <a:srgbClr val="0F6E56"/>
+                </a:solidFill>
+                <a:latin typeface="Calibri" pitchFamily="34" charset="0"/>
+                <a:ea typeface="Calibri" pitchFamily="34" charset="-122"/>
+                <a:cs typeface="Calibri" pitchFamily="34" charset="-120"/>
+              </a:rPr>
+              <a:t>Fix: </a:t>
+            </a:r>
+            <a:pPr indent="0" marL="0">
+              <a:buNone/>
+            </a:pPr>
+            <a:r>
+              <a:rPr lang="en-US" sz="1100" dirty="0">
+                <a:solidFill>
+                  <a:srgbClr val="0D5040"/>
+                </a:solidFill>
+                <a:latin typeface="Calibri" pitchFamily="34" charset="0"/>
+                <a:ea typeface="Calibri" pitchFamily="34" charset="-122"/>
+                <a:cs typeface="Calibri" pitchFamily="34" charset="-120"/>
+              </a:rPr>
+              <a:t>Added all_detected_spans to GraphState, an accumulator PHIDetectionAgent appends to on every pass. Confirmed via 2 new regression tests reproducing the exact scenario; 53 tests passing at the time.</a:t>
+            </a:r>
+            <a:endParaRPr lang="en-US" sz="1100" dirty="0"/>
+          </a:p>
+        </p:txBody>
+      </p:sp>
+      <p:sp>
+        <p:nvSpPr>
+          <p:cNvPr id="12" name="Shape 10"/>
+          <p:cNvSpPr/>
+          <p:nvPr/>
+        </p:nvSpPr>
+        <p:spPr>
+          <a:xfrm>
+            <a:off x="6217920" y="1600200"/>
+            <a:ext cx="5394960" cy="4160520"/>
+          </a:xfrm>
+          <a:prstGeom prst="roundRect">
+            <a:avLst>
+              <a:gd name="adj" fmla="val 1758"/>
+            </a:avLst>
+          </a:prstGeom>
+          <a:solidFill>
+            <a:srgbClr val="F7F9FB"/>
+          </a:solidFill>
+          <a:ln w="12700">
+            <a:solidFill>
+              <a:srgbClr val="E3E8EC"/>
+            </a:solidFill>
+            <a:prstDash val="solid"/>
+          </a:ln>
+          <a:effectLst>
+            <a:outerShdw sx="100000" sy="100000" kx="0" ky="0" algn="bl" rotWithShape="0" blurRad="76200" dist="25400" dir="5400000">
+              <a:srgbClr val="999999">
+                <a:alpha val="18000"/>
+              </a:srgbClr>
+            </a:outerShdw>
+          </a:effectLst>
+        </p:spPr>
+      </p:sp>
+      <p:sp>
+        <p:nvSpPr>
+          <p:cNvPr id="13" name="Shape 11"/>
+          <p:cNvSpPr/>
+          <p:nvPr/>
+        </p:nvSpPr>
+        <p:spPr>
+          <a:xfrm>
+            <a:off x="6492240" y="1874520"/>
+            <a:ext cx="457200" cy="457200"/>
+          </a:xfrm>
+          <a:prstGeom prst="ellipse">
+            <a:avLst/>
+          </a:prstGeom>
+          <a:solidFill>
+            <a:srgbClr val="993C1D"/>
+          </a:solidFill>
+          <a:ln/>
+        </p:spPr>
+      </p:sp>
+      <p:sp>
+        <p:nvSpPr>
+          <p:cNvPr id="14" name="Text 12"/>
+          <p:cNvSpPr/>
+          <p:nvPr/>
+        </p:nvSpPr>
+        <p:spPr>
+          <a:xfrm>
+            <a:off x="6492240" y="1874520"/>
+            <a:ext cx="457200" cy="457200"/>
+          </a:xfrm>
+          <a:prstGeom prst="rect">
+            <a:avLst/>
+          </a:prstGeom>
+          <a:noFill/>
+          <a:ln/>
+        </p:spPr>
+        <p:txBody>
+          <a:bodyPr wrap="square" rtlCol="0" anchor="ctr"/>
+          <a:lstStyle/>
+          <a:p>
+            <a:pPr algn="ctr" indent="0" marL="0">
+              <a:buNone/>
+            </a:pPr>
+            <a:r>
+              <a:rPr lang="en-US" sz="1600" b="1" dirty="0">
+                <a:solidFill>
+                  <a:srgbClr val="FFFFFF"/>
+                </a:solidFill>
+                <a:latin typeface="Cambria" pitchFamily="34" charset="0"/>
+                <a:ea typeface="Cambria" pitchFamily="34" charset="-122"/>
+                <a:cs typeface="Cambria" pitchFamily="34" charset="-120"/>
+              </a:rPr>
+              <a:t>7</a:t>
+            </a:r>
+            <a:endParaRPr lang="en-US" sz="1600" dirty="0"/>
+          </a:p>
+        </p:txBody>
+      </p:sp>
+      <p:sp>
+        <p:nvSpPr>
+          <p:cNvPr id="15" name="Shape 13"/>
+          <p:cNvSpPr/>
+          <p:nvPr/>
+        </p:nvSpPr>
+        <p:spPr>
+          <a:xfrm>
+            <a:off x="7132320" y="1920240"/>
+            <a:ext cx="2103120" cy="365760"/>
+          </a:xfrm>
+          <a:prstGeom prst="roundRect">
+            <a:avLst>
+              <a:gd name="adj" fmla="val 15000"/>
+            </a:avLst>
+          </a:prstGeom>
+          <a:solidFill>
+            <a:srgbClr val="FAECE7"/>
+          </a:solidFill>
+          <a:ln/>
+        </p:spPr>
+      </p:sp>
+      <p:sp>
+        <p:nvSpPr>
+          <p:cNvPr id="16" name="Text 14"/>
+          <p:cNvSpPr/>
+          <p:nvPr/>
+        </p:nvSpPr>
+        <p:spPr>
+          <a:xfrm>
+            <a:off x="7132320" y="1920240"/>
+            <a:ext cx="2103120" cy="365760"/>
+          </a:xfrm>
+          <a:prstGeom prst="rect">
+            <a:avLst/>
+          </a:prstGeom>
+          <a:noFill/>
+          <a:ln/>
+        </p:spPr>
+        <p:txBody>
+          <a:bodyPr wrap="square" rtlCol="0" anchor="ctr"/>
+          <a:lstStyle/>
+          <a:p>
+            <a:pPr algn="ctr" indent="0" marL="0">
+              <a:buNone/>
+            </a:pPr>
+            <a:r>
+              <a:rPr lang="en-US" sz="1000" b="1" dirty="0">
+                <a:solidFill>
+                  <a:srgbClr val="993C1D"/>
+                </a:solidFill>
+                <a:latin typeface="Calibri" pitchFamily="34" charset="0"/>
+                <a:ea typeface="Calibri" pitchFamily="34" charset="-122"/>
+                <a:cs typeface="Calibri" pitchFamily="34" charset="-120"/>
+              </a:rPr>
+              <a:t>AMBIGUOUS IDENTIFIER + THRESHOLD KEY</a:t>
+            </a:r>
+            <a:endParaRPr lang="en-US" sz="1000" dirty="0"/>
+          </a:p>
+        </p:txBody>
+      </p:sp>
+      <p:sp>
+        <p:nvSpPr>
+          <p:cNvPr id="17" name="Text 15"/>
+          <p:cNvSpPr/>
+          <p:nvPr/>
+        </p:nvSpPr>
+        <p:spPr>
+          <a:xfrm>
+            <a:off x="6492240" y="2468880"/>
+            <a:ext cx="4846320" cy="594360"/>
+          </a:xfrm>
+          <a:prstGeom prst="rect">
+            <a:avLst/>
+          </a:prstGeom>
+          <a:noFill/>
+          <a:ln/>
+        </p:spPr>
+        <p:txBody>
+          <a:bodyPr wrap="square" rtlCol="0" anchor="ctr"/>
+          <a:lstStyle/>
+          <a:p>
+            <a:pPr indent="0" marL="0">
+              <a:buNone/>
+            </a:pPr>
+            <a:r>
+              <a:rPr lang="en-US" sz="1500" b="1" dirty="0">
+                <a:solidFill>
+                  <a:srgbClr val="1A1A18"/>
+                </a:solidFill>
+                <a:latin typeface="Cambria" pitchFamily="34" charset="0"/>
+                <a:ea typeface="Cambria" pitchFamily="34" charset="-122"/>
+                <a:cs typeface="Cambria" pitchFamily="34" charset="-120"/>
+              </a:rPr>
+              <a:t>The human-review demo sample didn't actually trigger review</a:t>
+            </a:r>
+            <a:endParaRPr lang="en-US" sz="1500" dirty="0"/>
+          </a:p>
+        </p:txBody>
+      </p:sp>
+      <p:sp>
+        <p:nvSpPr>
+          <p:cNvPr id="18" name="Text 16"/>
+          <p:cNvSpPr/>
+          <p:nvPr/>
+        </p:nvSpPr>
+        <p:spPr>
+          <a:xfrm>
+            <a:off x="6492240" y="3108960"/>
+            <a:ext cx="4846320" cy="1463040"/>
+          </a:xfrm>
+          <a:prstGeom prst="rect">
+            <a:avLst/>
+          </a:prstGeom>
+          <a:noFill/>
+          <a:ln/>
+        </p:spPr>
+        <p:txBody>
+          <a:bodyPr wrap="square" rtlCol="0" anchor="ctr"/>
+          <a:lstStyle/>
+          <a:p>
+            <a:pPr indent="0" marL="0">
+              <a:buNone/>
+            </a:pPr>
+            <a:r>
+              <a:rPr lang="en-US" sz="1100" dirty="0">
+                <a:solidFill>
+                  <a:srgbClr val="5F5E5A"/>
+                </a:solidFill>
+                <a:latin typeface="Calibri" pitchFamily="34" charset="0"/>
+                <a:ea typeface="Calibri" pitchFamily="34" charset="-122"/>
+                <a:cs typeface="Calibri" pitchFamily="34" charset="-120"/>
+              </a:rPr>
+              <a:t>An earlier attempt used an unlabeled phone number, guessing it would score low — real testing proved that wrong (a custom recognizer scores any 10-digit match 0.75, well above threshold). Also found: CONFIDENCE_THRESHOLDS only had a “SSN” key; Presidio's real entity type is “US_SSN”, silently falling back to a 0.7 default instead of the intended 0.6.</a:t>
+            </a:r>
+            <a:endParaRPr lang="en-US" sz="1100" dirty="0"/>
+          </a:p>
+        </p:txBody>
+      </p:sp>
+      <p:sp>
+        <p:nvSpPr>
+          <p:cNvPr id="19" name="Text 17"/>
+          <p:cNvSpPr/>
+          <p:nvPr/>
+        </p:nvSpPr>
+        <p:spPr>
+          <a:xfrm>
+            <a:off x="6492240" y="4663440"/>
+            <a:ext cx="4846320" cy="960120"/>
+          </a:xfrm>
+          <a:prstGeom prst="rect">
+            <a:avLst/>
+          </a:prstGeom>
+          <a:noFill/>
+          <a:ln/>
+        </p:spPr>
+        <p:txBody>
+          <a:bodyPr wrap="square" rtlCol="0" anchor="ctr"/>
+          <a:lstStyle/>
+          <a:p>
+            <a:pPr indent="0" marL="0">
+              <a:buNone/>
+            </a:pPr>
+            <a:r>
+              <a:rPr lang="en-US" sz="1100" b="1" dirty="0">
+                <a:solidFill>
+                  <a:srgbClr val="0F6E56"/>
+                </a:solidFill>
+                <a:latin typeface="Calibri" pitchFamily="34" charset="0"/>
+                <a:ea typeface="Calibri" pitchFamily="34" charset="-122"/>
+                <a:cs typeface="Calibri" pitchFamily="34" charset="-120"/>
+              </a:rPr>
+              <a:t>Fix: </a:t>
+            </a:r>
+            <a:pPr indent="0" marL="0">
+              <a:buNone/>
+            </a:pPr>
+            <a:r>
+              <a:rPr lang="en-US" sz="1100" dirty="0">
+                <a:solidFill>
+                  <a:srgbClr val="0D5040"/>
+                </a:solidFill>
+                <a:latin typeface="Calibri" pitchFamily="34" charset="0"/>
+                <a:ea typeface="Calibri" pitchFamily="34" charset="-122"/>
+                <a:cs typeface="Calibri" pitchFamily="34" charset="-120"/>
+              </a:rPr>
+              <a:t>Fixed by testing real Presidio recognizers directly: a bare 9-digit number scores 0.4 (below 0.65). Added it to the sample doc and the missing “US_SSN” threshold key. Confirmed live: human_review_invoked: true.</a:t>
+            </a:r>
+            <a:endParaRPr lang="en-US" sz="1100" dirty="0"/>
+          </a:p>
+        </p:txBody>
+      </p:sp>
+      <p:sp>
+        <p:nvSpPr>
+          <p:cNvPr id="20" name="Text 18"/>
+          <p:cNvSpPr/>
+          <p:nvPr/>
+        </p:nvSpPr>
+        <p:spPr>
+          <a:xfrm>
+            <a:off x="11612880" y="6492240"/>
+            <a:ext cx="457200" cy="274320"/>
+          </a:xfrm>
+          <a:prstGeom prst="rect">
+            <a:avLst/>
+          </a:prstGeom>
+          <a:noFill/>
+          <a:ln/>
+        </p:spPr>
+        <p:txBody>
+          <a:bodyPr wrap="square" rtlCol="0" anchor="ctr"/>
+          <a:lstStyle/>
+          <a:p>
+            <a:pPr algn="r" indent="0" marL="0">
+              <a:buNone/>
+            </a:pPr>
+            <a:r>
+              <a:rPr lang="en-US" sz="1000" dirty="0">
+                <a:solidFill>
+                  <a:srgbClr val="5F5E5A"/>
+                </a:solidFill>
+                <a:latin typeface="Calibri" pitchFamily="34" charset="0"/>
+                <a:ea typeface="Calibri" pitchFamily="34" charset="-122"/>
+                <a:cs typeface="Calibri" pitchFamily="34" charset="-120"/>
+              </a:rPr>
+              <a:t>14</a:t>
+            </a:r>
+            <a:endParaRPr lang="en-US" sz="1000" dirty="0"/>
+          </a:p>
+        </p:txBody>
+      </p:sp>
+    </p:spTree>
+  </p:cSld>
+  <p:clrMapOvr>
+    <a:masterClrMapping/>
+  </p:clrMapOvr>
+</p:sld>
+</file>
+
+<file path=ppt/slides/slide15.xml><?xml version="1.0" encoding="utf-8"?>
+<p:sld xmlns:a="http://schemas.openxmlformats.org/drawingml/2006/main" xmlns:r="http://schemas.openxmlformats.org/officeDocument/2006/relationships" xmlns:p="http://schemas.openxmlformats.org/presentationml/2006/main">
+  <p:cSld name="Slide 12">
+    <p:bg>
+      <p:bgPr>
+        <a:solidFill>
+          <a:srgbClr val="FFFFFF"/>
+        </a:solidFill>
+      </p:bgPr>
+    </p:bg>
+    <p:spTree>
+      <p:nvGrpSpPr>
+        <p:cNvPr id="1" name=""/>
+        <p:cNvGrpSpPr/>
+        <p:nvPr/>
+      </p:nvGrpSpPr>
+      <p:grpSpPr>
+        <a:xfrm>
+          <a:off x="0" y="0"/>
+          <a:ext cx="0" cy="0"/>
+          <a:chOff x="0" y="0"/>
+          <a:chExt cx="0" cy="0"/>
+        </a:xfrm>
+      </p:grpSpPr>
+      <p:sp>
+        <p:nvSpPr>
+          <p:cNvPr id="2" name="Text 0"/>
+          <p:cNvSpPr/>
+          <p:nvPr/>
+        </p:nvSpPr>
+        <p:spPr>
+          <a:xfrm>
+            <a:off x="548640" y="365760"/>
+            <a:ext cx="7315200" cy="320040"/>
+          </a:xfrm>
+          <a:prstGeom prst="rect">
+            <a:avLst/>
+          </a:prstGeom>
+          <a:noFill/>
+          <a:ln/>
+        </p:spPr>
+        <p:txBody>
+          <a:bodyPr wrap="square" rtlCol="0" anchor="ctr"/>
+          <a:lstStyle/>
+          <a:p>
+            <a:pPr indent="0" marL="0">
+              <a:buNone/>
+            </a:pPr>
+            <a:r>
+              <a:rPr lang="en-US" sz="1200" b="1" spc="200" kern="0" dirty="0">
+                <a:solidFill>
+                  <a:srgbClr val="0F6E56"/>
+                </a:solidFill>
+                <a:latin typeface="Calibri" pitchFamily="34" charset="0"/>
+                <a:ea typeface="Calibri" pitchFamily="34" charset="-122"/>
+                <a:cs typeface="Calibri" pitchFamily="34" charset="-120"/>
+              </a:rPr>
+              <a:t>REAL BUGS FOUND &amp; FIXED — PART 5</a:t>
+            </a:r>
+            <a:endParaRPr lang="en-US" sz="1200" dirty="0"/>
+          </a:p>
+        </p:txBody>
+      </p:sp>
+      <p:sp>
+        <p:nvSpPr>
+          <p:cNvPr id="3" name="Text 1"/>
+          <p:cNvSpPr/>
+          <p:nvPr/>
+        </p:nvSpPr>
+        <p:spPr>
+          <a:xfrm>
+            <a:off x="548640" y="640080"/>
+            <a:ext cx="11064240" cy="822960"/>
+          </a:xfrm>
+          <a:prstGeom prst="rect">
+            <a:avLst/>
+          </a:prstGeom>
+          <a:noFill/>
+          <a:ln/>
+        </p:spPr>
+        <p:txBody>
+          <a:bodyPr wrap="square" rtlCol="0" anchor="ctr"/>
+          <a:lstStyle/>
+          <a:p>
+            <a:pPr algn="l" indent="0" marL="0">
+              <a:buNone/>
+            </a:pPr>
+            <a:r>
+              <a:rPr lang="en-US" sz="3000" b="1" dirty="0">
+                <a:solidFill>
+                  <a:srgbClr val="1F4E79"/>
+                </a:solidFill>
+                <a:latin typeface="Cambria" pitchFamily="34" charset="0"/>
+                <a:ea typeface="Cambria" pitchFamily="34" charset="-122"/>
+                <a:cs typeface="Cambria" pitchFamily="34" charset="-120"/>
+              </a:rPr>
+              <a:t>Found testing the live LLM classification backend end-to-end</a:t>
+            </a:r>
+            <a:endParaRPr lang="en-US" sz="3000" dirty="0"/>
+          </a:p>
+        </p:txBody>
+      </p:sp>
+      <p:sp>
+        <p:nvSpPr>
+          <p:cNvPr id="4" name="Shape 2"/>
+          <p:cNvSpPr/>
+          <p:nvPr/>
+        </p:nvSpPr>
+        <p:spPr>
+          <a:xfrm>
+            <a:off x="548640" y="1691640"/>
+            <a:ext cx="11064240" cy="1965960"/>
+          </a:xfrm>
+          <a:prstGeom prst="roundRect">
+            <a:avLst>
+              <a:gd name="adj" fmla="val 3721"/>
+            </a:avLst>
+          </a:prstGeom>
+          <a:solidFill>
+            <a:srgbClr val="F7F9FB"/>
+          </a:solidFill>
+          <a:ln w="12700">
+            <a:solidFill>
+              <a:srgbClr val="E3E8EC"/>
+            </a:solidFill>
+            <a:prstDash val="solid"/>
+          </a:ln>
+          <a:effectLst>
+            <a:outerShdw sx="100000" sy="100000" kx="0" ky="0" algn="bl" rotWithShape="0" blurRad="76200" dist="25400" dir="5400000">
+              <a:srgbClr val="999999">
+                <a:alpha val="18000"/>
+              </a:srgbClr>
+            </a:outerShdw>
+          </a:effectLst>
+        </p:spPr>
+      </p:sp>
+      <p:sp>
+        <p:nvSpPr>
+          <p:cNvPr id="5" name="Shape 3"/>
+          <p:cNvSpPr/>
+          <p:nvPr/>
+        </p:nvSpPr>
+        <p:spPr>
+          <a:xfrm>
+            <a:off x="822960" y="1965960"/>
+            <a:ext cx="457200" cy="457200"/>
+          </a:xfrm>
+          <a:prstGeom prst="ellipse">
+            <a:avLst/>
+          </a:prstGeom>
+          <a:solidFill>
+            <a:srgbClr val="993C1D"/>
+          </a:solidFill>
+          <a:ln/>
+        </p:spPr>
+      </p:sp>
+      <p:sp>
+        <p:nvSpPr>
+          <p:cNvPr id="6" name="Text 4"/>
+          <p:cNvSpPr/>
+          <p:nvPr/>
+        </p:nvSpPr>
+        <p:spPr>
+          <a:xfrm>
+            <a:off x="822960" y="1965960"/>
+            <a:ext cx="457200" cy="457200"/>
+          </a:xfrm>
+          <a:prstGeom prst="rect">
+            <a:avLst/>
+          </a:prstGeom>
+          <a:noFill/>
+          <a:ln/>
+        </p:spPr>
+        <p:txBody>
+          <a:bodyPr wrap="square" rtlCol="0" anchor="ctr"/>
+          <a:lstStyle/>
+          <a:p>
+            <a:pPr algn="ctr" indent="0" marL="0">
+              <a:buNone/>
+            </a:pPr>
+            <a:r>
+              <a:rPr lang="en-US" sz="1600" b="1" dirty="0">
+                <a:solidFill>
+                  <a:srgbClr val="FFFFFF"/>
+                </a:solidFill>
+                <a:latin typeface="Cambria" pitchFamily="34" charset="0"/>
+                <a:ea typeface="Cambria" pitchFamily="34" charset="-122"/>
+                <a:cs typeface="Cambria" pitchFamily="34" charset="-120"/>
+              </a:rPr>
+              <a:t>8</a:t>
+            </a:r>
+            <a:endParaRPr lang="en-US" sz="1600" dirty="0"/>
+          </a:p>
+        </p:txBody>
+      </p:sp>
+      <p:sp>
+        <p:nvSpPr>
+          <p:cNvPr id="7" name="Shape 5"/>
+          <p:cNvSpPr/>
+          <p:nvPr/>
+        </p:nvSpPr>
+        <p:spPr>
+          <a:xfrm>
+            <a:off x="1463040" y="2011680"/>
+            <a:ext cx="3017520" cy="365760"/>
+          </a:xfrm>
+          <a:prstGeom prst="roundRect">
+            <a:avLst>
+              <a:gd name="adj" fmla="val 15000"/>
+            </a:avLst>
+          </a:prstGeom>
+          <a:solidFill>
+            <a:srgbClr val="FAEEDA"/>
+          </a:solidFill>
+          <a:ln/>
+        </p:spPr>
+      </p:sp>
+      <p:sp>
+        <p:nvSpPr>
+          <p:cNvPr id="8" name="Text 6"/>
+          <p:cNvSpPr/>
+          <p:nvPr/>
+        </p:nvSpPr>
+        <p:spPr>
+          <a:xfrm>
+            <a:off x="1463040" y="2011680"/>
+            <a:ext cx="3017520" cy="365760"/>
+          </a:xfrm>
+          <a:prstGeom prst="rect">
+            <a:avLst/>
+          </a:prstGeom>
+          <a:noFill/>
+          <a:ln/>
+        </p:spPr>
+        <p:txBody>
+          <a:bodyPr wrap="square" rtlCol="0" anchor="ctr"/>
+          <a:lstStyle/>
+          <a:p>
+            <a:pPr algn="ctr" indent="0" marL="0">
+              <a:buNone/>
+            </a:pPr>
+            <a:r>
+              <a:rPr lang="en-US" sz="1000" b="1" dirty="0">
+                <a:solidFill>
+                  <a:srgbClr val="7A4D08"/>
+                </a:solidFill>
+                <a:latin typeface="Calibri" pitchFamily="34" charset="0"/>
+                <a:ea typeface="Calibri" pitchFamily="34" charset="-122"/>
+                <a:cs typeface="Calibri" pitchFamily="34" charset="-120"/>
+              </a:rPr>
+              <a:t>TEST-ISOLATION GAP</a:t>
+            </a:r>
+            <a:endParaRPr lang="en-US" sz="1000" dirty="0"/>
+          </a:p>
+        </p:txBody>
+      </p:sp>
+      <p:sp>
+        <p:nvSpPr>
+          <p:cNvPr id="9" name="Text 7"/>
+          <p:cNvSpPr/>
+          <p:nvPr/>
+        </p:nvSpPr>
+        <p:spPr>
+          <a:xfrm>
+            <a:off x="822960" y="2514600"/>
+            <a:ext cx="10424160" cy="457200"/>
+          </a:xfrm>
+          <a:prstGeom prst="rect">
+            <a:avLst/>
+          </a:prstGeom>
+          <a:noFill/>
+          <a:ln/>
+        </p:spPr>
+        <p:txBody>
+          <a:bodyPr wrap="square" rtlCol="0" anchor="ctr"/>
+          <a:lstStyle/>
+          <a:p>
+            <a:pPr indent="0" marL="0">
+              <a:buNone/>
+            </a:pPr>
+            <a:r>
+              <a:rPr lang="en-US" sz="1500" b="1" dirty="0">
+                <a:solidFill>
+                  <a:srgbClr val="1A1A18"/>
+                </a:solidFill>
+                <a:latin typeface="Cambria" pitchFamily="34" charset="0"/>
+                <a:ea typeface="Cambria" pitchFamily="34" charset="-122"/>
+                <a:cs typeface="Cambria" pitchFamily="34" charset="-120"/>
+              </a:rPr>
+              <a:t>Three tests failed intermittently once a real OPENAI_API_KEY was in play</a:t>
+            </a:r>
+            <a:endParaRPr lang="en-US" sz="1500" dirty="0"/>
+          </a:p>
+        </p:txBody>
+      </p:sp>
+      <p:sp>
+        <p:nvSpPr>
+          <p:cNvPr id="10" name="Text 8"/>
+          <p:cNvSpPr/>
+          <p:nvPr/>
+        </p:nvSpPr>
+        <p:spPr>
+          <a:xfrm>
+            <a:off x="822960" y="2971800"/>
+            <a:ext cx="10424160" cy="640080"/>
+          </a:xfrm>
+          <a:prstGeom prst="rect">
+            <a:avLst/>
+          </a:prstGeom>
+          <a:noFill/>
+          <a:ln/>
+        </p:spPr>
+        <p:txBody>
+          <a:bodyPr wrap="square" rtlCol="0" anchor="ctr"/>
+          <a:lstStyle/>
+          <a:p>
+            <a:pPr indent="0" marL="0">
+              <a:buNone/>
+            </a:pPr>
+            <a:r>
+              <a:rPr lang="en-US" sz="1150" dirty="0">
+                <a:solidFill>
+                  <a:srgbClr val="5F5E5A"/>
+                </a:solidFill>
+                <a:latin typeface="Calibri" pitchFamily="34" charset="0"/>
+                <a:ea typeface="Calibri" pitchFamily="34" charset="-122"/>
+                <a:cs typeface="Calibri" pitchFamily="34" charset="-120"/>
+              </a:rPr>
+              <a:t>With PHI_DEID_CLASSIFICATION_BACKEND=llm set, thin synthetic test text (e.g. “Patient contact: ...email... or ...phone...”) could reasonably be classified not_applicable by the real model rather than clinical_note — correct from the LLM's view, but it skips redaction/validation/audit entirely, leaving those fields unset. Confirmed by monkeypatching classify_with_llm to return not_applicable and reproducing the identical failure, no real API call needed.</a:t>
+            </a:r>
+            <a:endParaRPr lang="en-US" sz="1150" dirty="0"/>
+          </a:p>
+        </p:txBody>
+      </p:sp>
+      <p:sp>
+        <p:nvSpPr>
+          <p:cNvPr id="11" name="Shape 9"/>
+          <p:cNvSpPr/>
+          <p:nvPr/>
+        </p:nvSpPr>
+        <p:spPr>
+          <a:xfrm>
+            <a:off x="548640" y="3840480"/>
+            <a:ext cx="11064240" cy="1691640"/>
+          </a:xfrm>
+          <a:prstGeom prst="roundRect">
+            <a:avLst>
+              <a:gd name="adj" fmla="val 4324"/>
+            </a:avLst>
+          </a:prstGeom>
+          <a:solidFill>
+            <a:srgbClr val="E1F5EE"/>
+          </a:solidFill>
+          <a:ln w="12700">
+            <a:solidFill>
+              <a:srgbClr val="E1F5EE"/>
+            </a:solidFill>
+            <a:prstDash val="solid"/>
+          </a:ln>
+        </p:spPr>
+      </p:sp>
+      <p:sp>
+        <p:nvSpPr>
+          <p:cNvPr id="12" name="Text 10"/>
+          <p:cNvSpPr/>
+          <p:nvPr/>
+        </p:nvSpPr>
+        <p:spPr>
+          <a:xfrm>
+            <a:off x="822960" y="4023360"/>
+            <a:ext cx="10515600" cy="822960"/>
+          </a:xfrm>
+          <a:prstGeom prst="rect">
+            <a:avLst/>
+          </a:prstGeom>
+          <a:noFill/>
+          <a:ln/>
+        </p:spPr>
+        <p:txBody>
+          <a:bodyPr wrap="square" rtlCol="0" anchor="t"/>
+          <a:lstStyle/>
+          <a:p>
+            <a:pPr indent="0" marL="0">
+              <a:buNone/>
+            </a:pPr>
+            <a:r>
+              <a:rPr lang="en-US" sz="1300" b="1" dirty="0">
+                <a:solidFill>
+                  <a:srgbClr val="0F6E56"/>
+                </a:solidFill>
+              </a:rPr>
+              <a:t>Fix: </a:t>
+            </a:r>
+            <a:pPr indent="0" marL="0">
+              <a:buNone/>
+            </a:pPr>
+            <a:r>
+              <a:rPr lang="en-US" sz="1250" dirty="0">
+                <a:solidFill>
+                  <a:srgbClr val="0D5040"/>
+                </a:solidFill>
+              </a:rPr>
+              <a:t>Pinned PHI_DEID_CLASSIFICATION_BACKEND to “heuristic” in every graph-invoking test fixture (test_integration.py, test_api_batch.py, and three others) — these are control-flow tests and shouldn't depend on a live external API call.</a:t>
+            </a:r>
+            <a:endParaRPr lang="en-US" sz="1300" dirty="0"/>
+          </a:p>
+        </p:txBody>
+      </p:sp>
+      <p:sp>
+        <p:nvSpPr>
+          <p:cNvPr id="13" name="Text 11"/>
+          <p:cNvSpPr/>
+          <p:nvPr/>
+        </p:nvSpPr>
+        <p:spPr>
+          <a:xfrm>
+            <a:off x="822960" y="4937760"/>
+            <a:ext cx="10515600" cy="457200"/>
+          </a:xfrm>
+          <a:prstGeom prst="rect">
+            <a:avLst/>
+          </a:prstGeom>
+          <a:noFill/>
+          <a:ln/>
+        </p:spPr>
+        <p:txBody>
+          <a:bodyPr wrap="square" rtlCol="0" anchor="ctr"/>
+          <a:lstStyle/>
+          <a:p>
+            <a:pPr indent="0" marL="0">
+              <a:buNone/>
+            </a:pPr>
+            <a:r>
+              <a:rPr lang="en-US" sz="1250" b="1" dirty="0">
+                <a:solidFill>
+                  <a:srgbClr val="0D5040"/>
+                </a:solidFill>
+                <a:latin typeface="Calibri" pitchFamily="34" charset="0"/>
+                <a:ea typeface="Calibri" pitchFamily="34" charset="-122"/>
+                <a:cs typeface="Calibri" pitchFamily="34" charset="-120"/>
+              </a:rPr>
+              <a:t>Verified against both the default heuristic backend and PHI_DEID_CLASSIFICATION_BACKEND=llm forced globally, matching the developer's real .env: 57 of 57 tests pass either way.</a:t>
+            </a:r>
+            <a:endParaRPr lang="en-US" sz="1250" dirty="0"/>
+          </a:p>
+        </p:txBody>
+      </p:sp>
+      <p:sp>
+        <p:nvSpPr>
+          <p:cNvPr id="14" name="Text 12"/>
+          <p:cNvSpPr/>
+          <p:nvPr/>
+        </p:nvSpPr>
+        <p:spPr>
+          <a:xfrm>
+            <a:off x="11612880" y="6492240"/>
+            <a:ext cx="457200" cy="274320"/>
+          </a:xfrm>
+          <a:prstGeom prst="rect">
+            <a:avLst/>
+          </a:prstGeom>
+          <a:noFill/>
+          <a:ln/>
+        </p:spPr>
+        <p:txBody>
+          <a:bodyPr wrap="square" rtlCol="0" anchor="ctr"/>
+          <a:lstStyle/>
+          <a:p>
+            <a:pPr algn="r" indent="0" marL="0">
+              <a:buNone/>
+            </a:pPr>
+            <a:r>
+              <a:rPr lang="en-US" sz="1000" dirty="0">
+                <a:solidFill>
+                  <a:srgbClr val="5F5E5A"/>
+                </a:solidFill>
+                <a:latin typeface="Calibri" pitchFamily="34" charset="0"/>
+                <a:ea typeface="Calibri" pitchFamily="34" charset="-122"/>
+                <a:cs typeface="Calibri" pitchFamily="34" charset="-120"/>
+              </a:rPr>
+              <a:t>15</a:t>
+            </a:r>
+            <a:endParaRPr lang="en-US" sz="1000" dirty="0"/>
+          </a:p>
+        </p:txBody>
+      </p:sp>
+    </p:spTree>
+  </p:cSld>
+  <p:clrMapOvr>
+    <a:masterClrMapping/>
+  </p:clrMapOvr>
+</p:sld>
+</file>
+
+<file path=ppt/slides/slide16.xml><?xml version="1.0" encoding="utf-8"?>
+<p:sld xmlns:a="http://schemas.openxmlformats.org/drawingml/2006/main" xmlns:r="http://schemas.openxmlformats.org/officeDocument/2006/relationships" xmlns:p="http://schemas.openxmlformats.org/presentationml/2006/main">
+  <p:cSld name="Slide 19">
+    <p:bg>
+      <p:bgPr>
+        <a:solidFill>
+          <a:srgbClr val="FFFFFF"/>
+        </a:solidFill>
+      </p:bgPr>
+    </p:bg>
+    <p:spTree>
+      <p:nvGrpSpPr>
+        <p:cNvPr id="1" name=""/>
+        <p:cNvGrpSpPr/>
+        <p:nvPr/>
+      </p:nvGrpSpPr>
+      <p:grpSpPr>
+        <a:xfrm>
+          <a:off x="0" y="0"/>
+          <a:ext cx="0" cy="0"/>
+          <a:chOff x="0" y="0"/>
+          <a:chExt cx="0" cy="0"/>
+        </a:xfrm>
+      </p:grpSpPr>
+      <p:sp>
+        <p:nvSpPr>
+          <p:cNvPr id="2" name="Text 0"/>
+          <p:cNvSpPr/>
+          <p:nvPr/>
+        </p:nvSpPr>
+        <p:spPr>
+          <a:xfrm>
+            <a:off x="548640" y="365760"/>
+            <a:ext cx="7315200" cy="320040"/>
+          </a:xfrm>
+          <a:prstGeom prst="rect">
+            <a:avLst/>
+          </a:prstGeom>
+          <a:noFill/>
+          <a:ln/>
+        </p:spPr>
+        <p:txBody>
+          <a:bodyPr wrap="square" rtlCol="0" anchor="ctr"/>
+          <a:lstStyle/>
+          <a:p>
+            <a:pPr indent="0" marL="0">
+              <a:buNone/>
+            </a:pPr>
+            <a:r>
+              <a:rPr lang="en-US" sz="1200" b="1" spc="200" kern="0" dirty="0">
+                <a:solidFill>
+                  <a:srgbClr val="0F6E56"/>
+                </a:solidFill>
+                <a:latin typeface="Calibri" pitchFamily="34" charset="0"/>
+                <a:ea typeface="Calibri" pitchFamily="34" charset="-122"/>
+                <a:cs typeface="Calibri" pitchFamily="34" charset="-120"/>
+              </a:rPr>
+              <a:t>REAL BUGS FOUND &amp; FIXED — PART 6</a:t>
+            </a:r>
+            <a:endParaRPr lang="en-US" sz="1200" dirty="0"/>
+          </a:p>
+        </p:txBody>
+      </p:sp>
+      <p:sp>
+        <p:nvSpPr>
+          <p:cNvPr id="3" name="Text 1"/>
+          <p:cNvSpPr/>
+          <p:nvPr/>
+        </p:nvSpPr>
+        <p:spPr>
+          <a:xfrm>
+            <a:off x="548640" y="640080"/>
+            <a:ext cx="11064240" cy="822960"/>
+          </a:xfrm>
+          <a:prstGeom prst="rect">
+            <a:avLst/>
+          </a:prstGeom>
+          <a:noFill/>
+          <a:ln/>
+        </p:spPr>
+        <p:txBody>
+          <a:bodyPr wrap="square" rtlCol="0" anchor="ctr"/>
+          <a:lstStyle/>
+          <a:p>
+            <a:pPr algn="l" indent="0" marL="0">
+              <a:buNone/>
+            </a:pPr>
+            <a:r>
+              <a:rPr lang="en-US" sz="3000" b="1" dirty="0">
+                <a:solidFill>
+                  <a:srgbClr val="1F4E79"/>
+                </a:solidFill>
+                <a:latin typeface="Cambria" pitchFamily="34" charset="0"/>
+                <a:ea typeface="Cambria" pitchFamily="34" charset="-122"/>
+                <a:cs typeface="Cambria" pitchFamily="34" charset="-120"/>
+              </a:rPr>
+              <a:t>Found via eval error analysis after the first live Streamlit Cloud deployment</a:t>
+            </a:r>
+            <a:endParaRPr lang="en-US" sz="3000" dirty="0"/>
+          </a:p>
+        </p:txBody>
+      </p:sp>
+      <p:sp>
+        <p:nvSpPr>
+          <p:cNvPr id="4" name="Shape 2"/>
+          <p:cNvSpPr/>
+          <p:nvPr/>
+        </p:nvSpPr>
+        <p:spPr>
+          <a:xfrm>
+            <a:off x="548640" y="1691640"/>
+            <a:ext cx="11064240" cy="1965960"/>
+          </a:xfrm>
+          <a:prstGeom prst="roundRect">
+            <a:avLst>
+              <a:gd name="adj" fmla="val 3721"/>
+            </a:avLst>
+          </a:prstGeom>
+          <a:solidFill>
+            <a:srgbClr val="F7F9FB"/>
+          </a:solidFill>
+          <a:ln w="12700">
+            <a:solidFill>
+              <a:srgbClr val="E3E8EC"/>
+            </a:solidFill>
+            <a:prstDash val="solid"/>
+          </a:ln>
+          <a:effectLst>
+            <a:outerShdw sx="100000" sy="100000" kx="0" ky="0" algn="bl" rotWithShape="0" blurRad="76200" dist="25400" dir="5400000">
+              <a:srgbClr val="999999">
+                <a:alpha val="18000"/>
+              </a:srgbClr>
+            </a:outerShdw>
+          </a:effectLst>
+        </p:spPr>
+      </p:sp>
+      <p:sp>
+        <p:nvSpPr>
+          <p:cNvPr id="5" name="Shape 3"/>
+          <p:cNvSpPr/>
+          <p:nvPr/>
+        </p:nvSpPr>
+        <p:spPr>
+          <a:xfrm>
+            <a:off x="822960" y="1965960"/>
+            <a:ext cx="457200" cy="457200"/>
+          </a:xfrm>
+          <a:prstGeom prst="ellipse">
+            <a:avLst/>
+          </a:prstGeom>
+          <a:solidFill>
+            <a:srgbClr val="993C1D"/>
+          </a:solidFill>
+          <a:ln/>
+        </p:spPr>
+      </p:sp>
+      <p:sp>
+        <p:nvSpPr>
+          <p:cNvPr id="6" name="Text 4"/>
+          <p:cNvSpPr/>
+          <p:nvPr/>
+        </p:nvSpPr>
+        <p:spPr>
+          <a:xfrm>
+            <a:off x="822960" y="1965960"/>
+            <a:ext cx="457200" cy="457200"/>
+          </a:xfrm>
+          <a:prstGeom prst="rect">
+            <a:avLst/>
+          </a:prstGeom>
+          <a:noFill/>
+          <a:ln/>
+        </p:spPr>
+        <p:txBody>
+          <a:bodyPr wrap="square" rtlCol="0" anchor="ctr"/>
+          <a:lstStyle/>
+          <a:p>
+            <a:pPr algn="ctr" indent="0" marL="0">
+              <a:buNone/>
+            </a:pPr>
+            <a:r>
+              <a:rPr lang="en-US" sz="1600" b="1" dirty="0">
+                <a:solidFill>
+                  <a:srgbClr val="FFFFFF"/>
+                </a:solidFill>
+                <a:latin typeface="Cambria" pitchFamily="34" charset="0"/>
+                <a:ea typeface="Cambria" pitchFamily="34" charset="-122"/>
+                <a:cs typeface="Cambria" pitchFamily="34" charset="-120"/>
+              </a:rPr>
+              <a:t>9</a:t>
+            </a:r>
+            <a:endParaRPr lang="en-US" sz="1600" dirty="0"/>
+          </a:p>
+        </p:txBody>
+      </p:sp>
+      <p:sp>
+        <p:nvSpPr>
+          <p:cNvPr id="7" name="Shape 5"/>
+          <p:cNvSpPr/>
+          <p:nvPr/>
+        </p:nvSpPr>
+        <p:spPr>
+          <a:xfrm>
+            <a:off x="1463040" y="2011680"/>
+            <a:ext cx="3017520" cy="365760"/>
+          </a:xfrm>
+          <a:prstGeom prst="roundRect">
+            <a:avLst>
+              <a:gd name="adj" fmla="val 15000"/>
+            </a:avLst>
+          </a:prstGeom>
+          <a:solidFill>
+            <a:srgbClr val="FAEEDA"/>
+          </a:solidFill>
+          <a:ln/>
+        </p:spPr>
+      </p:sp>
+      <p:sp>
+        <p:nvSpPr>
+          <p:cNvPr id="8" name="Text 6"/>
+          <p:cNvSpPr/>
+          <p:nvPr/>
+        </p:nvSpPr>
+        <p:spPr>
+          <a:xfrm>
+            <a:off x="1463040" y="2011680"/>
+            <a:ext cx="3017520" cy="365760"/>
+          </a:xfrm>
+          <a:prstGeom prst="rect">
+            <a:avLst/>
+          </a:prstGeom>
+          <a:noFill/>
+          <a:ln/>
+        </p:spPr>
+        <p:txBody>
+          <a:bodyPr wrap="square" rtlCol="0" anchor="ctr"/>
+          <a:lstStyle/>
+          <a:p>
+            <a:pPr algn="ctr" indent="0" marL="0">
+              <a:buNone/>
+            </a:pPr>
+            <a:r>
+              <a:rPr lang="en-US" sz="1000" b="1" dirty="0">
+                <a:solidFill>
+                  <a:srgbClr val="7A4D08"/>
+                </a:solidFill>
+                <a:latin typeface="Calibri" pitchFamily="34" charset="0"/>
+                <a:ea typeface="Calibri" pitchFamily="34" charset="-122"/>
+                <a:cs typeface="Calibri" pitchFamily="34" charset="-120"/>
+              </a:rPr>
+              <a:t>IRRELEVANT RECOGNIZER COLLISION</a:t>
+            </a:r>
+            <a:endParaRPr lang="en-US" sz="1000" dirty="0"/>
+          </a:p>
+        </p:txBody>
+      </p:sp>
+      <p:sp>
+        <p:nvSpPr>
+          <p:cNvPr id="9" name="Text 7"/>
+          <p:cNvSpPr/>
+          <p:nvPr/>
+        </p:nvSpPr>
+        <p:spPr>
+          <a:xfrm>
+            <a:off x="822960" y="2514600"/>
+            <a:ext cx="10424160" cy="457200"/>
+          </a:xfrm>
+          <a:prstGeom prst="rect">
+            <a:avLst/>
+          </a:prstGeom>
+          <a:noFill/>
+          <a:ln/>
+        </p:spPr>
+        <p:txBody>
+          <a:bodyPr wrap="square" rtlCol="0" anchor="ctr"/>
+          <a:lstStyle/>
+          <a:p>
+            <a:pPr indent="0" marL="0">
+              <a:buNone/>
+            </a:pPr>
+            <a:r>
+              <a:rPr lang="en-US" sz="1500" b="1" dirty="0">
+                <a:solidFill>
+                  <a:srgbClr val="1A1A18"/>
+                </a:solidFill>
+                <a:latin typeface="Cambria" pitchFamily="34" charset="0"/>
+                <a:ea typeface="Cambria" pitchFamily="34" charset="-122"/>
+                <a:cs typeface="Cambria" pitchFamily="34" charset="-120"/>
+              </a:rPr>
+              <a:t>Two ordinary US phone numbers silently mislabeled as UK NHS numbers</a:t>
+            </a:r>
+            <a:endParaRPr lang="en-US" sz="1500" dirty="0"/>
+          </a:p>
+        </p:txBody>
+      </p:sp>
+      <p:sp>
+        <p:nvSpPr>
+          <p:cNvPr id="10" name="Text 8"/>
+          <p:cNvSpPr/>
+          <p:nvPr/>
+        </p:nvSpPr>
+        <p:spPr>
+          <a:xfrm>
+            <a:off x="822960" y="2971800"/>
+            <a:ext cx="10424160" cy="640080"/>
+          </a:xfrm>
+          <a:prstGeom prst="rect">
+            <a:avLst/>
+          </a:prstGeom>
+          <a:noFill/>
+          <a:ln/>
+        </p:spPr>
+        <p:txBody>
+          <a:bodyPr wrap="square" rtlCol="0" anchor="ctr"/>
+          <a:lstStyle/>
+          <a:p>
+            <a:pPr indent="0" marL="0">
+              <a:buNone/>
+            </a:pPr>
+            <a:r>
+              <a:rPr lang="en-US" sz="1150" dirty="0">
+                <a:solidFill>
+                  <a:srgbClr val="5F5E5A"/>
+                </a:solidFill>
+                <a:latin typeface="Calibri" pitchFamily="34" charset="0"/>
+                <a:ea typeface="Calibri" pitchFamily="34" charset="-122"/>
+                <a:cs typeface="Calibri" pitchFamily="34" charset="-120"/>
+              </a:rPr>
+              <a:t>Presidio ships a built-in NhsRecognizer (UK NHS number recognizer) that validates any 10-digit sequence against the real NHS Mod-11 checksum and returns a perfect 1.0 confidence, no UK context needed. Two ordinary US phone numbers happened to pass that checksum, so the NHS candidate beat this project's own PHONE_NUMBER detections in the overlap-resolution step — the span was still redacted (no PHI leak), just mislabeled.</a:t>
+            </a:r>
+            <a:endParaRPr lang="en-US" sz="1150" dirty="0"/>
+          </a:p>
+        </p:txBody>
+      </p:sp>
+      <p:sp>
+        <p:nvSpPr>
+          <p:cNvPr id="11" name="Shape 9"/>
+          <p:cNvSpPr/>
+          <p:nvPr/>
+        </p:nvSpPr>
+        <p:spPr>
+          <a:xfrm>
+            <a:off x="548640" y="3840480"/>
+            <a:ext cx="11064240" cy="1691640"/>
+          </a:xfrm>
+          <a:prstGeom prst="roundRect">
+            <a:avLst>
+              <a:gd name="adj" fmla="val 4324"/>
+            </a:avLst>
+          </a:prstGeom>
+          <a:solidFill>
+            <a:srgbClr val="E1F5EE"/>
+          </a:solidFill>
+          <a:ln w="12700">
+            <a:solidFill>
+              <a:srgbClr val="E1F5EE"/>
+            </a:solidFill>
+            <a:prstDash val="solid"/>
+          </a:ln>
+        </p:spPr>
+      </p:sp>
+      <p:sp>
+        <p:nvSpPr>
+          <p:cNvPr id="12" name="Text 10"/>
+          <p:cNvSpPr/>
+          <p:nvPr/>
+        </p:nvSpPr>
+        <p:spPr>
+          <a:xfrm>
+            <a:off x="822960" y="4023360"/>
+            <a:ext cx="10515600" cy="822960"/>
+          </a:xfrm>
+          <a:prstGeom prst="rect">
+            <a:avLst/>
+          </a:prstGeom>
+          <a:noFill/>
+          <a:ln/>
+        </p:spPr>
+        <p:txBody>
+          <a:bodyPr wrap="square" rtlCol="0" anchor="t"/>
+          <a:lstStyle/>
+          <a:p>
+            <a:pPr indent="0" marL="0">
+              <a:buNone/>
+            </a:pPr>
+            <a:r>
+              <a:rPr lang="en-US" sz="1300" b="1" dirty="0">
+                <a:solidFill>
+                  <a:srgbClr val="0F6E56"/>
+                </a:solidFill>
+              </a:rPr>
+              <a:t>Fix: </a:t>
+            </a:r>
+            <a:pPr indent="0" marL="0">
+              <a:buNone/>
+            </a:pPr>
+            <a:r>
+              <a:rPr lang="en-US" sz="1250" dirty="0">
+                <a:solidFill>
+                  <a:srgbClr val="0D5040"/>
+                </a:solidFill>
+              </a:rPr>
+              <a:t>Deregistered NhsRecognizer from the analyzer registry — same pattern already used to remove the irrelevant US_DRIVER_LICENSE recognizer, since neither is relevant to this project's all-US clinical documents.</a:t>
+            </a:r>
+            <a:endParaRPr lang="en-US" sz="1300" dirty="0"/>
+          </a:p>
+        </p:txBody>
+      </p:sp>
+      <p:sp>
+        <p:nvSpPr>
+          <p:cNvPr id="13" name="Text 11"/>
+          <p:cNvSpPr/>
+          <p:nvPr/>
+        </p:nvSpPr>
+        <p:spPr>
+          <a:xfrm>
+            <a:off x="822960" y="4937760"/>
+            <a:ext cx="10515600" cy="457200"/>
+          </a:xfrm>
+          <a:prstGeom prst="rect">
+            <a:avLst/>
+          </a:prstGeom>
+          <a:noFill/>
+          <a:ln/>
+        </p:spPr>
+        <p:txBody>
+          <a:bodyPr wrap="square" rtlCol="0" anchor="ctr"/>
+          <a:lstStyle/>
+          <a:p>
+            <a:pPr indent="0" marL="0">
+              <a:buNone/>
+            </a:pPr>
+            <a:r>
+              <a:rPr lang="en-US" sz="1250" b="1" dirty="0">
+                <a:solidFill>
+                  <a:srgbClr val="0D5040"/>
+                </a:solidFill>
+                <a:latin typeface="Calibri" pitchFamily="34" charset="0"/>
+                <a:ea typeface="Calibri" pitchFamily="34" charset="-122"/>
+                <a:cs typeface="Calibri" pitchFamily="34" charset="-120"/>
+              </a:rPr>
+              <a:t>OVERALL F1 improved 0.6619 → 0.6814 at the time of this fix, recall reached a perfect 2,150/2,150 labeled spans (zero false negatives). Re-running today: F1 0.6587, recall 0.9949 (11 DATE_TIME misses) — a presidio-analyzer version drift, not a regression.</a:t>
+            </a:r>
+            <a:endParaRPr lang="en-US" sz="1250" dirty="0"/>
+          </a:p>
+        </p:txBody>
+      </p:sp>
+      <p:sp>
+        <p:nvSpPr>
+          <p:cNvPr id="14" name="Text 12"/>
+          <p:cNvSpPr/>
+          <p:nvPr/>
+        </p:nvSpPr>
+        <p:spPr>
+          <a:xfrm>
+            <a:off x="11612880" y="6492240"/>
+            <a:ext cx="457200" cy="274320"/>
+          </a:xfrm>
+          <a:prstGeom prst="rect">
+            <a:avLst/>
+          </a:prstGeom>
+          <a:noFill/>
+          <a:ln/>
+        </p:spPr>
+        <p:txBody>
+          <a:bodyPr wrap="square" rtlCol="0" anchor="ctr"/>
+          <a:lstStyle/>
+          <a:p>
+            <a:pPr algn="r" indent="0" marL="0">
+              <a:buNone/>
+            </a:pPr>
+            <a:r>
+              <a:rPr lang="en-US" sz="1000" dirty="0">
+                <a:solidFill>
+                  <a:srgbClr val="5F5E5A"/>
+                </a:solidFill>
+                <a:latin typeface="Calibri" pitchFamily="34" charset="0"/>
+                <a:ea typeface="Calibri" pitchFamily="34" charset="-122"/>
+                <a:cs typeface="Calibri" pitchFamily="34" charset="-120"/>
+              </a:rPr>
+              <a:t>16</a:t>
+            </a:r>
+            <a:endParaRPr lang="en-US" sz="1000" dirty="0"/>
+          </a:p>
+        </p:txBody>
+      </p:sp>
+    </p:spTree>
+  </p:cSld>
+  <p:clrMapOvr>
+    <a:masterClrMapping/>
+  </p:clrMapOvr>
+</p:sld>
+</file>
+
+<file path=ppt/slides/slide17.xml><?xml version="1.0" encoding="utf-8"?>
 <p:sld xmlns:a="http://schemas.openxmlformats.org/drawingml/2006/main" xmlns:r="http://schemas.openxmlformats.org/officeDocument/2006/relationships" xmlns:p="http://schemas.openxmlformats.org/presentationml/2006/main">
   <p:cSld name="Slide 13">
     <p:bg>
@@ -5995,7 +8424,7 @@
 </p:sld>
 </file>
 
-<file path=ppt/slides/slide14.xml><?xml version="1.0" encoding="utf-8"?>
+<file path=ppt/slides/slide18.xml><?xml version="1.0" encoding="utf-8"?>
 <p:sld xmlns:a="http://schemas.openxmlformats.org/drawingml/2006/main" xmlns:r="http://schemas.openxmlformats.org/officeDocument/2006/relationships" xmlns:p="http://schemas.openxmlformats.org/presentationml/2006/main">
   <p:cSld name="Slide 14">
     <p:bg>
@@ -6445,7 +8874,7 @@
                 <a:ea typeface="Calibri" pitchFamily="34" charset="-122"/>
                 <a:cs typeface="Calibri" pitchFamily="34" charset="-120"/>
               </a:rPr>
-              <a:t>No API rate limiting or input size cap</a:t>
+              <a:t>Synthetic-data-only evaluation — not benchmarked on real clinical notes</a:t>
             </a:r>
             <a:endParaRPr lang="en-US" sz="1300" dirty="0"/>
           </a:p>
@@ -6682,7 +9111,7 @@
 </p:sld>
 </file>
 
-<file path=ppt/slides/slide15.xml><?xml version="1.0" encoding="utf-8"?>
+<file path=ppt/slides/slide19.xml><?xml version="1.0" encoding="utf-8"?>
 <p:sld xmlns:a="http://schemas.openxmlformats.org/drawingml/2006/main" xmlns:r="http://schemas.openxmlformats.org/officeDocument/2006/relationships" xmlns:p="http://schemas.openxmlformats.org/presentationml/2006/main">
   <p:cSld name="Slide 15">
     <p:bg>
@@ -6876,7 +9305,7 @@
                 <a:ea typeface="Calibri" pitchFamily="34" charset="-122"/>
                 <a:cs typeface="Calibri" pitchFamily="34" charset="-120"/>
               </a:rPr>
-              <a:t>Every evaluation number comes from a real execution of the eval harness — final OVERALL F1 0.6814, recall fully saturated (2,150 of 2,150 spans) — not a hand-picked or simulated result.</a:t>
+              <a:t>Every evaluation number comes from a real execution of the eval harness — final OVERALL F1 0.6587, recall 0.9949 (2,139 of 2,150 spans, 11 DATE_TIME misses) — not a hand-picked or simulated result.</a:t>
             </a:r>
             <a:endParaRPr lang="en-US" sz="1500" dirty="0"/>
           </a:p>
@@ -7114,2717 +9543,6 @@
               <a:t>Thank you — questions welcome.  ·  github.com/Ramya192/phi-deidentification</a:t>
             </a:r>
             <a:endParaRPr lang="en-US" sz="1600" dirty="0"/>
-          </a:p>
-        </p:txBody>
-      </p:sp>
-    </p:spTree>
-  </p:cSld>
-  <p:clrMapOvr>
-    <a:masterClrMapping/>
-  </p:clrMapOvr>
-</p:sld>
-</file>
-
-<file path=ppt/slides/slide16.xml><?xml version="1.0" encoding="utf-8"?>
-<p:sld xmlns:a="http://schemas.openxmlformats.org/drawingml/2006/main" xmlns:r="http://schemas.openxmlformats.org/officeDocument/2006/relationships" xmlns:p="http://schemas.openxmlformats.org/presentationml/2006/main">
-  <p:cSld name="Slide 6">
-    <p:bg>
-      <p:bgPr>
-        <a:solidFill>
-          <a:srgbClr val="FFFFFF"/>
-        </a:solidFill>
-      </p:bgPr>
-    </p:bg>
-    <p:spTree>
-      <p:nvGrpSpPr>
-        <p:cNvPr id="1" name=""/>
-        <p:cNvGrpSpPr/>
-        <p:nvPr/>
-      </p:nvGrpSpPr>
-      <p:grpSpPr>
-        <a:xfrm>
-          <a:off x="0" y="0"/>
-          <a:ext cx="0" cy="0"/>
-          <a:chOff x="0" y="0"/>
-          <a:chExt cx="0" cy="0"/>
-        </a:xfrm>
-      </p:grpSpPr>
-      <p:sp>
-        <p:nvSpPr>
-          <p:cNvPr id="2" name="Text 0"/>
-          <p:cNvSpPr/>
-          <p:nvPr/>
-        </p:nvSpPr>
-        <p:spPr>
-          <a:xfrm>
-            <a:off x="548640" y="365760"/>
-            <a:ext cx="7315200" cy="320040"/>
-          </a:xfrm>
-          <a:prstGeom prst="rect">
-            <a:avLst/>
-          </a:prstGeom>
-          <a:noFill/>
-          <a:ln/>
-        </p:spPr>
-        <p:txBody>
-          <a:bodyPr wrap="square" rtlCol="0" anchor="ctr"/>
-          <a:lstStyle/>
-          <a:p>
-            <a:pPr indent="0" marL="0">
-              <a:buNone/>
-            </a:pPr>
-            <a:r>
-              <a:rPr lang="en-US" sz="1200" b="1" spc="200" kern="0" dirty="0">
-                <a:solidFill>
-                  <a:srgbClr val="0F6E56"/>
-                </a:solidFill>
-                <a:latin typeface="Calibri" pitchFamily="34" charset="0"/>
-                <a:ea typeface="Calibri" pitchFamily="34" charset="-122"/>
-                <a:cs typeface="Calibri" pitchFamily="34" charset="-120"/>
-              </a:rPr>
-              <a:t>MULTI-AGENT LLM TIER &amp; RELIABILITY</a:t>
-            </a:r>
-            <a:endParaRPr lang="en-US" sz="1200" dirty="0"/>
-          </a:p>
-        </p:txBody>
-      </p:sp>
-      <p:sp>
-        <p:nvSpPr>
-          <p:cNvPr id="3" name="Text 1"/>
-          <p:cNvSpPr/>
-          <p:nvPr/>
-        </p:nvSpPr>
-        <p:spPr>
-          <a:xfrm>
-            <a:off x="548640" y="640080"/>
-            <a:ext cx="11064240" cy="822960"/>
-          </a:xfrm>
-          <a:prstGeom prst="rect">
-            <a:avLst/>
-          </a:prstGeom>
-          <a:noFill/>
-          <a:ln/>
-        </p:spPr>
-        <p:txBody>
-          <a:bodyPr wrap="square" rtlCol="0" anchor="ctr"/>
-          <a:lstStyle/>
-          <a:p>
-            <a:pPr algn="l" indent="0" marL="0">
-              <a:buNone/>
-            </a:pPr>
-            <a:r>
-              <a:rPr lang="en-US" sz="3000" b="1" dirty="0">
-                <a:solidFill>
-                  <a:srgbClr val="1F4E79"/>
-                </a:solidFill>
-                <a:latin typeface="Cambria" pitchFamily="34" charset="0"/>
-                <a:ea typeface="Cambria" pitchFamily="34" charset="-122"/>
-                <a:cs typeface="Cambria" pitchFamily="34" charset="-120"/>
-              </a:rPr>
-              <a:t>A third hardening pass: a genuine agentic LLM tier, plus reliability</a:t>
-            </a:r>
-            <a:endParaRPr lang="en-US" sz="3000" dirty="0"/>
-          </a:p>
-        </p:txBody>
-      </p:sp>
-      <p:sp>
-        <p:nvSpPr>
-          <p:cNvPr id="4" name="Shape 2"/>
-          <p:cNvSpPr/>
-          <p:nvPr/>
-        </p:nvSpPr>
-        <p:spPr>
-          <a:xfrm>
-            <a:off x="548640" y="1691640"/>
-            <a:ext cx="3611880" cy="1965960"/>
-          </a:xfrm>
-          <a:prstGeom prst="roundRect">
-            <a:avLst>
-              <a:gd name="adj" fmla="val 3721"/>
-            </a:avLst>
-          </a:prstGeom>
-          <a:solidFill>
-            <a:srgbClr val="F7F9FB"/>
-          </a:solidFill>
-          <a:ln w="12700">
-            <a:solidFill>
-              <a:srgbClr val="E3E8EC"/>
-            </a:solidFill>
-            <a:prstDash val="solid"/>
-          </a:ln>
-          <a:effectLst>
-            <a:outerShdw sx="100000" sy="100000" kx="0" ky="0" algn="bl" rotWithShape="0" blurRad="76200" dist="25400" dir="5400000">
-              <a:srgbClr val="999999">
-                <a:alpha val="18000"/>
-              </a:srgbClr>
-            </a:outerShdw>
-          </a:effectLst>
-        </p:spPr>
-      </p:sp>
-      <p:sp>
-        <p:nvSpPr>
-          <p:cNvPr id="5" name="Shape 3"/>
-          <p:cNvSpPr/>
-          <p:nvPr/>
-        </p:nvSpPr>
-        <p:spPr>
-          <a:xfrm>
-            <a:off x="777240" y="1920240"/>
-            <a:ext cx="411480" cy="411480"/>
-          </a:xfrm>
-          <a:prstGeom prst="ellipse">
-            <a:avLst/>
-          </a:prstGeom>
-          <a:solidFill>
-            <a:srgbClr val="0F6E56"/>
-          </a:solidFill>
-          <a:ln/>
-        </p:spPr>
-      </p:sp>
-      <p:sp>
-        <p:nvSpPr>
-          <p:cNvPr id="6" name="Text 4"/>
-          <p:cNvSpPr/>
-          <p:nvPr/>
-        </p:nvSpPr>
-        <p:spPr>
-          <a:xfrm>
-            <a:off x="777240" y="1920240"/>
-            <a:ext cx="411480" cy="411480"/>
-          </a:xfrm>
-          <a:prstGeom prst="rect">
-            <a:avLst/>
-          </a:prstGeom>
-          <a:noFill/>
-          <a:ln/>
-        </p:spPr>
-        <p:txBody>
-          <a:bodyPr wrap="square" rtlCol="0" anchor="ctr"/>
-          <a:lstStyle/>
-          <a:p>
-            <a:pPr algn="ctr" indent="0" marL="0">
-              <a:buNone/>
-            </a:pPr>
-            <a:r>
-              <a:rPr lang="en-US" sz="1400" b="1" dirty="0">
-                <a:solidFill>
-                  <a:srgbClr val="FFFFFF"/>
-                </a:solidFill>
-                <a:latin typeface="Cambria" pitchFamily="34" charset="0"/>
-                <a:ea typeface="Cambria" pitchFamily="34" charset="-122"/>
-                <a:cs typeface="Cambria" pitchFamily="34" charset="-120"/>
-              </a:rPr>
-              <a:t>1</a:t>
-            </a:r>
-            <a:endParaRPr lang="en-US" sz="1400" dirty="0"/>
-          </a:p>
-        </p:txBody>
-      </p:sp>
-      <p:sp>
-        <p:nvSpPr>
-          <p:cNvPr id="7" name="Text 5"/>
-          <p:cNvSpPr/>
-          <p:nvPr/>
-        </p:nvSpPr>
-        <p:spPr>
-          <a:xfrm>
-            <a:off x="777240" y="2468880"/>
-            <a:ext cx="3154680" cy="502920"/>
-          </a:xfrm>
-          <a:prstGeom prst="rect">
-            <a:avLst/>
-          </a:prstGeom>
-          <a:noFill/>
-          <a:ln/>
-        </p:spPr>
-        <p:txBody>
-          <a:bodyPr wrap="square" rtlCol="0" anchor="ctr"/>
-          <a:lstStyle/>
-          <a:p>
-            <a:pPr indent="0" marL="0">
-              <a:buNone/>
-            </a:pPr>
-            <a:r>
-              <a:rPr lang="en-US" sz="1350" b="1" dirty="0">
-                <a:solidFill>
-                  <a:srgbClr val="1A1A18"/>
-                </a:solidFill>
-                <a:latin typeface="Cambria" pitchFamily="34" charset="0"/>
-                <a:ea typeface="Cambria" pitchFamily="34" charset="-122"/>
-                <a:cs typeface="Cambria" pitchFamily="34" charset="-120"/>
-              </a:rPr>
-              <a:t>LLM adjudication agent</a:t>
-            </a:r>
-            <a:endParaRPr lang="en-US" sz="1350" dirty="0"/>
-          </a:p>
-        </p:txBody>
-      </p:sp>
-      <p:sp>
-        <p:nvSpPr>
-          <p:cNvPr id="8" name="Text 6"/>
-          <p:cNvSpPr/>
-          <p:nvPr/>
-        </p:nvSpPr>
-        <p:spPr>
-          <a:xfrm>
-            <a:off x="777240" y="2926080"/>
-            <a:ext cx="3154680" cy="640080"/>
-          </a:xfrm>
-          <a:prstGeom prst="rect">
-            <a:avLst/>
-          </a:prstGeom>
-          <a:noFill/>
-          <a:ln/>
-        </p:spPr>
-        <p:txBody>
-          <a:bodyPr wrap="square" rtlCol="0" anchor="ctr"/>
-          <a:lstStyle/>
-          <a:p>
-            <a:pPr indent="0" marL="0">
-              <a:buNone/>
-            </a:pPr>
-            <a:r>
-              <a:rPr lang="en-US" sz="1080" dirty="0">
-                <a:solidFill>
-                  <a:srgbClr val="5F5E5A"/>
-                </a:solidFill>
-                <a:latin typeface="Calibri" pitchFamily="34" charset="0"/>
-                <a:ea typeface="Calibri" pitchFamily="34" charset="-122"/>
-                <a:cs typeface="Calibri" pitchFamily="34" charset="-120"/>
-              </a:rPr>
-              <a:t>Tool-calling + structured output (Pydantic), off by default. Reviews only ambiguous spans; a low-confidence call or a failure defers to a human rather than guessing.</a:t>
-            </a:r>
-            <a:endParaRPr lang="en-US" sz="1080" dirty="0"/>
-          </a:p>
-        </p:txBody>
-      </p:sp>
-      <p:sp>
-        <p:nvSpPr>
-          <p:cNvPr id="9" name="Shape 7"/>
-          <p:cNvSpPr/>
-          <p:nvPr/>
-        </p:nvSpPr>
-        <p:spPr>
-          <a:xfrm>
-            <a:off x="4343400" y="1691640"/>
-            <a:ext cx="3611880" cy="1965960"/>
-          </a:xfrm>
-          <a:prstGeom prst="roundRect">
-            <a:avLst>
-              <a:gd name="adj" fmla="val 3721"/>
-            </a:avLst>
-          </a:prstGeom>
-          <a:solidFill>
-            <a:srgbClr val="F7F9FB"/>
-          </a:solidFill>
-          <a:ln w="12700">
-            <a:solidFill>
-              <a:srgbClr val="E3E8EC"/>
-            </a:solidFill>
-            <a:prstDash val="solid"/>
-          </a:ln>
-          <a:effectLst>
-            <a:outerShdw sx="100000" sy="100000" kx="0" ky="0" algn="bl" rotWithShape="0" blurRad="76200" dist="25400" dir="5400000">
-              <a:srgbClr val="999999">
-                <a:alpha val="18000"/>
-              </a:srgbClr>
-            </a:outerShdw>
-          </a:effectLst>
-        </p:spPr>
-      </p:sp>
-      <p:sp>
-        <p:nvSpPr>
-          <p:cNvPr id="10" name="Shape 8"/>
-          <p:cNvSpPr/>
-          <p:nvPr/>
-        </p:nvSpPr>
-        <p:spPr>
-          <a:xfrm>
-            <a:off x="4572000" y="1920240"/>
-            <a:ext cx="411480" cy="411480"/>
-          </a:xfrm>
-          <a:prstGeom prst="ellipse">
-            <a:avLst/>
-          </a:prstGeom>
-          <a:solidFill>
-            <a:srgbClr val="0F6E56"/>
-          </a:solidFill>
-          <a:ln/>
-        </p:spPr>
-      </p:sp>
-      <p:sp>
-        <p:nvSpPr>
-          <p:cNvPr id="11" name="Text 9"/>
-          <p:cNvSpPr/>
-          <p:nvPr/>
-        </p:nvSpPr>
-        <p:spPr>
-          <a:xfrm>
-            <a:off x="4572000" y="1920240"/>
-            <a:ext cx="411480" cy="411480"/>
-          </a:xfrm>
-          <a:prstGeom prst="rect">
-            <a:avLst/>
-          </a:prstGeom>
-          <a:noFill/>
-          <a:ln/>
-        </p:spPr>
-        <p:txBody>
-          <a:bodyPr wrap="square" rtlCol="0" anchor="ctr"/>
-          <a:lstStyle/>
-          <a:p>
-            <a:pPr algn="ctr" indent="0" marL="0">
-              <a:buNone/>
-            </a:pPr>
-            <a:r>
-              <a:rPr lang="en-US" sz="1400" b="1" dirty="0">
-                <a:solidFill>
-                  <a:srgbClr val="FFFFFF"/>
-                </a:solidFill>
-                <a:latin typeface="Cambria" pitchFamily="34" charset="0"/>
-                <a:ea typeface="Cambria" pitchFamily="34" charset="-122"/>
-                <a:cs typeface="Cambria" pitchFamily="34" charset="-120"/>
-              </a:rPr>
-              <a:t>2</a:t>
-            </a:r>
-            <a:endParaRPr lang="en-US" sz="1400" dirty="0"/>
-          </a:p>
-        </p:txBody>
-      </p:sp>
-      <p:sp>
-        <p:nvSpPr>
-          <p:cNvPr id="12" name="Text 10"/>
-          <p:cNvSpPr/>
-          <p:nvPr/>
-        </p:nvSpPr>
-        <p:spPr>
-          <a:xfrm>
-            <a:off x="4572000" y="2468880"/>
-            <a:ext cx="3154680" cy="502920"/>
-          </a:xfrm>
-          <a:prstGeom prst="rect">
-            <a:avLst/>
-          </a:prstGeom>
-          <a:noFill/>
-          <a:ln/>
-        </p:spPr>
-        <p:txBody>
-          <a:bodyPr wrap="square" rtlCol="0" anchor="ctr"/>
-          <a:lstStyle/>
-          <a:p>
-            <a:pPr indent="0" marL="0">
-              <a:buNone/>
-            </a:pPr>
-            <a:r>
-              <a:rPr lang="en-US" sz="1350" b="1" dirty="0">
-                <a:solidFill>
-                  <a:srgbClr val="1A1A18"/>
-                </a:solidFill>
-                <a:latin typeface="Cambria" pitchFamily="34" charset="0"/>
-                <a:ea typeface="Cambria" pitchFamily="34" charset="-122"/>
-                <a:cs typeface="Cambria" pitchFamily="34" charset="-120"/>
-              </a:rPr>
-              <a:t>Persistent audit trail</a:t>
-            </a:r>
-            <a:endParaRPr lang="en-US" sz="1350" dirty="0"/>
-          </a:p>
-        </p:txBody>
-      </p:sp>
-      <p:sp>
-        <p:nvSpPr>
-          <p:cNvPr id="13" name="Text 11"/>
-          <p:cNvSpPr/>
-          <p:nvPr/>
-        </p:nvSpPr>
-        <p:spPr>
-          <a:xfrm>
-            <a:off x="4572000" y="2926080"/>
-            <a:ext cx="3154680" cy="640080"/>
-          </a:xfrm>
-          <a:prstGeom prst="rect">
-            <a:avLst/>
-          </a:prstGeom>
-          <a:noFill/>
-          <a:ln/>
-        </p:spPr>
-        <p:txBody>
-          <a:bodyPr wrap="square" rtlCol="0" anchor="ctr"/>
-          <a:lstStyle/>
-          <a:p>
-            <a:pPr indent="0" marL="0">
-              <a:buNone/>
-            </a:pPr>
-            <a:r>
-              <a:rPr lang="en-US" sz="1080" dirty="0">
-                <a:solidFill>
-                  <a:srgbClr val="5F5E5A"/>
-                </a:solidFill>
-                <a:latin typeface="Calibri" pitchFamily="34" charset="0"/>
-                <a:ea typeface="Calibri" pitchFamily="34" charset="-122"/>
-                <a:cs typeface="Calibri" pitchFamily="34" charset="-120"/>
-              </a:rPr>
-              <a:t>A second, SQLAlchemy-backed store, separate from the checkpointer. PHI span text is sanitized to a placeholder before every write.</a:t>
-            </a:r>
-            <a:endParaRPr lang="en-US" sz="1080" dirty="0"/>
-          </a:p>
-        </p:txBody>
-      </p:sp>
-      <p:sp>
-        <p:nvSpPr>
-          <p:cNvPr id="14" name="Shape 12"/>
-          <p:cNvSpPr/>
-          <p:nvPr/>
-        </p:nvSpPr>
-        <p:spPr>
-          <a:xfrm>
-            <a:off x="8138160" y="1691640"/>
-            <a:ext cx="3611880" cy="1965960"/>
-          </a:xfrm>
-          <a:prstGeom prst="roundRect">
-            <a:avLst>
-              <a:gd name="adj" fmla="val 3721"/>
-            </a:avLst>
-          </a:prstGeom>
-          <a:solidFill>
-            <a:srgbClr val="F7F9FB"/>
-          </a:solidFill>
-          <a:ln w="12700">
-            <a:solidFill>
-              <a:srgbClr val="E3E8EC"/>
-            </a:solidFill>
-            <a:prstDash val="solid"/>
-          </a:ln>
-          <a:effectLst>
-            <a:outerShdw sx="100000" sy="100000" kx="0" ky="0" algn="bl" rotWithShape="0" blurRad="76200" dist="25400" dir="5400000">
-              <a:srgbClr val="999999">
-                <a:alpha val="18000"/>
-              </a:srgbClr>
-            </a:outerShdw>
-          </a:effectLst>
-        </p:spPr>
-      </p:sp>
-      <p:sp>
-        <p:nvSpPr>
-          <p:cNvPr id="15" name="Shape 13"/>
-          <p:cNvSpPr/>
-          <p:nvPr/>
-        </p:nvSpPr>
-        <p:spPr>
-          <a:xfrm>
-            <a:off x="8366760" y="1920240"/>
-            <a:ext cx="411480" cy="411480"/>
-          </a:xfrm>
-          <a:prstGeom prst="ellipse">
-            <a:avLst/>
-          </a:prstGeom>
-          <a:solidFill>
-            <a:srgbClr val="0F6E56"/>
-          </a:solidFill>
-          <a:ln/>
-        </p:spPr>
-      </p:sp>
-      <p:sp>
-        <p:nvSpPr>
-          <p:cNvPr id="16" name="Text 14"/>
-          <p:cNvSpPr/>
-          <p:nvPr/>
-        </p:nvSpPr>
-        <p:spPr>
-          <a:xfrm>
-            <a:off x="8366760" y="1920240"/>
-            <a:ext cx="411480" cy="411480"/>
-          </a:xfrm>
-          <a:prstGeom prst="rect">
-            <a:avLst/>
-          </a:prstGeom>
-          <a:noFill/>
-          <a:ln/>
-        </p:spPr>
-        <p:txBody>
-          <a:bodyPr wrap="square" rtlCol="0" anchor="ctr"/>
-          <a:lstStyle/>
-          <a:p>
-            <a:pPr algn="ctr" indent="0" marL="0">
-              <a:buNone/>
-            </a:pPr>
-            <a:r>
-              <a:rPr lang="en-US" sz="1400" b="1" dirty="0">
-                <a:solidFill>
-                  <a:srgbClr val="FFFFFF"/>
-                </a:solidFill>
-                <a:latin typeface="Cambria" pitchFamily="34" charset="0"/>
-                <a:ea typeface="Cambria" pitchFamily="34" charset="-122"/>
-                <a:cs typeface="Cambria" pitchFamily="34" charset="-120"/>
-              </a:rPr>
-              <a:t>3</a:t>
-            </a:r>
-            <a:endParaRPr lang="en-US" sz="1400" dirty="0"/>
-          </a:p>
-        </p:txBody>
-      </p:sp>
-      <p:sp>
-        <p:nvSpPr>
-          <p:cNvPr id="17" name="Text 15"/>
-          <p:cNvSpPr/>
-          <p:nvPr/>
-        </p:nvSpPr>
-        <p:spPr>
-          <a:xfrm>
-            <a:off x="8366760" y="2468880"/>
-            <a:ext cx="3154680" cy="502920"/>
-          </a:xfrm>
-          <a:prstGeom prst="rect">
-            <a:avLst/>
-          </a:prstGeom>
-          <a:noFill/>
-          <a:ln/>
-        </p:spPr>
-        <p:txBody>
-          <a:bodyPr wrap="square" rtlCol="0" anchor="ctr"/>
-          <a:lstStyle/>
-          <a:p>
-            <a:pPr indent="0" marL="0">
-              <a:buNone/>
-            </a:pPr>
-            <a:r>
-              <a:rPr lang="en-US" sz="1350" b="1" dirty="0">
-                <a:solidFill>
-                  <a:srgbClr val="1A1A18"/>
-                </a:solidFill>
-                <a:latin typeface="Cambria" pitchFamily="34" charset="0"/>
-                <a:ea typeface="Cambria" pitchFamily="34" charset="-122"/>
-                <a:cs typeface="Cambria" pitchFamily="34" charset="-120"/>
-              </a:rPr>
-              <a:t>Retry-cap escalation</a:t>
-            </a:r>
-            <a:endParaRPr lang="en-US" sz="1350" dirty="0"/>
-          </a:p>
-        </p:txBody>
-      </p:sp>
-      <p:sp>
-        <p:nvSpPr>
-          <p:cNvPr id="18" name="Text 16"/>
-          <p:cNvSpPr/>
-          <p:nvPr/>
-        </p:nvSpPr>
-        <p:spPr>
-          <a:xfrm>
-            <a:off x="8366760" y="2926080"/>
-            <a:ext cx="3154680" cy="640080"/>
-          </a:xfrm>
-          <a:prstGeom prst="rect">
-            <a:avLst/>
-          </a:prstGeom>
-          <a:noFill/>
-          <a:ln/>
-        </p:spPr>
-        <p:txBody>
-          <a:bodyPr wrap="square" rtlCol="0" anchor="ctr"/>
-          <a:lstStyle/>
-          <a:p>
-            <a:pPr indent="0" marL="0">
-              <a:buNone/>
-            </a:pPr>
-            <a:r>
-              <a:rPr lang="en-US" sz="1080" dirty="0">
-                <a:solidFill>
-                  <a:srgbClr val="5F5E5A"/>
-                </a:solidFill>
-                <a:latin typeface="Calibri" pitchFamily="34" charset="0"/>
-                <a:ea typeface="Calibri" pitchFamily="34" charset="-122"/>
-                <a:cs typeface="Calibri" pitchFamily="34" charset="-120"/>
-              </a:rPr>
-              <a:t>If retries are exhausted, deterministic types auto-redact and only ambiguous types get one final human review — the run always terminates.</a:t>
-            </a:r>
-            <a:endParaRPr lang="en-US" sz="1080" dirty="0"/>
-          </a:p>
-        </p:txBody>
-      </p:sp>
-      <p:sp>
-        <p:nvSpPr>
-          <p:cNvPr id="19" name="Shape 17"/>
-          <p:cNvSpPr/>
-          <p:nvPr/>
-        </p:nvSpPr>
-        <p:spPr>
-          <a:xfrm>
-            <a:off x="548640" y="3886200"/>
-            <a:ext cx="3611880" cy="1965960"/>
-          </a:xfrm>
-          <a:prstGeom prst="roundRect">
-            <a:avLst>
-              <a:gd name="adj" fmla="val 3721"/>
-            </a:avLst>
-          </a:prstGeom>
-          <a:solidFill>
-            <a:srgbClr val="F7F9FB"/>
-          </a:solidFill>
-          <a:ln w="12700">
-            <a:solidFill>
-              <a:srgbClr val="E3E8EC"/>
-            </a:solidFill>
-            <a:prstDash val="solid"/>
-          </a:ln>
-          <a:effectLst>
-            <a:outerShdw sx="100000" sy="100000" kx="0" ky="0" algn="bl" rotWithShape="0" blurRad="76200" dist="25400" dir="5400000">
-              <a:srgbClr val="999999">
-                <a:alpha val="18000"/>
-              </a:srgbClr>
-            </a:outerShdw>
-          </a:effectLst>
-        </p:spPr>
-      </p:sp>
-      <p:sp>
-        <p:nvSpPr>
-          <p:cNvPr id="20" name="Shape 18"/>
-          <p:cNvSpPr/>
-          <p:nvPr/>
-        </p:nvSpPr>
-        <p:spPr>
-          <a:xfrm>
-            <a:off x="777240" y="4114800"/>
-            <a:ext cx="411480" cy="411480"/>
-          </a:xfrm>
-          <a:prstGeom prst="ellipse">
-            <a:avLst/>
-          </a:prstGeom>
-          <a:solidFill>
-            <a:srgbClr val="0F6E56"/>
-          </a:solidFill>
-          <a:ln/>
-        </p:spPr>
-      </p:sp>
-      <p:sp>
-        <p:nvSpPr>
-          <p:cNvPr id="21" name="Text 19"/>
-          <p:cNvSpPr/>
-          <p:nvPr/>
-        </p:nvSpPr>
-        <p:spPr>
-          <a:xfrm>
-            <a:off x="777240" y="4114800"/>
-            <a:ext cx="411480" cy="411480"/>
-          </a:xfrm>
-          <a:prstGeom prst="rect">
-            <a:avLst/>
-          </a:prstGeom>
-          <a:noFill/>
-          <a:ln/>
-        </p:spPr>
-        <p:txBody>
-          <a:bodyPr wrap="square" rtlCol="0" anchor="ctr"/>
-          <a:lstStyle/>
-          <a:p>
-            <a:pPr algn="ctr" indent="0" marL="0">
-              <a:buNone/>
-            </a:pPr>
-            <a:r>
-              <a:rPr lang="en-US" sz="1400" b="1" dirty="0">
-                <a:solidFill>
-                  <a:srgbClr val="FFFFFF"/>
-                </a:solidFill>
-                <a:latin typeface="Cambria" pitchFamily="34" charset="0"/>
-                <a:ea typeface="Cambria" pitchFamily="34" charset="-122"/>
-                <a:cs typeface="Cambria" pitchFamily="34" charset="-120"/>
-              </a:rPr>
-              <a:t>4</a:t>
-            </a:r>
-            <a:endParaRPr lang="en-US" sz="1400" dirty="0"/>
-          </a:p>
-        </p:txBody>
-      </p:sp>
-      <p:sp>
-        <p:nvSpPr>
-          <p:cNvPr id="22" name="Text 20"/>
-          <p:cNvSpPr/>
-          <p:nvPr/>
-        </p:nvSpPr>
-        <p:spPr>
-          <a:xfrm>
-            <a:off x="777240" y="4663440"/>
-            <a:ext cx="3154680" cy="502920"/>
-          </a:xfrm>
-          <a:prstGeom prst="rect">
-            <a:avLst/>
-          </a:prstGeom>
-          <a:noFill/>
-          <a:ln/>
-        </p:spPr>
-        <p:txBody>
-          <a:bodyPr wrap="square" rtlCol="0" anchor="ctr"/>
-          <a:lstStyle/>
-          <a:p>
-            <a:pPr indent="0" marL="0">
-              <a:buNone/>
-            </a:pPr>
-            <a:r>
-              <a:rPr lang="en-US" sz="1350" b="1" dirty="0">
-                <a:solidFill>
-                  <a:srgbClr val="1A1A18"/>
-                </a:solidFill>
-                <a:latin typeface="Cambria" pitchFamily="34" charset="0"/>
-                <a:ea typeface="Cambria" pitchFamily="34" charset="-122"/>
-                <a:cs typeface="Cambria" pitchFamily="34" charset="-120"/>
-              </a:rPr>
-              <a:t>Batch endpoint</a:t>
-            </a:r>
-            <a:endParaRPr lang="en-US" sz="1350" dirty="0"/>
-          </a:p>
-        </p:txBody>
-      </p:sp>
-      <p:sp>
-        <p:nvSpPr>
-          <p:cNvPr id="23" name="Text 21"/>
-          <p:cNvSpPr/>
-          <p:nvPr/>
-        </p:nvSpPr>
-        <p:spPr>
-          <a:xfrm>
-            <a:off x="777240" y="5120640"/>
-            <a:ext cx="3154680" cy="640080"/>
-          </a:xfrm>
-          <a:prstGeom prst="rect">
-            <a:avLst/>
-          </a:prstGeom>
-          <a:noFill/>
-          <a:ln/>
-        </p:spPr>
-        <p:txBody>
-          <a:bodyPr wrap="square" rtlCol="0" anchor="ctr"/>
-          <a:lstStyle/>
-          <a:p>
-            <a:pPr indent="0" marL="0">
-              <a:buNone/>
-            </a:pPr>
-            <a:r>
-              <a:rPr lang="en-US" sz="1080" dirty="0">
-                <a:solidFill>
-                  <a:srgbClr val="5F5E5A"/>
-                </a:solidFill>
-                <a:latin typeface="Calibri" pitchFamily="34" charset="0"/>
-                <a:ea typeface="Calibri" pitchFamily="34" charset="-122"/>
-                <a:cs typeface="Calibri" pitchFamily="34" charset="-120"/>
-              </a:rPr>
-              <a:t>POST /redact/batch processes several documents per request; one malformed file reports its own error, not a batch-wide failure.</a:t>
-            </a:r>
-            <a:endParaRPr lang="en-US" sz="1080" dirty="0"/>
-          </a:p>
-        </p:txBody>
-      </p:sp>
-      <p:sp>
-        <p:nvSpPr>
-          <p:cNvPr id="24" name="Shape 22"/>
-          <p:cNvSpPr/>
-          <p:nvPr/>
-        </p:nvSpPr>
-        <p:spPr>
-          <a:xfrm>
-            <a:off x="4343400" y="3886200"/>
-            <a:ext cx="3611880" cy="1965960"/>
-          </a:xfrm>
-          <a:prstGeom prst="roundRect">
-            <a:avLst>
-              <a:gd name="adj" fmla="val 3721"/>
-            </a:avLst>
-          </a:prstGeom>
-          <a:solidFill>
-            <a:srgbClr val="F7F9FB"/>
-          </a:solidFill>
-          <a:ln w="12700">
-            <a:solidFill>
-              <a:srgbClr val="E3E8EC"/>
-            </a:solidFill>
-            <a:prstDash val="solid"/>
-          </a:ln>
-          <a:effectLst>
-            <a:outerShdw sx="100000" sy="100000" kx="0" ky="0" algn="bl" rotWithShape="0" blurRad="76200" dist="25400" dir="5400000">
-              <a:srgbClr val="999999">
-                <a:alpha val="18000"/>
-              </a:srgbClr>
-            </a:outerShdw>
-          </a:effectLst>
-        </p:spPr>
-      </p:sp>
-      <p:sp>
-        <p:nvSpPr>
-          <p:cNvPr id="25" name="Shape 23"/>
-          <p:cNvSpPr/>
-          <p:nvPr/>
-        </p:nvSpPr>
-        <p:spPr>
-          <a:xfrm>
-            <a:off x="4572000" y="4114800"/>
-            <a:ext cx="411480" cy="411480"/>
-          </a:xfrm>
-          <a:prstGeom prst="ellipse">
-            <a:avLst/>
-          </a:prstGeom>
-          <a:solidFill>
-            <a:srgbClr val="0F6E56"/>
-          </a:solidFill>
-          <a:ln/>
-        </p:spPr>
-      </p:sp>
-      <p:sp>
-        <p:nvSpPr>
-          <p:cNvPr id="26" name="Text 24"/>
-          <p:cNvSpPr/>
-          <p:nvPr/>
-        </p:nvSpPr>
-        <p:spPr>
-          <a:xfrm>
-            <a:off x="4572000" y="4114800"/>
-            <a:ext cx="411480" cy="411480"/>
-          </a:xfrm>
-          <a:prstGeom prst="rect">
-            <a:avLst/>
-          </a:prstGeom>
-          <a:noFill/>
-          <a:ln/>
-        </p:spPr>
-        <p:txBody>
-          <a:bodyPr wrap="square" rtlCol="0" anchor="ctr"/>
-          <a:lstStyle/>
-          <a:p>
-            <a:pPr algn="ctr" indent="0" marL="0">
-              <a:buNone/>
-            </a:pPr>
-            <a:r>
-              <a:rPr lang="en-US" sz="1400" b="1" dirty="0">
-                <a:solidFill>
-                  <a:srgbClr val="FFFFFF"/>
-                </a:solidFill>
-                <a:latin typeface="Cambria" pitchFamily="34" charset="0"/>
-                <a:ea typeface="Cambria" pitchFamily="34" charset="-122"/>
-                <a:cs typeface="Cambria" pitchFamily="34" charset="-120"/>
-              </a:rPr>
-              <a:t>5</a:t>
-            </a:r>
-            <a:endParaRPr lang="en-US" sz="1400" dirty="0"/>
-          </a:p>
-        </p:txBody>
-      </p:sp>
-      <p:sp>
-        <p:nvSpPr>
-          <p:cNvPr id="27" name="Text 25"/>
-          <p:cNvSpPr/>
-          <p:nvPr/>
-        </p:nvSpPr>
-        <p:spPr>
-          <a:xfrm>
-            <a:off x="4572000" y="4663440"/>
-            <a:ext cx="3154680" cy="502920"/>
-          </a:xfrm>
-          <a:prstGeom prst="rect">
-            <a:avLst/>
-          </a:prstGeom>
-          <a:noFill/>
-          <a:ln/>
-        </p:spPr>
-        <p:txBody>
-          <a:bodyPr wrap="square" rtlCol="0" anchor="ctr"/>
-          <a:lstStyle/>
-          <a:p>
-            <a:pPr indent="0" marL="0">
-              <a:buNone/>
-            </a:pPr>
-            <a:r>
-              <a:rPr lang="en-US" sz="1350" b="1" dirty="0">
-                <a:solidFill>
-                  <a:srgbClr val="1A1A18"/>
-                </a:solidFill>
-                <a:latin typeface="Cambria" pitchFamily="34" charset="0"/>
-                <a:ea typeface="Cambria" pitchFamily="34" charset="-122"/>
-                <a:cs typeface="Cambria" pitchFamily="34" charset="-120"/>
-              </a:rPr>
-              <a:t>Compliance score &amp; real /health</a:t>
-            </a:r>
-            <a:endParaRPr lang="en-US" sz="1350" dirty="0"/>
-          </a:p>
-        </p:txBody>
-      </p:sp>
-      <p:sp>
-        <p:nvSpPr>
-          <p:cNvPr id="28" name="Text 26"/>
-          <p:cNvSpPr/>
-          <p:nvPr/>
-        </p:nvSpPr>
-        <p:spPr>
-          <a:xfrm>
-            <a:off x="4572000" y="5120640"/>
-            <a:ext cx="3154680" cy="640080"/>
-          </a:xfrm>
-          <a:prstGeom prst="rect">
-            <a:avLst/>
-          </a:prstGeom>
-          <a:noFill/>
-          <a:ln/>
-        </p:spPr>
-        <p:txBody>
-          <a:bodyPr wrap="square" rtlCol="0" anchor="ctr"/>
-          <a:lstStyle/>
-          <a:p>
-            <a:pPr indent="0" marL="0">
-              <a:buNone/>
-            </a:pPr>
-            <a:r>
-              <a:rPr lang="en-US" sz="1080" dirty="0">
-                <a:solidFill>
-                  <a:srgbClr val="5F5E5A"/>
-                </a:solidFill>
-                <a:latin typeface="Calibri" pitchFamily="34" charset="0"/>
-                <a:ea typeface="Calibri" pitchFamily="34" charset="-122"/>
-                <a:cs typeface="Calibri" pitchFamily="34" charset="-120"/>
-              </a:rPr>
-              <a:t>Per-category compliance_checks + a 0–1 compliance_score; /health now reports real readiness instead of a hardcoded “ok”.</a:t>
-            </a:r>
-            <a:endParaRPr lang="en-US" sz="1080" dirty="0"/>
-          </a:p>
-        </p:txBody>
-      </p:sp>
-      <p:sp>
-        <p:nvSpPr>
-          <p:cNvPr id="29" name="Text 27"/>
-          <p:cNvSpPr/>
-          <p:nvPr/>
-        </p:nvSpPr>
-        <p:spPr>
-          <a:xfrm>
-            <a:off x="11612880" y="6492240"/>
-            <a:ext cx="457200" cy="274320"/>
-          </a:xfrm>
-          <a:prstGeom prst="rect">
-            <a:avLst/>
-          </a:prstGeom>
-          <a:noFill/>
-          <a:ln/>
-        </p:spPr>
-        <p:txBody>
-          <a:bodyPr wrap="square" rtlCol="0" anchor="ctr"/>
-          <a:lstStyle/>
-          <a:p>
-            <a:pPr algn="r" indent="0" marL="0">
-              <a:buNone/>
-            </a:pPr>
-            <a:r>
-              <a:rPr lang="en-US" sz="1000" dirty="0">
-                <a:solidFill>
-                  <a:srgbClr val="5F5E5A"/>
-                </a:solidFill>
-                <a:latin typeface="Calibri" pitchFamily="34" charset="0"/>
-                <a:ea typeface="Calibri" pitchFamily="34" charset="-122"/>
-                <a:cs typeface="Calibri" pitchFamily="34" charset="-120"/>
-              </a:rPr>
-              <a:t>8</a:t>
-            </a:r>
-            <a:endParaRPr lang="en-US" sz="1000" dirty="0"/>
-          </a:p>
-        </p:txBody>
-      </p:sp>
-    </p:spTree>
-  </p:cSld>
-  <p:clrMapOvr>
-    <a:masterClrMapping/>
-  </p:clrMapOvr>
-</p:sld>
-</file>
-
-<file path=ppt/slides/slide17.xml><?xml version="1.0" encoding="utf-8"?>
-<p:sld xmlns:a="http://schemas.openxmlformats.org/drawingml/2006/main" xmlns:r="http://schemas.openxmlformats.org/officeDocument/2006/relationships" xmlns:p="http://schemas.openxmlformats.org/presentationml/2006/main">
-  <p:cSld name="Slide 11">
-    <p:bg>
-      <p:bgPr>
-        <a:solidFill>
-          <a:srgbClr val="FFFFFF"/>
-        </a:solidFill>
-      </p:bgPr>
-    </p:bg>
-    <p:spTree>
-      <p:nvGrpSpPr>
-        <p:cNvPr id="1" name=""/>
-        <p:cNvGrpSpPr/>
-        <p:nvPr/>
-      </p:nvGrpSpPr>
-      <p:grpSpPr>
-        <a:xfrm>
-          <a:off x="0" y="0"/>
-          <a:ext cx="0" cy="0"/>
-          <a:chOff x="0" y="0"/>
-          <a:chExt cx="0" cy="0"/>
-        </a:xfrm>
-      </p:grpSpPr>
-      <p:sp>
-        <p:nvSpPr>
-          <p:cNvPr id="2" name="Text 0"/>
-          <p:cNvSpPr/>
-          <p:nvPr/>
-        </p:nvSpPr>
-        <p:spPr>
-          <a:xfrm>
-            <a:off x="548640" y="365760"/>
-            <a:ext cx="7315200" cy="320040"/>
-          </a:xfrm>
-          <a:prstGeom prst="rect">
-            <a:avLst/>
-          </a:prstGeom>
-          <a:noFill/>
-          <a:ln/>
-        </p:spPr>
-        <p:txBody>
-          <a:bodyPr wrap="square" rtlCol="0" anchor="ctr"/>
-          <a:lstStyle/>
-          <a:p>
-            <a:pPr indent="0" marL="0">
-              <a:buNone/>
-            </a:pPr>
-            <a:r>
-              <a:rPr lang="en-US" sz="1200" b="1" spc="200" kern="0" dirty="0">
-                <a:solidFill>
-                  <a:srgbClr val="0F6E56"/>
-                </a:solidFill>
-                <a:latin typeface="Calibri" pitchFamily="34" charset="0"/>
-                <a:ea typeface="Calibri" pitchFamily="34" charset="-122"/>
-                <a:cs typeface="Calibri" pitchFamily="34" charset="-120"/>
-              </a:rPr>
-              <a:t>REAL BUGS FOUND &amp; FIXED — PART 4</a:t>
-            </a:r>
-            <a:endParaRPr lang="en-US" sz="1200" dirty="0"/>
-          </a:p>
-        </p:txBody>
-      </p:sp>
-      <p:sp>
-        <p:nvSpPr>
-          <p:cNvPr id="3" name="Text 1"/>
-          <p:cNvSpPr/>
-          <p:nvPr/>
-        </p:nvSpPr>
-        <p:spPr>
-          <a:xfrm>
-            <a:off x="548640" y="640080"/>
-            <a:ext cx="11064240" cy="822960"/>
-          </a:xfrm>
-          <a:prstGeom prst="rect">
-            <a:avLst/>
-          </a:prstGeom>
-          <a:noFill/>
-          <a:ln/>
-        </p:spPr>
-        <p:txBody>
-          <a:bodyPr wrap="square" rtlCol="0" anchor="ctr"/>
-          <a:lstStyle/>
-          <a:p>
-            <a:pPr algn="l" indent="0" marL="0">
-              <a:buNone/>
-            </a:pPr>
-            <a:r>
-              <a:rPr lang="en-US" sz="3000" b="1" dirty="0">
-                <a:solidFill>
-                  <a:srgbClr val="1F4E79"/>
-                </a:solidFill>
-                <a:latin typeface="Cambria" pitchFamily="34" charset="0"/>
-                <a:ea typeface="Cambria" pitchFamily="34" charset="-122"/>
-                <a:cs typeface="Cambria" pitchFamily="34" charset="-120"/>
-              </a:rPr>
-              <a:t>Both found through real end-to-end testing this session, not code review</a:t>
-            </a:r>
-            <a:endParaRPr lang="en-US" sz="3000" dirty="0"/>
-          </a:p>
-        </p:txBody>
-      </p:sp>
-      <p:sp>
-        <p:nvSpPr>
-          <p:cNvPr id="4" name="Shape 2"/>
-          <p:cNvSpPr/>
-          <p:nvPr/>
-        </p:nvSpPr>
-        <p:spPr>
-          <a:xfrm>
-            <a:off x="548640" y="1600200"/>
-            <a:ext cx="5394960" cy="4160520"/>
-          </a:xfrm>
-          <a:prstGeom prst="roundRect">
-            <a:avLst>
-              <a:gd name="adj" fmla="val 1758"/>
-            </a:avLst>
-          </a:prstGeom>
-          <a:solidFill>
-            <a:srgbClr val="F7F9FB"/>
-          </a:solidFill>
-          <a:ln w="12700">
-            <a:solidFill>
-              <a:srgbClr val="E3E8EC"/>
-            </a:solidFill>
-            <a:prstDash val="solid"/>
-          </a:ln>
-          <a:effectLst>
-            <a:outerShdw sx="100000" sy="100000" kx="0" ky="0" algn="bl" rotWithShape="0" blurRad="76200" dist="25400" dir="5400000">
-              <a:srgbClr val="999999">
-                <a:alpha val="18000"/>
-              </a:srgbClr>
-            </a:outerShdw>
-          </a:effectLst>
-        </p:spPr>
-      </p:sp>
-      <p:sp>
-        <p:nvSpPr>
-          <p:cNvPr id="5" name="Shape 3"/>
-          <p:cNvSpPr/>
-          <p:nvPr/>
-        </p:nvSpPr>
-        <p:spPr>
-          <a:xfrm>
-            <a:off x="822960" y="1874520"/>
-            <a:ext cx="457200" cy="457200"/>
-          </a:xfrm>
-          <a:prstGeom prst="ellipse">
-            <a:avLst/>
-          </a:prstGeom>
-          <a:solidFill>
-            <a:srgbClr val="993C1D"/>
-          </a:solidFill>
-          <a:ln/>
-        </p:spPr>
-      </p:sp>
-      <p:sp>
-        <p:nvSpPr>
-          <p:cNvPr id="6" name="Text 4"/>
-          <p:cNvSpPr/>
-          <p:nvPr/>
-        </p:nvSpPr>
-        <p:spPr>
-          <a:xfrm>
-            <a:off x="822960" y="1874520"/>
-            <a:ext cx="457200" cy="457200"/>
-          </a:xfrm>
-          <a:prstGeom prst="rect">
-            <a:avLst/>
-          </a:prstGeom>
-          <a:noFill/>
-          <a:ln/>
-        </p:spPr>
-        <p:txBody>
-          <a:bodyPr wrap="square" rtlCol="0" anchor="ctr"/>
-          <a:lstStyle/>
-          <a:p>
-            <a:pPr algn="ctr" indent="0" marL="0">
-              <a:buNone/>
-            </a:pPr>
-            <a:r>
-              <a:rPr lang="en-US" sz="1600" b="1" dirty="0">
-                <a:solidFill>
-                  <a:srgbClr val="FFFFFF"/>
-                </a:solidFill>
-                <a:latin typeface="Cambria" pitchFamily="34" charset="0"/>
-                <a:ea typeface="Cambria" pitchFamily="34" charset="-122"/>
-                <a:cs typeface="Cambria" pitchFamily="34" charset="-120"/>
-              </a:rPr>
-              <a:t>6</a:t>
-            </a:r>
-            <a:endParaRPr lang="en-US" sz="1600" dirty="0"/>
-          </a:p>
-        </p:txBody>
-      </p:sp>
-      <p:sp>
-        <p:nvSpPr>
-          <p:cNvPr id="7" name="Shape 5"/>
-          <p:cNvSpPr/>
-          <p:nvPr/>
-        </p:nvSpPr>
-        <p:spPr>
-          <a:xfrm>
-            <a:off x="1463040" y="1920240"/>
-            <a:ext cx="2103120" cy="365760"/>
-          </a:xfrm>
-          <a:prstGeom prst="roundRect">
-            <a:avLst>
-              <a:gd name="adj" fmla="val 15000"/>
-            </a:avLst>
-          </a:prstGeom>
-          <a:solidFill>
-            <a:srgbClr val="EBF3FB"/>
-          </a:solidFill>
-          <a:ln/>
-        </p:spPr>
-      </p:sp>
-      <p:sp>
-        <p:nvSpPr>
-          <p:cNvPr id="8" name="Text 6"/>
-          <p:cNvSpPr/>
-          <p:nvPr/>
-        </p:nvSpPr>
-        <p:spPr>
-          <a:xfrm>
-            <a:off x="1463040" y="1920240"/>
-            <a:ext cx="2103120" cy="365760"/>
-          </a:xfrm>
-          <a:prstGeom prst="rect">
-            <a:avLst/>
-          </a:prstGeom>
-          <a:noFill/>
-          <a:ln/>
-        </p:spPr>
-        <p:txBody>
-          <a:bodyPr wrap="square" rtlCol="0" anchor="ctr"/>
-          <a:lstStyle/>
-          <a:p>
-            <a:pPr algn="ctr" indent="0" marL="0">
-              <a:buNone/>
-            </a:pPr>
-            <a:r>
-              <a:rPr lang="en-US" sz="1000" b="1" dirty="0">
-                <a:solidFill>
-                  <a:srgbClr val="1F4E79"/>
-                </a:solidFill>
-                <a:latin typeface="Calibri" pitchFamily="34" charset="0"/>
-                <a:ea typeface="Calibri" pitchFamily="34" charset="-122"/>
-                <a:cs typeface="Calibri" pitchFamily="34" charset="-120"/>
-              </a:rPr>
-              <a:t>CUMULATIVE SPAN REPORTING</a:t>
-            </a:r>
-            <a:endParaRPr lang="en-US" sz="1000" dirty="0"/>
-          </a:p>
-        </p:txBody>
-      </p:sp>
-      <p:sp>
-        <p:nvSpPr>
-          <p:cNvPr id="9" name="Text 7"/>
-          <p:cNvSpPr/>
-          <p:nvPr/>
-        </p:nvSpPr>
-        <p:spPr>
-          <a:xfrm>
-            <a:off x="822960" y="2468880"/>
-            <a:ext cx="4846320" cy="594360"/>
-          </a:xfrm>
-          <a:prstGeom prst="rect">
-            <a:avLst/>
-          </a:prstGeom>
-          <a:noFill/>
-          <a:ln/>
-        </p:spPr>
-        <p:txBody>
-          <a:bodyPr wrap="square" rtlCol="0" anchor="ctr"/>
-          <a:lstStyle/>
-          <a:p>
-            <a:pPr indent="0" marL="0">
-              <a:buNone/>
-            </a:pPr>
-            <a:r>
-              <a:rPr lang="en-US" sz="1500" b="1" dirty="0">
-                <a:solidFill>
-                  <a:srgbClr val="1A1A18"/>
-                </a:solidFill>
-                <a:latin typeface="Cambria" pitchFamily="34" charset="0"/>
-                <a:ea typeface="Cambria" pitchFamily="34" charset="-122"/>
-                <a:cs typeface="Cambria" pitchFamily="34" charset="-120"/>
-              </a:rPr>
-              <a:t>A retry pass silently discarded everything found earlier in the run</a:t>
-            </a:r>
-            <a:endParaRPr lang="en-US" sz="1500" dirty="0"/>
-          </a:p>
-        </p:txBody>
-      </p:sp>
-      <p:sp>
-        <p:nvSpPr>
-          <p:cNvPr id="10" name="Text 8"/>
-          <p:cNvSpPr/>
-          <p:nvPr/>
-        </p:nvSpPr>
-        <p:spPr>
-          <a:xfrm>
-            <a:off x="822960" y="3108960"/>
-            <a:ext cx="4846320" cy="1463040"/>
-          </a:xfrm>
-          <a:prstGeom prst="rect">
-            <a:avLst/>
-          </a:prstGeom>
-          <a:noFill/>
-          <a:ln/>
-        </p:spPr>
-        <p:txBody>
-          <a:bodyPr wrap="square" rtlCol="0" anchor="ctr"/>
-          <a:lstStyle/>
-          <a:p>
-            <a:pPr indent="0" marL="0">
-              <a:buNone/>
-            </a:pPr>
-            <a:r>
-              <a:rPr lang="en-US" sz="1100" dirty="0">
-                <a:solidFill>
-                  <a:srgbClr val="5F5E5A"/>
-                </a:solidFill>
-                <a:latin typeface="Calibri" pitchFamily="34" charset="0"/>
-                <a:ea typeface="Calibri" pitchFamily="34" charset="-122"/>
-                <a:cs typeface="Calibri" pitchFamily="34" charset="-120"/>
-              </a:rPr>
-              <a:t>Submitting the PDF sample through the Streamlit UI showed only 1 PHI span detected, with MRN and PERSON reported as missing — yet the redacted output clearly showed both redacted. PHIDetectionAgent re-scans only the current redacted_text on a retry (by design), but PHIValidationAgent and AuditReportAgent read phi_spans, which gets replaced, not merged, on every pass.</a:t>
-            </a:r>
-            <a:endParaRPr lang="en-US" sz="1100" dirty="0"/>
-          </a:p>
-        </p:txBody>
-      </p:sp>
-      <p:sp>
-        <p:nvSpPr>
-          <p:cNvPr id="11" name="Text 9"/>
-          <p:cNvSpPr/>
-          <p:nvPr/>
-        </p:nvSpPr>
-        <p:spPr>
-          <a:xfrm>
-            <a:off x="822960" y="4663440"/>
-            <a:ext cx="4846320" cy="960120"/>
-          </a:xfrm>
-          <a:prstGeom prst="rect">
-            <a:avLst/>
-          </a:prstGeom>
-          <a:noFill/>
-          <a:ln/>
-        </p:spPr>
-        <p:txBody>
-          <a:bodyPr wrap="square" rtlCol="0" anchor="ctr"/>
-          <a:lstStyle/>
-          <a:p>
-            <a:pPr indent="0" marL="0">
-              <a:buNone/>
-            </a:pPr>
-            <a:r>
-              <a:rPr lang="en-US" sz="1100" b="1" dirty="0">
-                <a:solidFill>
-                  <a:srgbClr val="0F6E56"/>
-                </a:solidFill>
-                <a:latin typeface="Calibri" pitchFamily="34" charset="0"/>
-                <a:ea typeface="Calibri" pitchFamily="34" charset="-122"/>
-                <a:cs typeface="Calibri" pitchFamily="34" charset="-120"/>
-              </a:rPr>
-              <a:t>Fix: </a:t>
-            </a:r>
-            <a:pPr indent="0" marL="0">
-              <a:buNone/>
-            </a:pPr>
-            <a:r>
-              <a:rPr lang="en-US" sz="1100" dirty="0">
-                <a:solidFill>
-                  <a:srgbClr val="0D5040"/>
-                </a:solidFill>
-                <a:latin typeface="Calibri" pitchFamily="34" charset="0"/>
-                <a:ea typeface="Calibri" pitchFamily="34" charset="-122"/>
-                <a:cs typeface="Calibri" pitchFamily="34" charset="-120"/>
-              </a:rPr>
-              <a:t>Added all_detected_spans to GraphState, an accumulator PHIDetectionAgent appends to on every pass. Confirmed via 2 new regression tests reproducing the exact scenario; 53 tests passing at the time.</a:t>
-            </a:r>
-            <a:endParaRPr lang="en-US" sz="1100" dirty="0"/>
-          </a:p>
-        </p:txBody>
-      </p:sp>
-      <p:sp>
-        <p:nvSpPr>
-          <p:cNvPr id="12" name="Shape 10"/>
-          <p:cNvSpPr/>
-          <p:nvPr/>
-        </p:nvSpPr>
-        <p:spPr>
-          <a:xfrm>
-            <a:off x="6217920" y="1600200"/>
-            <a:ext cx="5394960" cy="4160520"/>
-          </a:xfrm>
-          <a:prstGeom prst="roundRect">
-            <a:avLst>
-              <a:gd name="adj" fmla="val 1758"/>
-            </a:avLst>
-          </a:prstGeom>
-          <a:solidFill>
-            <a:srgbClr val="F7F9FB"/>
-          </a:solidFill>
-          <a:ln w="12700">
-            <a:solidFill>
-              <a:srgbClr val="E3E8EC"/>
-            </a:solidFill>
-            <a:prstDash val="solid"/>
-          </a:ln>
-          <a:effectLst>
-            <a:outerShdw sx="100000" sy="100000" kx="0" ky="0" algn="bl" rotWithShape="0" blurRad="76200" dist="25400" dir="5400000">
-              <a:srgbClr val="999999">
-                <a:alpha val="18000"/>
-              </a:srgbClr>
-            </a:outerShdw>
-          </a:effectLst>
-        </p:spPr>
-      </p:sp>
-      <p:sp>
-        <p:nvSpPr>
-          <p:cNvPr id="13" name="Shape 11"/>
-          <p:cNvSpPr/>
-          <p:nvPr/>
-        </p:nvSpPr>
-        <p:spPr>
-          <a:xfrm>
-            <a:off x="6492240" y="1874520"/>
-            <a:ext cx="457200" cy="457200"/>
-          </a:xfrm>
-          <a:prstGeom prst="ellipse">
-            <a:avLst/>
-          </a:prstGeom>
-          <a:solidFill>
-            <a:srgbClr val="993C1D"/>
-          </a:solidFill>
-          <a:ln/>
-        </p:spPr>
-      </p:sp>
-      <p:sp>
-        <p:nvSpPr>
-          <p:cNvPr id="14" name="Text 12"/>
-          <p:cNvSpPr/>
-          <p:nvPr/>
-        </p:nvSpPr>
-        <p:spPr>
-          <a:xfrm>
-            <a:off x="6492240" y="1874520"/>
-            <a:ext cx="457200" cy="457200"/>
-          </a:xfrm>
-          <a:prstGeom prst="rect">
-            <a:avLst/>
-          </a:prstGeom>
-          <a:noFill/>
-          <a:ln/>
-        </p:spPr>
-        <p:txBody>
-          <a:bodyPr wrap="square" rtlCol="0" anchor="ctr"/>
-          <a:lstStyle/>
-          <a:p>
-            <a:pPr algn="ctr" indent="0" marL="0">
-              <a:buNone/>
-            </a:pPr>
-            <a:r>
-              <a:rPr lang="en-US" sz="1600" b="1" dirty="0">
-                <a:solidFill>
-                  <a:srgbClr val="FFFFFF"/>
-                </a:solidFill>
-                <a:latin typeface="Cambria" pitchFamily="34" charset="0"/>
-                <a:ea typeface="Cambria" pitchFamily="34" charset="-122"/>
-                <a:cs typeface="Cambria" pitchFamily="34" charset="-120"/>
-              </a:rPr>
-              <a:t>7</a:t>
-            </a:r>
-            <a:endParaRPr lang="en-US" sz="1600" dirty="0"/>
-          </a:p>
-        </p:txBody>
-      </p:sp>
-      <p:sp>
-        <p:nvSpPr>
-          <p:cNvPr id="15" name="Shape 13"/>
-          <p:cNvSpPr/>
-          <p:nvPr/>
-        </p:nvSpPr>
-        <p:spPr>
-          <a:xfrm>
-            <a:off x="7132320" y="1920240"/>
-            <a:ext cx="2103120" cy="365760"/>
-          </a:xfrm>
-          <a:prstGeom prst="roundRect">
-            <a:avLst>
-              <a:gd name="adj" fmla="val 15000"/>
-            </a:avLst>
-          </a:prstGeom>
-          <a:solidFill>
-            <a:srgbClr val="FAECE7"/>
-          </a:solidFill>
-          <a:ln/>
-        </p:spPr>
-      </p:sp>
-      <p:sp>
-        <p:nvSpPr>
-          <p:cNvPr id="16" name="Text 14"/>
-          <p:cNvSpPr/>
-          <p:nvPr/>
-        </p:nvSpPr>
-        <p:spPr>
-          <a:xfrm>
-            <a:off x="7132320" y="1920240"/>
-            <a:ext cx="2103120" cy="365760"/>
-          </a:xfrm>
-          <a:prstGeom prst="rect">
-            <a:avLst/>
-          </a:prstGeom>
-          <a:noFill/>
-          <a:ln/>
-        </p:spPr>
-        <p:txBody>
-          <a:bodyPr wrap="square" rtlCol="0" anchor="ctr"/>
-          <a:lstStyle/>
-          <a:p>
-            <a:pPr algn="ctr" indent="0" marL="0">
-              <a:buNone/>
-            </a:pPr>
-            <a:r>
-              <a:rPr lang="en-US" sz="1000" b="1" dirty="0">
-                <a:solidFill>
-                  <a:srgbClr val="993C1D"/>
-                </a:solidFill>
-                <a:latin typeface="Calibri" pitchFamily="34" charset="0"/>
-                <a:ea typeface="Calibri" pitchFamily="34" charset="-122"/>
-                <a:cs typeface="Calibri" pitchFamily="34" charset="-120"/>
-              </a:rPr>
-              <a:t>AMBIGUOUS IDENTIFIER + THRESHOLD KEY</a:t>
-            </a:r>
-            <a:endParaRPr lang="en-US" sz="1000" dirty="0"/>
-          </a:p>
-        </p:txBody>
-      </p:sp>
-      <p:sp>
-        <p:nvSpPr>
-          <p:cNvPr id="17" name="Text 15"/>
-          <p:cNvSpPr/>
-          <p:nvPr/>
-        </p:nvSpPr>
-        <p:spPr>
-          <a:xfrm>
-            <a:off x="6492240" y="2468880"/>
-            <a:ext cx="4846320" cy="594360"/>
-          </a:xfrm>
-          <a:prstGeom prst="rect">
-            <a:avLst/>
-          </a:prstGeom>
-          <a:noFill/>
-          <a:ln/>
-        </p:spPr>
-        <p:txBody>
-          <a:bodyPr wrap="square" rtlCol="0" anchor="ctr"/>
-          <a:lstStyle/>
-          <a:p>
-            <a:pPr indent="0" marL="0">
-              <a:buNone/>
-            </a:pPr>
-            <a:r>
-              <a:rPr lang="en-US" sz="1500" b="1" dirty="0">
-                <a:solidFill>
-                  <a:srgbClr val="1A1A18"/>
-                </a:solidFill>
-                <a:latin typeface="Cambria" pitchFamily="34" charset="0"/>
-                <a:ea typeface="Cambria" pitchFamily="34" charset="-122"/>
-                <a:cs typeface="Cambria" pitchFamily="34" charset="-120"/>
-              </a:rPr>
-              <a:t>The human-review demo sample didn't actually trigger review</a:t>
-            </a:r>
-            <a:endParaRPr lang="en-US" sz="1500" dirty="0"/>
-          </a:p>
-        </p:txBody>
-      </p:sp>
-      <p:sp>
-        <p:nvSpPr>
-          <p:cNvPr id="18" name="Text 16"/>
-          <p:cNvSpPr/>
-          <p:nvPr/>
-        </p:nvSpPr>
-        <p:spPr>
-          <a:xfrm>
-            <a:off x="6492240" y="3108960"/>
-            <a:ext cx="4846320" cy="1463040"/>
-          </a:xfrm>
-          <a:prstGeom prst="rect">
-            <a:avLst/>
-          </a:prstGeom>
-          <a:noFill/>
-          <a:ln/>
-        </p:spPr>
-        <p:txBody>
-          <a:bodyPr wrap="square" rtlCol="0" anchor="ctr"/>
-          <a:lstStyle/>
-          <a:p>
-            <a:pPr indent="0" marL="0">
-              <a:buNone/>
-            </a:pPr>
-            <a:r>
-              <a:rPr lang="en-US" sz="1100" dirty="0">
-                <a:solidFill>
-                  <a:srgbClr val="5F5E5A"/>
-                </a:solidFill>
-                <a:latin typeface="Calibri" pitchFamily="34" charset="0"/>
-                <a:ea typeface="Calibri" pitchFamily="34" charset="-122"/>
-                <a:cs typeface="Calibri" pitchFamily="34" charset="-120"/>
-              </a:rPr>
-              <a:t>An earlier attempt used an unlabeled phone number, guessing it would score low — real testing proved that wrong (a custom recognizer scores any 10-digit match 0.75, well above threshold). Also found: CONFIDENCE_THRESHOLDS only had a “SSN” key; Presidio's real entity type is “US_SSN”, silently falling back to a 0.7 default instead of the intended 0.6.</a:t>
-            </a:r>
-            <a:endParaRPr lang="en-US" sz="1100" dirty="0"/>
-          </a:p>
-        </p:txBody>
-      </p:sp>
-      <p:sp>
-        <p:nvSpPr>
-          <p:cNvPr id="19" name="Text 17"/>
-          <p:cNvSpPr/>
-          <p:nvPr/>
-        </p:nvSpPr>
-        <p:spPr>
-          <a:xfrm>
-            <a:off x="6492240" y="4663440"/>
-            <a:ext cx="4846320" cy="960120"/>
-          </a:xfrm>
-          <a:prstGeom prst="rect">
-            <a:avLst/>
-          </a:prstGeom>
-          <a:noFill/>
-          <a:ln/>
-        </p:spPr>
-        <p:txBody>
-          <a:bodyPr wrap="square" rtlCol="0" anchor="ctr"/>
-          <a:lstStyle/>
-          <a:p>
-            <a:pPr indent="0" marL="0">
-              <a:buNone/>
-            </a:pPr>
-            <a:r>
-              <a:rPr lang="en-US" sz="1100" b="1" dirty="0">
-                <a:solidFill>
-                  <a:srgbClr val="0F6E56"/>
-                </a:solidFill>
-                <a:latin typeface="Calibri" pitchFamily="34" charset="0"/>
-                <a:ea typeface="Calibri" pitchFamily="34" charset="-122"/>
-                <a:cs typeface="Calibri" pitchFamily="34" charset="-120"/>
-              </a:rPr>
-              <a:t>Fix: </a:t>
-            </a:r>
-            <a:pPr indent="0" marL="0">
-              <a:buNone/>
-            </a:pPr>
-            <a:r>
-              <a:rPr lang="en-US" sz="1100" dirty="0">
-                <a:solidFill>
-                  <a:srgbClr val="0D5040"/>
-                </a:solidFill>
-                <a:latin typeface="Calibri" pitchFamily="34" charset="0"/>
-                <a:ea typeface="Calibri" pitchFamily="34" charset="-122"/>
-                <a:cs typeface="Calibri" pitchFamily="34" charset="-120"/>
-              </a:rPr>
-              <a:t>Fixed by testing real Presidio recognizers directly: a bare 9-digit number scores 0.4 (below 0.65). Added it to the sample doc and the missing “US_SSN” threshold key. Confirmed live: human_review_invoked: true.</a:t>
-            </a:r>
-            <a:endParaRPr lang="en-US" sz="1100" dirty="0"/>
-          </a:p>
-        </p:txBody>
-      </p:sp>
-      <p:sp>
-        <p:nvSpPr>
-          <p:cNvPr id="20" name="Text 18"/>
-          <p:cNvSpPr/>
-          <p:nvPr/>
-        </p:nvSpPr>
-        <p:spPr>
-          <a:xfrm>
-            <a:off x="11612880" y="6492240"/>
-            <a:ext cx="457200" cy="274320"/>
-          </a:xfrm>
-          <a:prstGeom prst="rect">
-            <a:avLst/>
-          </a:prstGeom>
-          <a:noFill/>
-          <a:ln/>
-        </p:spPr>
-        <p:txBody>
-          <a:bodyPr wrap="square" rtlCol="0" anchor="ctr"/>
-          <a:lstStyle/>
-          <a:p>
-            <a:pPr algn="r" indent="0" marL="0">
-              <a:buNone/>
-            </a:pPr>
-            <a:r>
-              <a:rPr lang="en-US" sz="1000" dirty="0">
-                <a:solidFill>
-                  <a:srgbClr val="5F5E5A"/>
-                </a:solidFill>
-                <a:latin typeface="Calibri" pitchFamily="34" charset="0"/>
-                <a:ea typeface="Calibri" pitchFamily="34" charset="-122"/>
-                <a:cs typeface="Calibri" pitchFamily="34" charset="-120"/>
-              </a:rPr>
-              <a:t>14</a:t>
-            </a:r>
-            <a:endParaRPr lang="en-US" sz="1000" dirty="0"/>
-          </a:p>
-        </p:txBody>
-      </p:sp>
-    </p:spTree>
-  </p:cSld>
-  <p:clrMapOvr>
-    <a:masterClrMapping/>
-  </p:clrMapOvr>
-</p:sld>
-</file>
-
-<file path=ppt/slides/slide18.xml><?xml version="1.0" encoding="utf-8"?>
-<p:sld xmlns:a="http://schemas.openxmlformats.org/drawingml/2006/main" xmlns:r="http://schemas.openxmlformats.org/officeDocument/2006/relationships" xmlns:p="http://schemas.openxmlformats.org/presentationml/2006/main">
-  <p:cSld name="Slide 12">
-    <p:bg>
-      <p:bgPr>
-        <a:solidFill>
-          <a:srgbClr val="FFFFFF"/>
-        </a:solidFill>
-      </p:bgPr>
-    </p:bg>
-    <p:spTree>
-      <p:nvGrpSpPr>
-        <p:cNvPr id="1" name=""/>
-        <p:cNvGrpSpPr/>
-        <p:nvPr/>
-      </p:nvGrpSpPr>
-      <p:grpSpPr>
-        <a:xfrm>
-          <a:off x="0" y="0"/>
-          <a:ext cx="0" cy="0"/>
-          <a:chOff x="0" y="0"/>
-          <a:chExt cx="0" cy="0"/>
-        </a:xfrm>
-      </p:grpSpPr>
-      <p:sp>
-        <p:nvSpPr>
-          <p:cNvPr id="2" name="Text 0"/>
-          <p:cNvSpPr/>
-          <p:nvPr/>
-        </p:nvSpPr>
-        <p:spPr>
-          <a:xfrm>
-            <a:off x="548640" y="365760"/>
-            <a:ext cx="7315200" cy="320040"/>
-          </a:xfrm>
-          <a:prstGeom prst="rect">
-            <a:avLst/>
-          </a:prstGeom>
-          <a:noFill/>
-          <a:ln/>
-        </p:spPr>
-        <p:txBody>
-          <a:bodyPr wrap="square" rtlCol="0" anchor="ctr"/>
-          <a:lstStyle/>
-          <a:p>
-            <a:pPr indent="0" marL="0">
-              <a:buNone/>
-            </a:pPr>
-            <a:r>
-              <a:rPr lang="en-US" sz="1200" b="1" spc="200" kern="0" dirty="0">
-                <a:solidFill>
-                  <a:srgbClr val="0F6E56"/>
-                </a:solidFill>
-                <a:latin typeface="Calibri" pitchFamily="34" charset="0"/>
-                <a:ea typeface="Calibri" pitchFamily="34" charset="-122"/>
-                <a:cs typeface="Calibri" pitchFamily="34" charset="-120"/>
-              </a:rPr>
-              <a:t>REAL BUGS FOUND &amp; FIXED — PART 5</a:t>
-            </a:r>
-            <a:endParaRPr lang="en-US" sz="1200" dirty="0"/>
-          </a:p>
-        </p:txBody>
-      </p:sp>
-      <p:sp>
-        <p:nvSpPr>
-          <p:cNvPr id="3" name="Text 1"/>
-          <p:cNvSpPr/>
-          <p:nvPr/>
-        </p:nvSpPr>
-        <p:spPr>
-          <a:xfrm>
-            <a:off x="548640" y="640080"/>
-            <a:ext cx="11064240" cy="822960"/>
-          </a:xfrm>
-          <a:prstGeom prst="rect">
-            <a:avLst/>
-          </a:prstGeom>
-          <a:noFill/>
-          <a:ln/>
-        </p:spPr>
-        <p:txBody>
-          <a:bodyPr wrap="square" rtlCol="0" anchor="ctr"/>
-          <a:lstStyle/>
-          <a:p>
-            <a:pPr algn="l" indent="0" marL="0">
-              <a:buNone/>
-            </a:pPr>
-            <a:r>
-              <a:rPr lang="en-US" sz="3000" b="1" dirty="0">
-                <a:solidFill>
-                  <a:srgbClr val="1F4E79"/>
-                </a:solidFill>
-                <a:latin typeface="Cambria" pitchFamily="34" charset="0"/>
-                <a:ea typeface="Cambria" pitchFamily="34" charset="-122"/>
-                <a:cs typeface="Cambria" pitchFamily="34" charset="-120"/>
-              </a:rPr>
-              <a:t>Found testing the live LLM classification backend end-to-end</a:t>
-            </a:r>
-            <a:endParaRPr lang="en-US" sz="3000" dirty="0"/>
-          </a:p>
-        </p:txBody>
-      </p:sp>
-      <p:sp>
-        <p:nvSpPr>
-          <p:cNvPr id="4" name="Shape 2"/>
-          <p:cNvSpPr/>
-          <p:nvPr/>
-        </p:nvSpPr>
-        <p:spPr>
-          <a:xfrm>
-            <a:off x="548640" y="1691640"/>
-            <a:ext cx="11064240" cy="1965960"/>
-          </a:xfrm>
-          <a:prstGeom prst="roundRect">
-            <a:avLst>
-              <a:gd name="adj" fmla="val 3721"/>
-            </a:avLst>
-          </a:prstGeom>
-          <a:solidFill>
-            <a:srgbClr val="F7F9FB"/>
-          </a:solidFill>
-          <a:ln w="12700">
-            <a:solidFill>
-              <a:srgbClr val="E3E8EC"/>
-            </a:solidFill>
-            <a:prstDash val="solid"/>
-          </a:ln>
-          <a:effectLst>
-            <a:outerShdw sx="100000" sy="100000" kx="0" ky="0" algn="bl" rotWithShape="0" blurRad="76200" dist="25400" dir="5400000">
-              <a:srgbClr val="999999">
-                <a:alpha val="18000"/>
-              </a:srgbClr>
-            </a:outerShdw>
-          </a:effectLst>
-        </p:spPr>
-      </p:sp>
-      <p:sp>
-        <p:nvSpPr>
-          <p:cNvPr id="5" name="Shape 3"/>
-          <p:cNvSpPr/>
-          <p:nvPr/>
-        </p:nvSpPr>
-        <p:spPr>
-          <a:xfrm>
-            <a:off x="822960" y="1965960"/>
-            <a:ext cx="457200" cy="457200"/>
-          </a:xfrm>
-          <a:prstGeom prst="ellipse">
-            <a:avLst/>
-          </a:prstGeom>
-          <a:solidFill>
-            <a:srgbClr val="993C1D"/>
-          </a:solidFill>
-          <a:ln/>
-        </p:spPr>
-      </p:sp>
-      <p:sp>
-        <p:nvSpPr>
-          <p:cNvPr id="6" name="Text 4"/>
-          <p:cNvSpPr/>
-          <p:nvPr/>
-        </p:nvSpPr>
-        <p:spPr>
-          <a:xfrm>
-            <a:off x="822960" y="1965960"/>
-            <a:ext cx="457200" cy="457200"/>
-          </a:xfrm>
-          <a:prstGeom prst="rect">
-            <a:avLst/>
-          </a:prstGeom>
-          <a:noFill/>
-          <a:ln/>
-        </p:spPr>
-        <p:txBody>
-          <a:bodyPr wrap="square" rtlCol="0" anchor="ctr"/>
-          <a:lstStyle/>
-          <a:p>
-            <a:pPr algn="ctr" indent="0" marL="0">
-              <a:buNone/>
-            </a:pPr>
-            <a:r>
-              <a:rPr lang="en-US" sz="1600" b="1" dirty="0">
-                <a:solidFill>
-                  <a:srgbClr val="FFFFFF"/>
-                </a:solidFill>
-                <a:latin typeface="Cambria" pitchFamily="34" charset="0"/>
-                <a:ea typeface="Cambria" pitchFamily="34" charset="-122"/>
-                <a:cs typeface="Cambria" pitchFamily="34" charset="-120"/>
-              </a:rPr>
-              <a:t>8</a:t>
-            </a:r>
-            <a:endParaRPr lang="en-US" sz="1600" dirty="0"/>
-          </a:p>
-        </p:txBody>
-      </p:sp>
-      <p:sp>
-        <p:nvSpPr>
-          <p:cNvPr id="7" name="Shape 5"/>
-          <p:cNvSpPr/>
-          <p:nvPr/>
-        </p:nvSpPr>
-        <p:spPr>
-          <a:xfrm>
-            <a:off x="1463040" y="2011680"/>
-            <a:ext cx="3017520" cy="365760"/>
-          </a:xfrm>
-          <a:prstGeom prst="roundRect">
-            <a:avLst>
-              <a:gd name="adj" fmla="val 15000"/>
-            </a:avLst>
-          </a:prstGeom>
-          <a:solidFill>
-            <a:srgbClr val="FAEEDA"/>
-          </a:solidFill>
-          <a:ln/>
-        </p:spPr>
-      </p:sp>
-      <p:sp>
-        <p:nvSpPr>
-          <p:cNvPr id="8" name="Text 6"/>
-          <p:cNvSpPr/>
-          <p:nvPr/>
-        </p:nvSpPr>
-        <p:spPr>
-          <a:xfrm>
-            <a:off x="1463040" y="2011680"/>
-            <a:ext cx="3017520" cy="365760"/>
-          </a:xfrm>
-          <a:prstGeom prst="rect">
-            <a:avLst/>
-          </a:prstGeom>
-          <a:noFill/>
-          <a:ln/>
-        </p:spPr>
-        <p:txBody>
-          <a:bodyPr wrap="square" rtlCol="0" anchor="ctr"/>
-          <a:lstStyle/>
-          <a:p>
-            <a:pPr algn="ctr" indent="0" marL="0">
-              <a:buNone/>
-            </a:pPr>
-            <a:r>
-              <a:rPr lang="en-US" sz="1000" b="1" dirty="0">
-                <a:solidFill>
-                  <a:srgbClr val="7A4D08"/>
-                </a:solidFill>
-                <a:latin typeface="Calibri" pitchFamily="34" charset="0"/>
-                <a:ea typeface="Calibri" pitchFamily="34" charset="-122"/>
-                <a:cs typeface="Calibri" pitchFamily="34" charset="-120"/>
-              </a:rPr>
-              <a:t>TEST-ISOLATION GAP</a:t>
-            </a:r>
-            <a:endParaRPr lang="en-US" sz="1000" dirty="0"/>
-          </a:p>
-        </p:txBody>
-      </p:sp>
-      <p:sp>
-        <p:nvSpPr>
-          <p:cNvPr id="9" name="Text 7"/>
-          <p:cNvSpPr/>
-          <p:nvPr/>
-        </p:nvSpPr>
-        <p:spPr>
-          <a:xfrm>
-            <a:off x="822960" y="2514600"/>
-            <a:ext cx="10424160" cy="457200"/>
-          </a:xfrm>
-          <a:prstGeom prst="rect">
-            <a:avLst/>
-          </a:prstGeom>
-          <a:noFill/>
-          <a:ln/>
-        </p:spPr>
-        <p:txBody>
-          <a:bodyPr wrap="square" rtlCol="0" anchor="ctr"/>
-          <a:lstStyle/>
-          <a:p>
-            <a:pPr indent="0" marL="0">
-              <a:buNone/>
-            </a:pPr>
-            <a:r>
-              <a:rPr lang="en-US" sz="1500" b="1" dirty="0">
-                <a:solidFill>
-                  <a:srgbClr val="1A1A18"/>
-                </a:solidFill>
-                <a:latin typeface="Cambria" pitchFamily="34" charset="0"/>
-                <a:ea typeface="Cambria" pitchFamily="34" charset="-122"/>
-                <a:cs typeface="Cambria" pitchFamily="34" charset="-120"/>
-              </a:rPr>
-              <a:t>Three tests failed intermittently once a real OPENAI_API_KEY was in play</a:t>
-            </a:r>
-            <a:endParaRPr lang="en-US" sz="1500" dirty="0"/>
-          </a:p>
-        </p:txBody>
-      </p:sp>
-      <p:sp>
-        <p:nvSpPr>
-          <p:cNvPr id="10" name="Text 8"/>
-          <p:cNvSpPr/>
-          <p:nvPr/>
-        </p:nvSpPr>
-        <p:spPr>
-          <a:xfrm>
-            <a:off x="822960" y="2971800"/>
-            <a:ext cx="10424160" cy="640080"/>
-          </a:xfrm>
-          <a:prstGeom prst="rect">
-            <a:avLst/>
-          </a:prstGeom>
-          <a:noFill/>
-          <a:ln/>
-        </p:spPr>
-        <p:txBody>
-          <a:bodyPr wrap="square" rtlCol="0" anchor="ctr"/>
-          <a:lstStyle/>
-          <a:p>
-            <a:pPr indent="0" marL="0">
-              <a:buNone/>
-            </a:pPr>
-            <a:r>
-              <a:rPr lang="en-US" sz="1150" dirty="0">
-                <a:solidFill>
-                  <a:srgbClr val="5F5E5A"/>
-                </a:solidFill>
-                <a:latin typeface="Calibri" pitchFamily="34" charset="0"/>
-                <a:ea typeface="Calibri" pitchFamily="34" charset="-122"/>
-                <a:cs typeface="Calibri" pitchFamily="34" charset="-120"/>
-              </a:rPr>
-              <a:t>With PHI_DEID_CLASSIFICATION_BACKEND=llm set, thin synthetic test text (e.g. “Patient contact: ...email... or ...phone...”) could reasonably be classified not_applicable by the real model rather than clinical_note — correct from the LLM's view, but it skips redaction/validation/audit entirely, leaving those fields unset. Confirmed by monkeypatching classify_with_llm to return not_applicable and reproducing the identical failure, no real API call needed.</a:t>
-            </a:r>
-            <a:endParaRPr lang="en-US" sz="1150" dirty="0"/>
-          </a:p>
-        </p:txBody>
-      </p:sp>
-      <p:sp>
-        <p:nvSpPr>
-          <p:cNvPr id="11" name="Shape 9"/>
-          <p:cNvSpPr/>
-          <p:nvPr/>
-        </p:nvSpPr>
-        <p:spPr>
-          <a:xfrm>
-            <a:off x="548640" y="3840480"/>
-            <a:ext cx="11064240" cy="1691640"/>
-          </a:xfrm>
-          <a:prstGeom prst="roundRect">
-            <a:avLst>
-              <a:gd name="adj" fmla="val 4324"/>
-            </a:avLst>
-          </a:prstGeom>
-          <a:solidFill>
-            <a:srgbClr val="E1F5EE"/>
-          </a:solidFill>
-          <a:ln w="12700">
-            <a:solidFill>
-              <a:srgbClr val="E1F5EE"/>
-            </a:solidFill>
-            <a:prstDash val="solid"/>
-          </a:ln>
-        </p:spPr>
-      </p:sp>
-      <p:sp>
-        <p:nvSpPr>
-          <p:cNvPr id="12" name="Text 10"/>
-          <p:cNvSpPr/>
-          <p:nvPr/>
-        </p:nvSpPr>
-        <p:spPr>
-          <a:xfrm>
-            <a:off x="822960" y="4023360"/>
-            <a:ext cx="10515600" cy="822960"/>
-          </a:xfrm>
-          <a:prstGeom prst="rect">
-            <a:avLst/>
-          </a:prstGeom>
-          <a:noFill/>
-          <a:ln/>
-        </p:spPr>
-        <p:txBody>
-          <a:bodyPr wrap="square" rtlCol="0" anchor="t"/>
-          <a:lstStyle/>
-          <a:p>
-            <a:pPr indent="0" marL="0">
-              <a:buNone/>
-            </a:pPr>
-            <a:r>
-              <a:rPr lang="en-US" sz="1300" b="1" dirty="0">
-                <a:solidFill>
-                  <a:srgbClr val="0F6E56"/>
-                </a:solidFill>
-              </a:rPr>
-              <a:t>Fix: </a:t>
-            </a:r>
-            <a:pPr indent="0" marL="0">
-              <a:buNone/>
-            </a:pPr>
-            <a:r>
-              <a:rPr lang="en-US" sz="1250" dirty="0">
-                <a:solidFill>
-                  <a:srgbClr val="0D5040"/>
-                </a:solidFill>
-              </a:rPr>
-              <a:t>Pinned PHI_DEID_CLASSIFICATION_BACKEND to “heuristic” in every graph-invoking test fixture (test_integration.py, test_api_batch.py, and three others) — these are control-flow tests and shouldn't depend on a live external API call.</a:t>
-            </a:r>
-            <a:endParaRPr lang="en-US" sz="1300" dirty="0"/>
-          </a:p>
-        </p:txBody>
-      </p:sp>
-      <p:sp>
-        <p:nvSpPr>
-          <p:cNvPr id="13" name="Text 11"/>
-          <p:cNvSpPr/>
-          <p:nvPr/>
-        </p:nvSpPr>
-        <p:spPr>
-          <a:xfrm>
-            <a:off x="822960" y="4937760"/>
-            <a:ext cx="10515600" cy="457200"/>
-          </a:xfrm>
-          <a:prstGeom prst="rect">
-            <a:avLst/>
-          </a:prstGeom>
-          <a:noFill/>
-          <a:ln/>
-        </p:spPr>
-        <p:txBody>
-          <a:bodyPr wrap="square" rtlCol="0" anchor="ctr"/>
-          <a:lstStyle/>
-          <a:p>
-            <a:pPr indent="0" marL="0">
-              <a:buNone/>
-            </a:pPr>
-            <a:r>
-              <a:rPr lang="en-US" sz="1250" b="1" dirty="0">
-                <a:solidFill>
-                  <a:srgbClr val="0D5040"/>
-                </a:solidFill>
-                <a:latin typeface="Calibri" pitchFamily="34" charset="0"/>
-                <a:ea typeface="Calibri" pitchFamily="34" charset="-122"/>
-                <a:cs typeface="Calibri" pitchFamily="34" charset="-120"/>
-              </a:rPr>
-              <a:t>Verified against both the default heuristic backend and PHI_DEID_CLASSIFICATION_BACKEND=llm forced globally, matching the developer's real .env: 57 of 57 tests pass either way.</a:t>
-            </a:r>
-            <a:endParaRPr lang="en-US" sz="1250" dirty="0"/>
-          </a:p>
-        </p:txBody>
-      </p:sp>
-      <p:sp>
-        <p:nvSpPr>
-          <p:cNvPr id="14" name="Text 12"/>
-          <p:cNvSpPr/>
-          <p:nvPr/>
-        </p:nvSpPr>
-        <p:spPr>
-          <a:xfrm>
-            <a:off x="11612880" y="6492240"/>
-            <a:ext cx="457200" cy="274320"/>
-          </a:xfrm>
-          <a:prstGeom prst="rect">
-            <a:avLst/>
-          </a:prstGeom>
-          <a:noFill/>
-          <a:ln/>
-        </p:spPr>
-        <p:txBody>
-          <a:bodyPr wrap="square" rtlCol="0" anchor="ctr"/>
-          <a:lstStyle/>
-          <a:p>
-            <a:pPr algn="r" indent="0" marL="0">
-              <a:buNone/>
-            </a:pPr>
-            <a:r>
-              <a:rPr lang="en-US" sz="1000" dirty="0">
-                <a:solidFill>
-                  <a:srgbClr val="5F5E5A"/>
-                </a:solidFill>
-                <a:latin typeface="Calibri" pitchFamily="34" charset="0"/>
-                <a:ea typeface="Calibri" pitchFamily="34" charset="-122"/>
-                <a:cs typeface="Calibri" pitchFamily="34" charset="-120"/>
-              </a:rPr>
-              <a:t>15</a:t>
-            </a:r>
-            <a:endParaRPr lang="en-US" sz="1000" dirty="0"/>
-          </a:p>
-        </p:txBody>
-      </p:sp>
-    </p:spTree>
-  </p:cSld>
-  <p:clrMapOvr>
-    <a:masterClrMapping/>
-  </p:clrMapOvr>
-</p:sld>
-</file>
-
-<file path=ppt/slides/slide19.xml><?xml version="1.0" encoding="utf-8"?>
-<p:sld xmlns:a="http://schemas.openxmlformats.org/drawingml/2006/main" xmlns:r="http://schemas.openxmlformats.org/officeDocument/2006/relationships" xmlns:p="http://schemas.openxmlformats.org/presentationml/2006/main">
-  <p:cSld name="Slide 19">
-    <p:bg>
-      <p:bgPr>
-        <a:solidFill>
-          <a:srgbClr val="FFFFFF"/>
-        </a:solidFill>
-      </p:bgPr>
-    </p:bg>
-    <p:spTree>
-      <p:nvGrpSpPr>
-        <p:cNvPr id="1" name=""/>
-        <p:cNvGrpSpPr/>
-        <p:nvPr/>
-      </p:nvGrpSpPr>
-      <p:grpSpPr>
-        <a:xfrm>
-          <a:off x="0" y="0"/>
-          <a:ext cx="0" cy="0"/>
-          <a:chOff x="0" y="0"/>
-          <a:chExt cx="0" cy="0"/>
-        </a:xfrm>
-      </p:grpSpPr>
-      <p:sp>
-        <p:nvSpPr>
-          <p:cNvPr id="2" name="Text 0"/>
-          <p:cNvSpPr/>
-          <p:nvPr/>
-        </p:nvSpPr>
-        <p:spPr>
-          <a:xfrm>
-            <a:off x="548640" y="365760"/>
-            <a:ext cx="7315200" cy="320040"/>
-          </a:xfrm>
-          <a:prstGeom prst="rect">
-            <a:avLst/>
-          </a:prstGeom>
-          <a:noFill/>
-          <a:ln/>
-        </p:spPr>
-        <p:txBody>
-          <a:bodyPr wrap="square" rtlCol="0" anchor="ctr"/>
-          <a:lstStyle/>
-          <a:p>
-            <a:pPr indent="0" marL="0">
-              <a:buNone/>
-            </a:pPr>
-            <a:r>
-              <a:rPr lang="en-US" sz="1200" b="1" spc="200" kern="0" dirty="0">
-                <a:solidFill>
-                  <a:srgbClr val="0F6E56"/>
-                </a:solidFill>
-                <a:latin typeface="Calibri" pitchFamily="34" charset="0"/>
-                <a:ea typeface="Calibri" pitchFamily="34" charset="-122"/>
-                <a:cs typeface="Calibri" pitchFamily="34" charset="-120"/>
-              </a:rPr>
-              <a:t>REAL BUGS FOUND &amp; FIXED — PART 6</a:t>
-            </a:r>
-            <a:endParaRPr lang="en-US" sz="1200" dirty="0"/>
-          </a:p>
-        </p:txBody>
-      </p:sp>
-      <p:sp>
-        <p:nvSpPr>
-          <p:cNvPr id="3" name="Text 1"/>
-          <p:cNvSpPr/>
-          <p:nvPr/>
-        </p:nvSpPr>
-        <p:spPr>
-          <a:xfrm>
-            <a:off x="548640" y="640080"/>
-            <a:ext cx="11064240" cy="822960"/>
-          </a:xfrm>
-          <a:prstGeom prst="rect">
-            <a:avLst/>
-          </a:prstGeom>
-          <a:noFill/>
-          <a:ln/>
-        </p:spPr>
-        <p:txBody>
-          <a:bodyPr wrap="square" rtlCol="0" anchor="ctr"/>
-          <a:lstStyle/>
-          <a:p>
-            <a:pPr algn="l" indent="0" marL="0">
-              <a:buNone/>
-            </a:pPr>
-            <a:r>
-              <a:rPr lang="en-US" sz="3000" b="1" dirty="0">
-                <a:solidFill>
-                  <a:srgbClr val="1F4E79"/>
-                </a:solidFill>
-                <a:latin typeface="Cambria" pitchFamily="34" charset="0"/>
-                <a:ea typeface="Cambria" pitchFamily="34" charset="-122"/>
-                <a:cs typeface="Cambria" pitchFamily="34" charset="-120"/>
-              </a:rPr>
-              <a:t>Found via eval error analysis after the first live Streamlit Cloud deployment</a:t>
-            </a:r>
-            <a:endParaRPr lang="en-US" sz="3000" dirty="0"/>
-          </a:p>
-        </p:txBody>
-      </p:sp>
-      <p:sp>
-        <p:nvSpPr>
-          <p:cNvPr id="4" name="Shape 2"/>
-          <p:cNvSpPr/>
-          <p:nvPr/>
-        </p:nvSpPr>
-        <p:spPr>
-          <a:xfrm>
-            <a:off x="548640" y="1691640"/>
-            <a:ext cx="11064240" cy="1965960"/>
-          </a:xfrm>
-          <a:prstGeom prst="roundRect">
-            <a:avLst>
-              <a:gd name="adj" fmla="val 3721"/>
-            </a:avLst>
-          </a:prstGeom>
-          <a:solidFill>
-            <a:srgbClr val="F7F9FB"/>
-          </a:solidFill>
-          <a:ln w="12700">
-            <a:solidFill>
-              <a:srgbClr val="E3E8EC"/>
-            </a:solidFill>
-            <a:prstDash val="solid"/>
-          </a:ln>
-          <a:effectLst>
-            <a:outerShdw sx="100000" sy="100000" kx="0" ky="0" algn="bl" rotWithShape="0" blurRad="76200" dist="25400" dir="5400000">
-              <a:srgbClr val="999999">
-                <a:alpha val="18000"/>
-              </a:srgbClr>
-            </a:outerShdw>
-          </a:effectLst>
-        </p:spPr>
-      </p:sp>
-      <p:sp>
-        <p:nvSpPr>
-          <p:cNvPr id="5" name="Shape 3"/>
-          <p:cNvSpPr/>
-          <p:nvPr/>
-        </p:nvSpPr>
-        <p:spPr>
-          <a:xfrm>
-            <a:off x="822960" y="1965960"/>
-            <a:ext cx="457200" cy="457200"/>
-          </a:xfrm>
-          <a:prstGeom prst="ellipse">
-            <a:avLst/>
-          </a:prstGeom>
-          <a:solidFill>
-            <a:srgbClr val="993C1D"/>
-          </a:solidFill>
-          <a:ln/>
-        </p:spPr>
-      </p:sp>
-      <p:sp>
-        <p:nvSpPr>
-          <p:cNvPr id="6" name="Text 4"/>
-          <p:cNvSpPr/>
-          <p:nvPr/>
-        </p:nvSpPr>
-        <p:spPr>
-          <a:xfrm>
-            <a:off x="822960" y="1965960"/>
-            <a:ext cx="457200" cy="457200"/>
-          </a:xfrm>
-          <a:prstGeom prst="rect">
-            <a:avLst/>
-          </a:prstGeom>
-          <a:noFill/>
-          <a:ln/>
-        </p:spPr>
-        <p:txBody>
-          <a:bodyPr wrap="square" rtlCol="0" anchor="ctr"/>
-          <a:lstStyle/>
-          <a:p>
-            <a:pPr algn="ctr" indent="0" marL="0">
-              <a:buNone/>
-            </a:pPr>
-            <a:r>
-              <a:rPr lang="en-US" sz="1600" b="1" dirty="0">
-                <a:solidFill>
-                  <a:srgbClr val="FFFFFF"/>
-                </a:solidFill>
-                <a:latin typeface="Cambria" pitchFamily="34" charset="0"/>
-                <a:ea typeface="Cambria" pitchFamily="34" charset="-122"/>
-                <a:cs typeface="Cambria" pitchFamily="34" charset="-120"/>
-              </a:rPr>
-              <a:t>9</a:t>
-            </a:r>
-            <a:endParaRPr lang="en-US" sz="1600" dirty="0"/>
-          </a:p>
-        </p:txBody>
-      </p:sp>
-      <p:sp>
-        <p:nvSpPr>
-          <p:cNvPr id="7" name="Shape 5"/>
-          <p:cNvSpPr/>
-          <p:nvPr/>
-        </p:nvSpPr>
-        <p:spPr>
-          <a:xfrm>
-            <a:off x="1463040" y="2011680"/>
-            <a:ext cx="3017520" cy="365760"/>
-          </a:xfrm>
-          <a:prstGeom prst="roundRect">
-            <a:avLst>
-              <a:gd name="adj" fmla="val 15000"/>
-            </a:avLst>
-          </a:prstGeom>
-          <a:solidFill>
-            <a:srgbClr val="FAEEDA"/>
-          </a:solidFill>
-          <a:ln/>
-        </p:spPr>
-      </p:sp>
-      <p:sp>
-        <p:nvSpPr>
-          <p:cNvPr id="8" name="Text 6"/>
-          <p:cNvSpPr/>
-          <p:nvPr/>
-        </p:nvSpPr>
-        <p:spPr>
-          <a:xfrm>
-            <a:off x="1463040" y="2011680"/>
-            <a:ext cx="3017520" cy="365760"/>
-          </a:xfrm>
-          <a:prstGeom prst="rect">
-            <a:avLst/>
-          </a:prstGeom>
-          <a:noFill/>
-          <a:ln/>
-        </p:spPr>
-        <p:txBody>
-          <a:bodyPr wrap="square" rtlCol="0" anchor="ctr"/>
-          <a:lstStyle/>
-          <a:p>
-            <a:pPr algn="ctr" indent="0" marL="0">
-              <a:buNone/>
-            </a:pPr>
-            <a:r>
-              <a:rPr lang="en-US" sz="1000" b="1" dirty="0">
-                <a:solidFill>
-                  <a:srgbClr val="7A4D08"/>
-                </a:solidFill>
-                <a:latin typeface="Calibri" pitchFamily="34" charset="0"/>
-                <a:ea typeface="Calibri" pitchFamily="34" charset="-122"/>
-                <a:cs typeface="Calibri" pitchFamily="34" charset="-120"/>
-              </a:rPr>
-              <a:t>IRRELEVANT RECOGNIZER COLLISION</a:t>
-            </a:r>
-            <a:endParaRPr lang="en-US" sz="1000" dirty="0"/>
-          </a:p>
-        </p:txBody>
-      </p:sp>
-      <p:sp>
-        <p:nvSpPr>
-          <p:cNvPr id="9" name="Text 7"/>
-          <p:cNvSpPr/>
-          <p:nvPr/>
-        </p:nvSpPr>
-        <p:spPr>
-          <a:xfrm>
-            <a:off x="822960" y="2514600"/>
-            <a:ext cx="10424160" cy="457200"/>
-          </a:xfrm>
-          <a:prstGeom prst="rect">
-            <a:avLst/>
-          </a:prstGeom>
-          <a:noFill/>
-          <a:ln/>
-        </p:spPr>
-        <p:txBody>
-          <a:bodyPr wrap="square" rtlCol="0" anchor="ctr"/>
-          <a:lstStyle/>
-          <a:p>
-            <a:pPr indent="0" marL="0">
-              <a:buNone/>
-            </a:pPr>
-            <a:r>
-              <a:rPr lang="en-US" sz="1500" b="1" dirty="0">
-                <a:solidFill>
-                  <a:srgbClr val="1A1A18"/>
-                </a:solidFill>
-                <a:latin typeface="Cambria" pitchFamily="34" charset="0"/>
-                <a:ea typeface="Cambria" pitchFamily="34" charset="-122"/>
-                <a:cs typeface="Cambria" pitchFamily="34" charset="-120"/>
-              </a:rPr>
-              <a:t>Two ordinary US phone numbers silently mislabeled as UK NHS numbers</a:t>
-            </a:r>
-            <a:endParaRPr lang="en-US" sz="1500" dirty="0"/>
-          </a:p>
-        </p:txBody>
-      </p:sp>
-      <p:sp>
-        <p:nvSpPr>
-          <p:cNvPr id="10" name="Text 8"/>
-          <p:cNvSpPr/>
-          <p:nvPr/>
-        </p:nvSpPr>
-        <p:spPr>
-          <a:xfrm>
-            <a:off x="822960" y="2971800"/>
-            <a:ext cx="10424160" cy="640080"/>
-          </a:xfrm>
-          <a:prstGeom prst="rect">
-            <a:avLst/>
-          </a:prstGeom>
-          <a:noFill/>
-          <a:ln/>
-        </p:spPr>
-        <p:txBody>
-          <a:bodyPr wrap="square" rtlCol="0" anchor="ctr"/>
-          <a:lstStyle/>
-          <a:p>
-            <a:pPr indent="0" marL="0">
-              <a:buNone/>
-            </a:pPr>
-            <a:r>
-              <a:rPr lang="en-US" sz="1150" dirty="0">
-                <a:solidFill>
-                  <a:srgbClr val="5F5E5A"/>
-                </a:solidFill>
-                <a:latin typeface="Calibri" pitchFamily="34" charset="0"/>
-                <a:ea typeface="Calibri" pitchFamily="34" charset="-122"/>
-                <a:cs typeface="Calibri" pitchFamily="34" charset="-120"/>
-              </a:rPr>
-              <a:t>Presidio ships a built-in NhsRecognizer (UK NHS number recognizer) that validates any 10-digit sequence against the real NHS Mod-11 checksum and returns a perfect 1.0 confidence, no UK context needed. Two ordinary US phone numbers happened to pass that checksum, so the NHS candidate beat this project's own PHONE_NUMBER detections in the overlap-resolution step — the span was still redacted (no PHI leak), just mislabeled.</a:t>
-            </a:r>
-            <a:endParaRPr lang="en-US" sz="1150" dirty="0"/>
-          </a:p>
-        </p:txBody>
-      </p:sp>
-      <p:sp>
-        <p:nvSpPr>
-          <p:cNvPr id="11" name="Shape 9"/>
-          <p:cNvSpPr/>
-          <p:nvPr/>
-        </p:nvSpPr>
-        <p:spPr>
-          <a:xfrm>
-            <a:off x="548640" y="3840480"/>
-            <a:ext cx="11064240" cy="1691640"/>
-          </a:xfrm>
-          <a:prstGeom prst="roundRect">
-            <a:avLst>
-              <a:gd name="adj" fmla="val 4324"/>
-            </a:avLst>
-          </a:prstGeom>
-          <a:solidFill>
-            <a:srgbClr val="E1F5EE"/>
-          </a:solidFill>
-          <a:ln w="12700">
-            <a:solidFill>
-              <a:srgbClr val="E1F5EE"/>
-            </a:solidFill>
-            <a:prstDash val="solid"/>
-          </a:ln>
-        </p:spPr>
-      </p:sp>
-      <p:sp>
-        <p:nvSpPr>
-          <p:cNvPr id="12" name="Text 10"/>
-          <p:cNvSpPr/>
-          <p:nvPr/>
-        </p:nvSpPr>
-        <p:spPr>
-          <a:xfrm>
-            <a:off x="822960" y="4023360"/>
-            <a:ext cx="10515600" cy="822960"/>
-          </a:xfrm>
-          <a:prstGeom prst="rect">
-            <a:avLst/>
-          </a:prstGeom>
-          <a:noFill/>
-          <a:ln/>
-        </p:spPr>
-        <p:txBody>
-          <a:bodyPr wrap="square" rtlCol="0" anchor="t"/>
-          <a:lstStyle/>
-          <a:p>
-            <a:pPr indent="0" marL="0">
-              <a:buNone/>
-            </a:pPr>
-            <a:r>
-              <a:rPr lang="en-US" sz="1300" b="1" dirty="0">
-                <a:solidFill>
-                  <a:srgbClr val="0F6E56"/>
-                </a:solidFill>
-              </a:rPr>
-              <a:t>Fix: </a:t>
-            </a:r>
-            <a:pPr indent="0" marL="0">
-              <a:buNone/>
-            </a:pPr>
-            <a:r>
-              <a:rPr lang="en-US" sz="1250" dirty="0">
-                <a:solidFill>
-                  <a:srgbClr val="0D5040"/>
-                </a:solidFill>
-              </a:rPr>
-              <a:t>Deregistered NhsRecognizer from the analyzer registry — same pattern already used to remove the irrelevant US_DRIVER_LICENSE recognizer, since neither is relevant to this project's all-US clinical documents.</a:t>
-            </a:r>
-            <a:endParaRPr lang="en-US" sz="1300" dirty="0"/>
-          </a:p>
-        </p:txBody>
-      </p:sp>
-      <p:sp>
-        <p:nvSpPr>
-          <p:cNvPr id="13" name="Text 11"/>
-          <p:cNvSpPr/>
-          <p:nvPr/>
-        </p:nvSpPr>
-        <p:spPr>
-          <a:xfrm>
-            <a:off x="822960" y="4937760"/>
-            <a:ext cx="10515600" cy="457200"/>
-          </a:xfrm>
-          <a:prstGeom prst="rect">
-            <a:avLst/>
-          </a:prstGeom>
-          <a:noFill/>
-          <a:ln/>
-        </p:spPr>
-        <p:txBody>
-          <a:bodyPr wrap="square" rtlCol="0" anchor="ctr"/>
-          <a:lstStyle/>
-          <a:p>
-            <a:pPr indent="0" marL="0">
-              <a:buNone/>
-            </a:pPr>
-            <a:r>
-              <a:rPr lang="en-US" sz="1250" b="1" dirty="0">
-                <a:solidFill>
-                  <a:srgbClr val="0D5040"/>
-                </a:solidFill>
-                <a:latin typeface="Calibri" pitchFamily="34" charset="0"/>
-                <a:ea typeface="Calibri" pitchFamily="34" charset="-122"/>
-                <a:cs typeface="Calibri" pitchFamily="34" charset="-120"/>
-              </a:rPr>
-              <a:t>OVERALL F1 improved 0.6619 → 0.6814, recall reached a perfect 2,150/2,150 labeled spans (zero false negatives) — confirmed by re-running the full eval suite. 57/57 tests still pass.</a:t>
-            </a:r>
-            <a:endParaRPr lang="en-US" sz="1250" dirty="0"/>
-          </a:p>
-        </p:txBody>
-      </p:sp>
-      <p:sp>
-        <p:nvSpPr>
-          <p:cNvPr id="14" name="Text 12"/>
-          <p:cNvSpPr/>
-          <p:nvPr/>
-        </p:nvSpPr>
-        <p:spPr>
-          <a:xfrm>
-            <a:off x="11612880" y="6492240"/>
-            <a:ext cx="457200" cy="274320"/>
-          </a:xfrm>
-          <a:prstGeom prst="rect">
-            <a:avLst/>
-          </a:prstGeom>
-          <a:noFill/>
-          <a:ln/>
-        </p:spPr>
-        <p:txBody>
-          <a:bodyPr wrap="square" rtlCol="0" anchor="ctr"/>
-          <a:lstStyle/>
-          <a:p>
-            <a:pPr algn="r" indent="0" marL="0">
-              <a:buNone/>
-            </a:pPr>
-            <a:r>
-              <a:rPr lang="en-US" sz="1000" dirty="0">
-                <a:solidFill>
-                  <a:srgbClr val="5F5E5A"/>
-                </a:solidFill>
-                <a:latin typeface="Calibri" pitchFamily="34" charset="0"/>
-                <a:ea typeface="Calibri" pitchFamily="34" charset="-122"/>
-                <a:cs typeface="Calibri" pitchFamily="34" charset="-120"/>
-              </a:rPr>
-              <a:t>16</a:t>
-            </a:r>
-            <a:endParaRPr lang="en-US" sz="1000" dirty="0"/>
           </a:p>
         </p:txBody>
       </p:sp>
@@ -13205,7 +12923,7 @@
                 <a:ea typeface="Cambria" pitchFamily="34" charset="-122"/>
                 <a:cs typeface="Cambria" pitchFamily="34" charset="-120"/>
               </a:rPr>
-              <a:t>354</a:t>
+              <a:t>350</a:t>
             </a:r>
             <a:endParaRPr lang="en-US" sz="3000" dirty="0"/>
           </a:p>
@@ -15600,6 +15318,1010 @@
 
 <file path=ppt/slides/slide8.xml><?xml version="1.0" encoding="utf-8"?>
 <p:sld xmlns:a="http://schemas.openxmlformats.org/drawingml/2006/main" xmlns:r="http://schemas.openxmlformats.org/officeDocument/2006/relationships" xmlns:p="http://schemas.openxmlformats.org/presentationml/2006/main">
+  <p:cSld name="Slide 6">
+    <p:bg>
+      <p:bgPr>
+        <a:solidFill>
+          <a:srgbClr val="FFFFFF"/>
+        </a:solidFill>
+      </p:bgPr>
+    </p:bg>
+    <p:spTree>
+      <p:nvGrpSpPr>
+        <p:cNvPr id="1" name=""/>
+        <p:cNvGrpSpPr/>
+        <p:nvPr/>
+      </p:nvGrpSpPr>
+      <p:grpSpPr>
+        <a:xfrm>
+          <a:off x="0" y="0"/>
+          <a:ext cx="0" cy="0"/>
+          <a:chOff x="0" y="0"/>
+          <a:chExt cx="0" cy="0"/>
+        </a:xfrm>
+      </p:grpSpPr>
+      <p:sp>
+        <p:nvSpPr>
+          <p:cNvPr id="2" name="Text 0"/>
+          <p:cNvSpPr/>
+          <p:nvPr/>
+        </p:nvSpPr>
+        <p:spPr>
+          <a:xfrm>
+            <a:off x="548640" y="365760"/>
+            <a:ext cx="7315200" cy="320040"/>
+          </a:xfrm>
+          <a:prstGeom prst="rect">
+            <a:avLst/>
+          </a:prstGeom>
+          <a:noFill/>
+          <a:ln/>
+        </p:spPr>
+        <p:txBody>
+          <a:bodyPr wrap="square" rtlCol="0" anchor="ctr"/>
+          <a:lstStyle/>
+          <a:p>
+            <a:pPr indent="0" marL="0">
+              <a:buNone/>
+            </a:pPr>
+            <a:r>
+              <a:rPr lang="en-US" sz="1200" b="1" spc="200" kern="0" dirty="0">
+                <a:solidFill>
+                  <a:srgbClr val="0F6E56"/>
+                </a:solidFill>
+                <a:latin typeface="Calibri" pitchFamily="34" charset="0"/>
+                <a:ea typeface="Calibri" pitchFamily="34" charset="-122"/>
+                <a:cs typeface="Calibri" pitchFamily="34" charset="-120"/>
+              </a:rPr>
+              <a:t>MULTI-AGENT LLM TIER &amp; RELIABILITY</a:t>
+            </a:r>
+            <a:endParaRPr lang="en-US" sz="1200" dirty="0"/>
+          </a:p>
+        </p:txBody>
+      </p:sp>
+      <p:sp>
+        <p:nvSpPr>
+          <p:cNvPr id="3" name="Text 1"/>
+          <p:cNvSpPr/>
+          <p:nvPr/>
+        </p:nvSpPr>
+        <p:spPr>
+          <a:xfrm>
+            <a:off x="548640" y="640080"/>
+            <a:ext cx="11064240" cy="822960"/>
+          </a:xfrm>
+          <a:prstGeom prst="rect">
+            <a:avLst/>
+          </a:prstGeom>
+          <a:noFill/>
+          <a:ln/>
+        </p:spPr>
+        <p:txBody>
+          <a:bodyPr wrap="square" rtlCol="0" anchor="ctr"/>
+          <a:lstStyle/>
+          <a:p>
+            <a:pPr algn="l" indent="0" marL="0">
+              <a:buNone/>
+            </a:pPr>
+            <a:r>
+              <a:rPr lang="en-US" sz="3000" b="1" dirty="0">
+                <a:solidFill>
+                  <a:srgbClr val="1F4E79"/>
+                </a:solidFill>
+                <a:latin typeface="Cambria" pitchFamily="34" charset="0"/>
+                <a:ea typeface="Cambria" pitchFamily="34" charset="-122"/>
+                <a:cs typeface="Cambria" pitchFamily="34" charset="-120"/>
+              </a:rPr>
+              <a:t>A third hardening pass: a genuine agentic LLM tier, plus reliability</a:t>
+            </a:r>
+            <a:endParaRPr lang="en-US" sz="3000" dirty="0"/>
+          </a:p>
+        </p:txBody>
+      </p:sp>
+      <p:sp>
+        <p:nvSpPr>
+          <p:cNvPr id="4" name="Shape 2"/>
+          <p:cNvSpPr/>
+          <p:nvPr/>
+        </p:nvSpPr>
+        <p:spPr>
+          <a:xfrm>
+            <a:off x="548640" y="1691640"/>
+            <a:ext cx="3611880" cy="1965960"/>
+          </a:xfrm>
+          <a:prstGeom prst="roundRect">
+            <a:avLst>
+              <a:gd name="adj" fmla="val 3721"/>
+            </a:avLst>
+          </a:prstGeom>
+          <a:solidFill>
+            <a:srgbClr val="F7F9FB"/>
+          </a:solidFill>
+          <a:ln w="12700">
+            <a:solidFill>
+              <a:srgbClr val="E3E8EC"/>
+            </a:solidFill>
+            <a:prstDash val="solid"/>
+          </a:ln>
+          <a:effectLst>
+            <a:outerShdw sx="100000" sy="100000" kx="0" ky="0" algn="bl" rotWithShape="0" blurRad="76200" dist="25400" dir="5400000">
+              <a:srgbClr val="999999">
+                <a:alpha val="18000"/>
+              </a:srgbClr>
+            </a:outerShdw>
+          </a:effectLst>
+        </p:spPr>
+      </p:sp>
+      <p:sp>
+        <p:nvSpPr>
+          <p:cNvPr id="5" name="Shape 3"/>
+          <p:cNvSpPr/>
+          <p:nvPr/>
+        </p:nvSpPr>
+        <p:spPr>
+          <a:xfrm>
+            <a:off x="777240" y="1920240"/>
+            <a:ext cx="411480" cy="411480"/>
+          </a:xfrm>
+          <a:prstGeom prst="ellipse">
+            <a:avLst/>
+          </a:prstGeom>
+          <a:solidFill>
+            <a:srgbClr val="0F6E56"/>
+          </a:solidFill>
+          <a:ln/>
+        </p:spPr>
+      </p:sp>
+      <p:sp>
+        <p:nvSpPr>
+          <p:cNvPr id="6" name="Text 4"/>
+          <p:cNvSpPr/>
+          <p:nvPr/>
+        </p:nvSpPr>
+        <p:spPr>
+          <a:xfrm>
+            <a:off x="777240" y="1920240"/>
+            <a:ext cx="411480" cy="411480"/>
+          </a:xfrm>
+          <a:prstGeom prst="rect">
+            <a:avLst/>
+          </a:prstGeom>
+          <a:noFill/>
+          <a:ln/>
+        </p:spPr>
+        <p:txBody>
+          <a:bodyPr wrap="square" rtlCol="0" anchor="ctr"/>
+          <a:lstStyle/>
+          <a:p>
+            <a:pPr algn="ctr" indent="0" marL="0">
+              <a:buNone/>
+            </a:pPr>
+            <a:r>
+              <a:rPr lang="en-US" sz="1400" b="1" dirty="0">
+                <a:solidFill>
+                  <a:srgbClr val="FFFFFF"/>
+                </a:solidFill>
+                <a:latin typeface="Cambria" pitchFamily="34" charset="0"/>
+                <a:ea typeface="Cambria" pitchFamily="34" charset="-122"/>
+                <a:cs typeface="Cambria" pitchFamily="34" charset="-120"/>
+              </a:rPr>
+              <a:t>1</a:t>
+            </a:r>
+            <a:endParaRPr lang="en-US" sz="1400" dirty="0"/>
+          </a:p>
+        </p:txBody>
+      </p:sp>
+      <p:sp>
+        <p:nvSpPr>
+          <p:cNvPr id="7" name="Text 5"/>
+          <p:cNvSpPr/>
+          <p:nvPr/>
+        </p:nvSpPr>
+        <p:spPr>
+          <a:xfrm>
+            <a:off x="777240" y="2468880"/>
+            <a:ext cx="3154680" cy="502920"/>
+          </a:xfrm>
+          <a:prstGeom prst="rect">
+            <a:avLst/>
+          </a:prstGeom>
+          <a:noFill/>
+          <a:ln/>
+        </p:spPr>
+        <p:txBody>
+          <a:bodyPr wrap="square" rtlCol="0" anchor="ctr"/>
+          <a:lstStyle/>
+          <a:p>
+            <a:pPr indent="0" marL="0">
+              <a:buNone/>
+            </a:pPr>
+            <a:r>
+              <a:rPr lang="en-US" sz="1350" b="1" dirty="0">
+                <a:solidFill>
+                  <a:srgbClr val="1A1A18"/>
+                </a:solidFill>
+                <a:latin typeface="Cambria" pitchFamily="34" charset="0"/>
+                <a:ea typeface="Cambria" pitchFamily="34" charset="-122"/>
+                <a:cs typeface="Cambria" pitchFamily="34" charset="-120"/>
+              </a:rPr>
+              <a:t>LLM adjudication agent</a:t>
+            </a:r>
+            <a:endParaRPr lang="en-US" sz="1350" dirty="0"/>
+          </a:p>
+        </p:txBody>
+      </p:sp>
+      <p:sp>
+        <p:nvSpPr>
+          <p:cNvPr id="8" name="Text 6"/>
+          <p:cNvSpPr/>
+          <p:nvPr/>
+        </p:nvSpPr>
+        <p:spPr>
+          <a:xfrm>
+            <a:off x="777240" y="2926080"/>
+            <a:ext cx="3154680" cy="640080"/>
+          </a:xfrm>
+          <a:prstGeom prst="rect">
+            <a:avLst/>
+          </a:prstGeom>
+          <a:noFill/>
+          <a:ln/>
+        </p:spPr>
+        <p:txBody>
+          <a:bodyPr wrap="square" rtlCol="0" anchor="ctr"/>
+          <a:lstStyle/>
+          <a:p>
+            <a:pPr indent="0" marL="0">
+              <a:buNone/>
+            </a:pPr>
+            <a:r>
+              <a:rPr lang="en-US" sz="1080" dirty="0">
+                <a:solidFill>
+                  <a:srgbClr val="5F5E5A"/>
+                </a:solidFill>
+                <a:latin typeface="Calibri" pitchFamily="34" charset="0"/>
+                <a:ea typeface="Calibri" pitchFamily="34" charset="-122"/>
+                <a:cs typeface="Calibri" pitchFamily="34" charset="-120"/>
+              </a:rPr>
+              <a:t>Tool-calling + structured output (Pydantic), off by default. Reviews only ambiguous spans; a low-confidence call or a failure defers to a human rather than guessing.</a:t>
+            </a:r>
+            <a:endParaRPr lang="en-US" sz="1080" dirty="0"/>
+          </a:p>
+        </p:txBody>
+      </p:sp>
+      <p:sp>
+        <p:nvSpPr>
+          <p:cNvPr id="9" name="Shape 7"/>
+          <p:cNvSpPr/>
+          <p:nvPr/>
+        </p:nvSpPr>
+        <p:spPr>
+          <a:xfrm>
+            <a:off x="4343400" y="1691640"/>
+            <a:ext cx="3611880" cy="1965960"/>
+          </a:xfrm>
+          <a:prstGeom prst="roundRect">
+            <a:avLst>
+              <a:gd name="adj" fmla="val 3721"/>
+            </a:avLst>
+          </a:prstGeom>
+          <a:solidFill>
+            <a:srgbClr val="F7F9FB"/>
+          </a:solidFill>
+          <a:ln w="12700">
+            <a:solidFill>
+              <a:srgbClr val="E3E8EC"/>
+            </a:solidFill>
+            <a:prstDash val="solid"/>
+          </a:ln>
+          <a:effectLst>
+            <a:outerShdw sx="100000" sy="100000" kx="0" ky="0" algn="bl" rotWithShape="0" blurRad="76200" dist="25400" dir="5400000">
+              <a:srgbClr val="999999">
+                <a:alpha val="18000"/>
+              </a:srgbClr>
+            </a:outerShdw>
+          </a:effectLst>
+        </p:spPr>
+      </p:sp>
+      <p:sp>
+        <p:nvSpPr>
+          <p:cNvPr id="10" name="Shape 8"/>
+          <p:cNvSpPr/>
+          <p:nvPr/>
+        </p:nvSpPr>
+        <p:spPr>
+          <a:xfrm>
+            <a:off x="4572000" y="1920240"/>
+            <a:ext cx="411480" cy="411480"/>
+          </a:xfrm>
+          <a:prstGeom prst="ellipse">
+            <a:avLst/>
+          </a:prstGeom>
+          <a:solidFill>
+            <a:srgbClr val="0F6E56"/>
+          </a:solidFill>
+          <a:ln/>
+        </p:spPr>
+      </p:sp>
+      <p:sp>
+        <p:nvSpPr>
+          <p:cNvPr id="11" name="Text 9"/>
+          <p:cNvSpPr/>
+          <p:nvPr/>
+        </p:nvSpPr>
+        <p:spPr>
+          <a:xfrm>
+            <a:off x="4572000" y="1920240"/>
+            <a:ext cx="411480" cy="411480"/>
+          </a:xfrm>
+          <a:prstGeom prst="rect">
+            <a:avLst/>
+          </a:prstGeom>
+          <a:noFill/>
+          <a:ln/>
+        </p:spPr>
+        <p:txBody>
+          <a:bodyPr wrap="square" rtlCol="0" anchor="ctr"/>
+          <a:lstStyle/>
+          <a:p>
+            <a:pPr algn="ctr" indent="0" marL="0">
+              <a:buNone/>
+            </a:pPr>
+            <a:r>
+              <a:rPr lang="en-US" sz="1400" b="1" dirty="0">
+                <a:solidFill>
+                  <a:srgbClr val="FFFFFF"/>
+                </a:solidFill>
+                <a:latin typeface="Cambria" pitchFamily="34" charset="0"/>
+                <a:ea typeface="Cambria" pitchFamily="34" charset="-122"/>
+                <a:cs typeface="Cambria" pitchFamily="34" charset="-120"/>
+              </a:rPr>
+              <a:t>2</a:t>
+            </a:r>
+            <a:endParaRPr lang="en-US" sz="1400" dirty="0"/>
+          </a:p>
+        </p:txBody>
+      </p:sp>
+      <p:sp>
+        <p:nvSpPr>
+          <p:cNvPr id="12" name="Text 10"/>
+          <p:cNvSpPr/>
+          <p:nvPr/>
+        </p:nvSpPr>
+        <p:spPr>
+          <a:xfrm>
+            <a:off x="4572000" y="2468880"/>
+            <a:ext cx="3154680" cy="502920"/>
+          </a:xfrm>
+          <a:prstGeom prst="rect">
+            <a:avLst/>
+          </a:prstGeom>
+          <a:noFill/>
+          <a:ln/>
+        </p:spPr>
+        <p:txBody>
+          <a:bodyPr wrap="square" rtlCol="0" anchor="ctr"/>
+          <a:lstStyle/>
+          <a:p>
+            <a:pPr indent="0" marL="0">
+              <a:buNone/>
+            </a:pPr>
+            <a:r>
+              <a:rPr lang="en-US" sz="1350" b="1" dirty="0">
+                <a:solidFill>
+                  <a:srgbClr val="1A1A18"/>
+                </a:solidFill>
+                <a:latin typeface="Cambria" pitchFamily="34" charset="0"/>
+                <a:ea typeface="Cambria" pitchFamily="34" charset="-122"/>
+                <a:cs typeface="Cambria" pitchFamily="34" charset="-120"/>
+              </a:rPr>
+              <a:t>Persistent audit trail</a:t>
+            </a:r>
+            <a:endParaRPr lang="en-US" sz="1350" dirty="0"/>
+          </a:p>
+        </p:txBody>
+      </p:sp>
+      <p:sp>
+        <p:nvSpPr>
+          <p:cNvPr id="13" name="Text 11"/>
+          <p:cNvSpPr/>
+          <p:nvPr/>
+        </p:nvSpPr>
+        <p:spPr>
+          <a:xfrm>
+            <a:off x="4572000" y="2926080"/>
+            <a:ext cx="3154680" cy="640080"/>
+          </a:xfrm>
+          <a:prstGeom prst="rect">
+            <a:avLst/>
+          </a:prstGeom>
+          <a:noFill/>
+          <a:ln/>
+        </p:spPr>
+        <p:txBody>
+          <a:bodyPr wrap="square" rtlCol="0" anchor="ctr"/>
+          <a:lstStyle/>
+          <a:p>
+            <a:pPr indent="0" marL="0">
+              <a:buNone/>
+            </a:pPr>
+            <a:r>
+              <a:rPr lang="en-US" sz="1080" dirty="0">
+                <a:solidFill>
+                  <a:srgbClr val="5F5E5A"/>
+                </a:solidFill>
+                <a:latin typeface="Calibri" pitchFamily="34" charset="0"/>
+                <a:ea typeface="Calibri" pitchFamily="34" charset="-122"/>
+                <a:cs typeface="Calibri" pitchFamily="34" charset="-120"/>
+              </a:rPr>
+              <a:t>A second, SQLAlchemy-backed store, separate from the checkpointer. PHI span text is sanitized to a placeholder before every write.</a:t>
+            </a:r>
+            <a:endParaRPr lang="en-US" sz="1080" dirty="0"/>
+          </a:p>
+        </p:txBody>
+      </p:sp>
+      <p:sp>
+        <p:nvSpPr>
+          <p:cNvPr id="14" name="Shape 12"/>
+          <p:cNvSpPr/>
+          <p:nvPr/>
+        </p:nvSpPr>
+        <p:spPr>
+          <a:xfrm>
+            <a:off x="8138160" y="1691640"/>
+            <a:ext cx="3611880" cy="1965960"/>
+          </a:xfrm>
+          <a:prstGeom prst="roundRect">
+            <a:avLst>
+              <a:gd name="adj" fmla="val 3721"/>
+            </a:avLst>
+          </a:prstGeom>
+          <a:solidFill>
+            <a:srgbClr val="F7F9FB"/>
+          </a:solidFill>
+          <a:ln w="12700">
+            <a:solidFill>
+              <a:srgbClr val="E3E8EC"/>
+            </a:solidFill>
+            <a:prstDash val="solid"/>
+          </a:ln>
+          <a:effectLst>
+            <a:outerShdw sx="100000" sy="100000" kx="0" ky="0" algn="bl" rotWithShape="0" blurRad="76200" dist="25400" dir="5400000">
+              <a:srgbClr val="999999">
+                <a:alpha val="18000"/>
+              </a:srgbClr>
+            </a:outerShdw>
+          </a:effectLst>
+        </p:spPr>
+      </p:sp>
+      <p:sp>
+        <p:nvSpPr>
+          <p:cNvPr id="15" name="Shape 13"/>
+          <p:cNvSpPr/>
+          <p:nvPr/>
+        </p:nvSpPr>
+        <p:spPr>
+          <a:xfrm>
+            <a:off x="8366760" y="1920240"/>
+            <a:ext cx="411480" cy="411480"/>
+          </a:xfrm>
+          <a:prstGeom prst="ellipse">
+            <a:avLst/>
+          </a:prstGeom>
+          <a:solidFill>
+            <a:srgbClr val="0F6E56"/>
+          </a:solidFill>
+          <a:ln/>
+        </p:spPr>
+      </p:sp>
+      <p:sp>
+        <p:nvSpPr>
+          <p:cNvPr id="16" name="Text 14"/>
+          <p:cNvSpPr/>
+          <p:nvPr/>
+        </p:nvSpPr>
+        <p:spPr>
+          <a:xfrm>
+            <a:off x="8366760" y="1920240"/>
+            <a:ext cx="411480" cy="411480"/>
+          </a:xfrm>
+          <a:prstGeom prst="rect">
+            <a:avLst/>
+          </a:prstGeom>
+          <a:noFill/>
+          <a:ln/>
+        </p:spPr>
+        <p:txBody>
+          <a:bodyPr wrap="square" rtlCol="0" anchor="ctr"/>
+          <a:lstStyle/>
+          <a:p>
+            <a:pPr algn="ctr" indent="0" marL="0">
+              <a:buNone/>
+            </a:pPr>
+            <a:r>
+              <a:rPr lang="en-US" sz="1400" b="1" dirty="0">
+                <a:solidFill>
+                  <a:srgbClr val="FFFFFF"/>
+                </a:solidFill>
+                <a:latin typeface="Cambria" pitchFamily="34" charset="0"/>
+                <a:ea typeface="Cambria" pitchFamily="34" charset="-122"/>
+                <a:cs typeface="Cambria" pitchFamily="34" charset="-120"/>
+              </a:rPr>
+              <a:t>3</a:t>
+            </a:r>
+            <a:endParaRPr lang="en-US" sz="1400" dirty="0"/>
+          </a:p>
+        </p:txBody>
+      </p:sp>
+      <p:sp>
+        <p:nvSpPr>
+          <p:cNvPr id="17" name="Text 15"/>
+          <p:cNvSpPr/>
+          <p:nvPr/>
+        </p:nvSpPr>
+        <p:spPr>
+          <a:xfrm>
+            <a:off x="8366760" y="2468880"/>
+            <a:ext cx="3154680" cy="502920"/>
+          </a:xfrm>
+          <a:prstGeom prst="rect">
+            <a:avLst/>
+          </a:prstGeom>
+          <a:noFill/>
+          <a:ln/>
+        </p:spPr>
+        <p:txBody>
+          <a:bodyPr wrap="square" rtlCol="0" anchor="ctr"/>
+          <a:lstStyle/>
+          <a:p>
+            <a:pPr indent="0" marL="0">
+              <a:buNone/>
+            </a:pPr>
+            <a:r>
+              <a:rPr lang="en-US" sz="1350" b="1" dirty="0">
+                <a:solidFill>
+                  <a:srgbClr val="1A1A18"/>
+                </a:solidFill>
+                <a:latin typeface="Cambria" pitchFamily="34" charset="0"/>
+                <a:ea typeface="Cambria" pitchFamily="34" charset="-122"/>
+                <a:cs typeface="Cambria" pitchFamily="34" charset="-120"/>
+              </a:rPr>
+              <a:t>Retry-cap escalation</a:t>
+            </a:r>
+            <a:endParaRPr lang="en-US" sz="1350" dirty="0"/>
+          </a:p>
+        </p:txBody>
+      </p:sp>
+      <p:sp>
+        <p:nvSpPr>
+          <p:cNvPr id="18" name="Text 16"/>
+          <p:cNvSpPr/>
+          <p:nvPr/>
+        </p:nvSpPr>
+        <p:spPr>
+          <a:xfrm>
+            <a:off x="8366760" y="2926080"/>
+            <a:ext cx="3154680" cy="640080"/>
+          </a:xfrm>
+          <a:prstGeom prst="rect">
+            <a:avLst/>
+          </a:prstGeom>
+          <a:noFill/>
+          <a:ln/>
+        </p:spPr>
+        <p:txBody>
+          <a:bodyPr wrap="square" rtlCol="0" anchor="ctr"/>
+          <a:lstStyle/>
+          <a:p>
+            <a:pPr indent="0" marL="0">
+              <a:buNone/>
+            </a:pPr>
+            <a:r>
+              <a:rPr lang="en-US" sz="1080" dirty="0">
+                <a:solidFill>
+                  <a:srgbClr val="5F5E5A"/>
+                </a:solidFill>
+                <a:latin typeface="Calibri" pitchFamily="34" charset="0"/>
+                <a:ea typeface="Calibri" pitchFamily="34" charset="-122"/>
+                <a:cs typeface="Calibri" pitchFamily="34" charset="-120"/>
+              </a:rPr>
+              <a:t>If retries are exhausted, deterministic types auto-redact and only ambiguous types get one final human review — the run always terminates.</a:t>
+            </a:r>
+            <a:endParaRPr lang="en-US" sz="1080" dirty="0"/>
+          </a:p>
+        </p:txBody>
+      </p:sp>
+      <p:sp>
+        <p:nvSpPr>
+          <p:cNvPr id="19" name="Shape 17"/>
+          <p:cNvSpPr/>
+          <p:nvPr/>
+        </p:nvSpPr>
+        <p:spPr>
+          <a:xfrm>
+            <a:off x="548640" y="3886200"/>
+            <a:ext cx="3611880" cy="1965960"/>
+          </a:xfrm>
+          <a:prstGeom prst="roundRect">
+            <a:avLst>
+              <a:gd name="adj" fmla="val 3721"/>
+            </a:avLst>
+          </a:prstGeom>
+          <a:solidFill>
+            <a:srgbClr val="F7F9FB"/>
+          </a:solidFill>
+          <a:ln w="12700">
+            <a:solidFill>
+              <a:srgbClr val="E3E8EC"/>
+            </a:solidFill>
+            <a:prstDash val="solid"/>
+          </a:ln>
+          <a:effectLst>
+            <a:outerShdw sx="100000" sy="100000" kx="0" ky="0" algn="bl" rotWithShape="0" blurRad="76200" dist="25400" dir="5400000">
+              <a:srgbClr val="999999">
+                <a:alpha val="18000"/>
+              </a:srgbClr>
+            </a:outerShdw>
+          </a:effectLst>
+        </p:spPr>
+      </p:sp>
+      <p:sp>
+        <p:nvSpPr>
+          <p:cNvPr id="20" name="Shape 18"/>
+          <p:cNvSpPr/>
+          <p:nvPr/>
+        </p:nvSpPr>
+        <p:spPr>
+          <a:xfrm>
+            <a:off x="777240" y="4114800"/>
+            <a:ext cx="411480" cy="411480"/>
+          </a:xfrm>
+          <a:prstGeom prst="ellipse">
+            <a:avLst/>
+          </a:prstGeom>
+          <a:solidFill>
+            <a:srgbClr val="0F6E56"/>
+          </a:solidFill>
+          <a:ln/>
+        </p:spPr>
+      </p:sp>
+      <p:sp>
+        <p:nvSpPr>
+          <p:cNvPr id="21" name="Text 19"/>
+          <p:cNvSpPr/>
+          <p:nvPr/>
+        </p:nvSpPr>
+        <p:spPr>
+          <a:xfrm>
+            <a:off x="777240" y="4114800"/>
+            <a:ext cx="411480" cy="411480"/>
+          </a:xfrm>
+          <a:prstGeom prst="rect">
+            <a:avLst/>
+          </a:prstGeom>
+          <a:noFill/>
+          <a:ln/>
+        </p:spPr>
+        <p:txBody>
+          <a:bodyPr wrap="square" rtlCol="0" anchor="ctr"/>
+          <a:lstStyle/>
+          <a:p>
+            <a:pPr algn="ctr" indent="0" marL="0">
+              <a:buNone/>
+            </a:pPr>
+            <a:r>
+              <a:rPr lang="en-US" sz="1400" b="1" dirty="0">
+                <a:solidFill>
+                  <a:srgbClr val="FFFFFF"/>
+                </a:solidFill>
+                <a:latin typeface="Cambria" pitchFamily="34" charset="0"/>
+                <a:ea typeface="Cambria" pitchFamily="34" charset="-122"/>
+                <a:cs typeface="Cambria" pitchFamily="34" charset="-120"/>
+              </a:rPr>
+              <a:t>4</a:t>
+            </a:r>
+            <a:endParaRPr lang="en-US" sz="1400" dirty="0"/>
+          </a:p>
+        </p:txBody>
+      </p:sp>
+      <p:sp>
+        <p:nvSpPr>
+          <p:cNvPr id="22" name="Text 20"/>
+          <p:cNvSpPr/>
+          <p:nvPr/>
+        </p:nvSpPr>
+        <p:spPr>
+          <a:xfrm>
+            <a:off x="777240" y="4663440"/>
+            <a:ext cx="3154680" cy="502920"/>
+          </a:xfrm>
+          <a:prstGeom prst="rect">
+            <a:avLst/>
+          </a:prstGeom>
+          <a:noFill/>
+          <a:ln/>
+        </p:spPr>
+        <p:txBody>
+          <a:bodyPr wrap="square" rtlCol="0" anchor="ctr"/>
+          <a:lstStyle/>
+          <a:p>
+            <a:pPr indent="0" marL="0">
+              <a:buNone/>
+            </a:pPr>
+            <a:r>
+              <a:rPr lang="en-US" sz="1350" b="1" dirty="0">
+                <a:solidFill>
+                  <a:srgbClr val="1A1A18"/>
+                </a:solidFill>
+                <a:latin typeface="Cambria" pitchFamily="34" charset="0"/>
+                <a:ea typeface="Cambria" pitchFamily="34" charset="-122"/>
+                <a:cs typeface="Cambria" pitchFamily="34" charset="-120"/>
+              </a:rPr>
+              <a:t>Batch endpoint</a:t>
+            </a:r>
+            <a:endParaRPr lang="en-US" sz="1350" dirty="0"/>
+          </a:p>
+        </p:txBody>
+      </p:sp>
+      <p:sp>
+        <p:nvSpPr>
+          <p:cNvPr id="23" name="Text 21"/>
+          <p:cNvSpPr/>
+          <p:nvPr/>
+        </p:nvSpPr>
+        <p:spPr>
+          <a:xfrm>
+            <a:off x="777240" y="5120640"/>
+            <a:ext cx="3154680" cy="640080"/>
+          </a:xfrm>
+          <a:prstGeom prst="rect">
+            <a:avLst/>
+          </a:prstGeom>
+          <a:noFill/>
+          <a:ln/>
+        </p:spPr>
+        <p:txBody>
+          <a:bodyPr wrap="square" rtlCol="0" anchor="ctr"/>
+          <a:lstStyle/>
+          <a:p>
+            <a:pPr indent="0" marL="0">
+              <a:buNone/>
+            </a:pPr>
+            <a:r>
+              <a:rPr lang="en-US" sz="1080" dirty="0">
+                <a:solidFill>
+                  <a:srgbClr val="5F5E5A"/>
+                </a:solidFill>
+                <a:latin typeface="Calibri" pitchFamily="34" charset="0"/>
+                <a:ea typeface="Calibri" pitchFamily="34" charset="-122"/>
+                <a:cs typeface="Calibri" pitchFamily="34" charset="-120"/>
+              </a:rPr>
+              <a:t>POST /redact/batch processes several documents per request; one malformed file reports its own error, not a batch-wide failure.</a:t>
+            </a:r>
+            <a:endParaRPr lang="en-US" sz="1080" dirty="0"/>
+          </a:p>
+        </p:txBody>
+      </p:sp>
+      <p:sp>
+        <p:nvSpPr>
+          <p:cNvPr id="24" name="Shape 22"/>
+          <p:cNvSpPr/>
+          <p:nvPr/>
+        </p:nvSpPr>
+        <p:spPr>
+          <a:xfrm>
+            <a:off x="4343400" y="3886200"/>
+            <a:ext cx="3611880" cy="1965960"/>
+          </a:xfrm>
+          <a:prstGeom prst="roundRect">
+            <a:avLst>
+              <a:gd name="adj" fmla="val 3721"/>
+            </a:avLst>
+          </a:prstGeom>
+          <a:solidFill>
+            <a:srgbClr val="F7F9FB"/>
+          </a:solidFill>
+          <a:ln w="12700">
+            <a:solidFill>
+              <a:srgbClr val="E3E8EC"/>
+            </a:solidFill>
+            <a:prstDash val="solid"/>
+          </a:ln>
+          <a:effectLst>
+            <a:outerShdw sx="100000" sy="100000" kx="0" ky="0" algn="bl" rotWithShape="0" blurRad="76200" dist="25400" dir="5400000">
+              <a:srgbClr val="999999">
+                <a:alpha val="18000"/>
+              </a:srgbClr>
+            </a:outerShdw>
+          </a:effectLst>
+        </p:spPr>
+      </p:sp>
+      <p:sp>
+        <p:nvSpPr>
+          <p:cNvPr id="25" name="Shape 23"/>
+          <p:cNvSpPr/>
+          <p:nvPr/>
+        </p:nvSpPr>
+        <p:spPr>
+          <a:xfrm>
+            <a:off x="4572000" y="4114800"/>
+            <a:ext cx="411480" cy="411480"/>
+          </a:xfrm>
+          <a:prstGeom prst="ellipse">
+            <a:avLst/>
+          </a:prstGeom>
+          <a:solidFill>
+            <a:srgbClr val="0F6E56"/>
+          </a:solidFill>
+          <a:ln/>
+        </p:spPr>
+      </p:sp>
+      <p:sp>
+        <p:nvSpPr>
+          <p:cNvPr id="26" name="Text 24"/>
+          <p:cNvSpPr/>
+          <p:nvPr/>
+        </p:nvSpPr>
+        <p:spPr>
+          <a:xfrm>
+            <a:off x="4572000" y="4114800"/>
+            <a:ext cx="411480" cy="411480"/>
+          </a:xfrm>
+          <a:prstGeom prst="rect">
+            <a:avLst/>
+          </a:prstGeom>
+          <a:noFill/>
+          <a:ln/>
+        </p:spPr>
+        <p:txBody>
+          <a:bodyPr wrap="square" rtlCol="0" anchor="ctr"/>
+          <a:lstStyle/>
+          <a:p>
+            <a:pPr algn="ctr" indent="0" marL="0">
+              <a:buNone/>
+            </a:pPr>
+            <a:r>
+              <a:rPr lang="en-US" sz="1400" b="1" dirty="0">
+                <a:solidFill>
+                  <a:srgbClr val="FFFFFF"/>
+                </a:solidFill>
+                <a:latin typeface="Cambria" pitchFamily="34" charset="0"/>
+                <a:ea typeface="Cambria" pitchFamily="34" charset="-122"/>
+                <a:cs typeface="Cambria" pitchFamily="34" charset="-120"/>
+              </a:rPr>
+              <a:t>5</a:t>
+            </a:r>
+            <a:endParaRPr lang="en-US" sz="1400" dirty="0"/>
+          </a:p>
+        </p:txBody>
+      </p:sp>
+      <p:sp>
+        <p:nvSpPr>
+          <p:cNvPr id="27" name="Text 25"/>
+          <p:cNvSpPr/>
+          <p:nvPr/>
+        </p:nvSpPr>
+        <p:spPr>
+          <a:xfrm>
+            <a:off x="4572000" y="4663440"/>
+            <a:ext cx="3154680" cy="502920"/>
+          </a:xfrm>
+          <a:prstGeom prst="rect">
+            <a:avLst/>
+          </a:prstGeom>
+          <a:noFill/>
+          <a:ln/>
+        </p:spPr>
+        <p:txBody>
+          <a:bodyPr wrap="square" rtlCol="0" anchor="ctr"/>
+          <a:lstStyle/>
+          <a:p>
+            <a:pPr indent="0" marL="0">
+              <a:buNone/>
+            </a:pPr>
+            <a:r>
+              <a:rPr lang="en-US" sz="1350" b="1" dirty="0">
+                <a:solidFill>
+                  <a:srgbClr val="1A1A18"/>
+                </a:solidFill>
+                <a:latin typeface="Cambria" pitchFamily="34" charset="0"/>
+                <a:ea typeface="Cambria" pitchFamily="34" charset="-122"/>
+                <a:cs typeface="Cambria" pitchFamily="34" charset="-120"/>
+              </a:rPr>
+              <a:t>Compliance score &amp; real /health</a:t>
+            </a:r>
+            <a:endParaRPr lang="en-US" sz="1350" dirty="0"/>
+          </a:p>
+        </p:txBody>
+      </p:sp>
+      <p:sp>
+        <p:nvSpPr>
+          <p:cNvPr id="28" name="Text 26"/>
+          <p:cNvSpPr/>
+          <p:nvPr/>
+        </p:nvSpPr>
+        <p:spPr>
+          <a:xfrm>
+            <a:off x="4572000" y="5120640"/>
+            <a:ext cx="3154680" cy="640080"/>
+          </a:xfrm>
+          <a:prstGeom prst="rect">
+            <a:avLst/>
+          </a:prstGeom>
+          <a:noFill/>
+          <a:ln/>
+        </p:spPr>
+        <p:txBody>
+          <a:bodyPr wrap="square" rtlCol="0" anchor="ctr"/>
+          <a:lstStyle/>
+          <a:p>
+            <a:pPr indent="0" marL="0">
+              <a:buNone/>
+            </a:pPr>
+            <a:r>
+              <a:rPr lang="en-US" sz="1080" dirty="0">
+                <a:solidFill>
+                  <a:srgbClr val="5F5E5A"/>
+                </a:solidFill>
+                <a:latin typeface="Calibri" pitchFamily="34" charset="0"/>
+                <a:ea typeface="Calibri" pitchFamily="34" charset="-122"/>
+                <a:cs typeface="Calibri" pitchFamily="34" charset="-120"/>
+              </a:rPr>
+              <a:t>Per-category compliance_checks + a 0–1 compliance_score; /health now reports real readiness instead of a hardcoded “ok”.</a:t>
+            </a:r>
+            <a:endParaRPr lang="en-US" sz="1080" dirty="0"/>
+          </a:p>
+        </p:txBody>
+      </p:sp>
+      <p:sp>
+        <p:nvSpPr>
+          <p:cNvPr id="29" name="Text 27"/>
+          <p:cNvSpPr/>
+          <p:nvPr/>
+        </p:nvSpPr>
+        <p:spPr>
+          <a:xfrm>
+            <a:off x="11612880" y="6492240"/>
+            <a:ext cx="457200" cy="274320"/>
+          </a:xfrm>
+          <a:prstGeom prst="rect">
+            <a:avLst/>
+          </a:prstGeom>
+          <a:noFill/>
+          <a:ln/>
+        </p:spPr>
+        <p:txBody>
+          <a:bodyPr wrap="square" rtlCol="0" anchor="ctr"/>
+          <a:lstStyle/>
+          <a:p>
+            <a:pPr algn="r" indent="0" marL="0">
+              <a:buNone/>
+            </a:pPr>
+            <a:r>
+              <a:rPr lang="en-US" sz="1000" dirty="0">
+                <a:solidFill>
+                  <a:srgbClr val="5F5E5A"/>
+                </a:solidFill>
+                <a:latin typeface="Calibri" pitchFamily="34" charset="0"/>
+                <a:ea typeface="Calibri" pitchFamily="34" charset="-122"/>
+                <a:cs typeface="Calibri" pitchFamily="34" charset="-120"/>
+              </a:rPr>
+              <a:t>8</a:t>
+            </a:r>
+            <a:endParaRPr lang="en-US" sz="1000" dirty="0"/>
+          </a:p>
+        </p:txBody>
+      </p:sp>
+    </p:spTree>
+  </p:cSld>
+  <p:clrMapOvr>
+    <a:masterClrMapping/>
+  </p:clrMapOvr>
+</p:sld>
+</file>
+
+<file path=ppt/slides/slide9.xml><?xml version="1.0" encoding="utf-8"?>
+<p:sld xmlns:a="http://schemas.openxmlformats.org/drawingml/2006/main" xmlns:r="http://schemas.openxmlformats.org/officeDocument/2006/relationships" xmlns:p="http://schemas.openxmlformats.org/presentationml/2006/main">
   <p:cSld name="Slide 8">
     <p:bg>
       <p:bgPr>
@@ -15815,7 +16537,7 @@
                 <a:ea typeface="Calibri" pitchFamily="34" charset="-122"/>
                 <a:cs typeface="Calibri" pitchFamily="34" charset="-120"/>
               </a:rPr>
-              <a:t>0.996 precision / 0.996 recall</a:t>
+              <a:t>0.996 precision / 1.0000 recall</a:t>
             </a:r>
             <a:endParaRPr lang="en-US" sz="1250" dirty="0"/>
           </a:p>
@@ -15832,7 +16554,7 @@
                 <a:ea typeface="Calibri" pitchFamily="34" charset="-122"/>
                 <a:cs typeface="Calibri" pitchFamily="34" charset="-120"/>
               </a:rPr>
-              <a:t>249 TP · 1 FP · 1 FN</a:t>
+              <a:t>250 TP · 1 FP · 0 FN</a:t>
             </a:r>
             <a:endParaRPr lang="en-US" sz="1250" dirty="0"/>
           </a:p>
@@ -16116,728 +16838,6 @@
                 <a:cs typeface="Calibri" pitchFamily="34" charset="-120"/>
               </a:rPr>
               <a:t>9</a:t>
-            </a:r>
-            <a:endParaRPr lang="en-US" sz="1000" dirty="0"/>
-          </a:p>
-        </p:txBody>
-      </p:sp>
-    </p:spTree>
-  </p:cSld>
-  <p:clrMapOvr>
-    <a:masterClrMapping/>
-  </p:clrMapOvr>
-</p:sld>
-</file>
-
-<file path=ppt/slides/slide9.xml><?xml version="1.0" encoding="utf-8"?>
-<p:sld xmlns:a="http://schemas.openxmlformats.org/drawingml/2006/main" xmlns:r="http://schemas.openxmlformats.org/officeDocument/2006/relationships" xmlns:p="http://schemas.openxmlformats.org/presentationml/2006/main">
-  <p:cSld name="Slide 9">
-    <p:bg>
-      <p:bgPr>
-        <a:solidFill>
-          <a:srgbClr val="FFFFFF"/>
-        </a:solidFill>
-      </p:bgPr>
-    </p:bg>
-    <p:spTree>
-      <p:nvGrpSpPr>
-        <p:cNvPr id="1" name=""/>
-        <p:cNvGrpSpPr/>
-        <p:nvPr/>
-      </p:nvGrpSpPr>
-      <p:grpSpPr>
-        <a:xfrm>
-          <a:off x="0" y="0"/>
-          <a:ext cx="0" cy="0"/>
-          <a:chOff x="0" y="0"/>
-          <a:chExt cx="0" cy="0"/>
-        </a:xfrm>
-      </p:grpSpPr>
-      <p:sp>
-        <p:nvSpPr>
-          <p:cNvPr id="2" name="Text 0"/>
-          <p:cNvSpPr/>
-          <p:nvPr/>
-        </p:nvSpPr>
-        <p:spPr>
-          <a:xfrm>
-            <a:off x="548640" y="365760"/>
-            <a:ext cx="7315200" cy="320040"/>
-          </a:xfrm>
-          <a:prstGeom prst="rect">
-            <a:avLst/>
-          </a:prstGeom>
-          <a:noFill/>
-          <a:ln/>
-        </p:spPr>
-        <p:txBody>
-          <a:bodyPr wrap="square" rtlCol="0" anchor="ctr"/>
-          <a:lstStyle/>
-          <a:p>
-            <a:pPr indent="0" marL="0">
-              <a:buNone/>
-            </a:pPr>
-            <a:r>
-              <a:rPr lang="en-US" sz="1200" b="1" spc="200" kern="0" dirty="0">
-                <a:solidFill>
-                  <a:srgbClr val="0F6E56"/>
-                </a:solidFill>
-                <a:latin typeface="Calibri" pitchFamily="34" charset="0"/>
-                <a:ea typeface="Calibri" pitchFamily="34" charset="-122"/>
-                <a:cs typeface="Calibri" pitchFamily="34" charset="-120"/>
-              </a:rPr>
-              <a:t>ABLATION STUDY &amp; ERROR ANALYSIS</a:t>
-            </a:r>
-            <a:endParaRPr lang="en-US" sz="1200" dirty="0"/>
-          </a:p>
-        </p:txBody>
-      </p:sp>
-      <p:sp>
-        <p:nvSpPr>
-          <p:cNvPr id="3" name="Text 1"/>
-          <p:cNvSpPr/>
-          <p:nvPr/>
-        </p:nvSpPr>
-        <p:spPr>
-          <a:xfrm>
-            <a:off x="548640" y="640080"/>
-            <a:ext cx="11064240" cy="822960"/>
-          </a:xfrm>
-          <a:prstGeom prst="rect">
-            <a:avLst/>
-          </a:prstGeom>
-          <a:noFill/>
-          <a:ln/>
-        </p:spPr>
-        <p:txBody>
-          <a:bodyPr wrap="square" rtlCol="0" anchor="ctr"/>
-          <a:lstStyle/>
-          <a:p>
-            <a:pPr algn="l" indent="0" marL="0">
-              <a:buNone/>
-            </a:pPr>
-            <a:r>
-              <a:rPr lang="en-US" sz="3000" b="1" dirty="0">
-                <a:solidFill>
-                  <a:srgbClr val="1F4E79"/>
-                </a:solidFill>
-                <a:latin typeface="Cambria" pitchFamily="34" charset="0"/>
-                <a:ea typeface="Cambria" pitchFamily="34" charset="-122"/>
-                <a:cs typeface="Cambria" pitchFamily="34" charset="-120"/>
-              </a:rPr>
-              <a:t>Measured, not assumed: what is human review actually worth?</a:t>
-            </a:r>
-            <a:endParaRPr lang="en-US" sz="3000" dirty="0"/>
-          </a:p>
-        </p:txBody>
-      </p:sp>
-      <p:sp>
-        <p:nvSpPr>
-          <p:cNvPr id="4" name="Shape 2"/>
-          <p:cNvSpPr/>
-          <p:nvPr/>
-        </p:nvSpPr>
-        <p:spPr>
-          <a:xfrm>
-            <a:off x="548640" y="1645920"/>
-            <a:ext cx="5486400" cy="2788920"/>
-          </a:xfrm>
-          <a:prstGeom prst="roundRect">
-            <a:avLst>
-              <a:gd name="adj" fmla="val 2623"/>
-            </a:avLst>
-          </a:prstGeom>
-          <a:solidFill>
-            <a:srgbClr val="F7F9FB"/>
-          </a:solidFill>
-          <a:ln w="12700">
-            <a:solidFill>
-              <a:srgbClr val="E3E8EC"/>
-            </a:solidFill>
-            <a:prstDash val="solid"/>
-          </a:ln>
-          <a:effectLst>
-            <a:outerShdw sx="100000" sy="100000" kx="0" ky="0" algn="bl" rotWithShape="0" blurRad="76200" dist="25400" dir="5400000">
-              <a:srgbClr val="999999">
-                <a:alpha val="18000"/>
-              </a:srgbClr>
-            </a:outerShdw>
-          </a:effectLst>
-        </p:spPr>
-      </p:sp>
-      <p:sp>
-        <p:nvSpPr>
-          <p:cNvPr id="5" name="Text 3"/>
-          <p:cNvSpPr/>
-          <p:nvPr/>
-        </p:nvSpPr>
-        <p:spPr>
-          <a:xfrm>
-            <a:off x="822960" y="1783080"/>
-            <a:ext cx="5029200" cy="365760"/>
-          </a:xfrm>
-          <a:prstGeom prst="rect">
-            <a:avLst/>
-          </a:prstGeom>
-          <a:noFill/>
-          <a:ln/>
-        </p:spPr>
-        <p:txBody>
-          <a:bodyPr wrap="square" rtlCol="0" anchor="ctr"/>
-          <a:lstStyle/>
-          <a:p>
-            <a:pPr indent="0" marL="0">
-              <a:buNone/>
-            </a:pPr>
-            <a:r>
-              <a:rPr lang="en-US" sz="1450" b="1" dirty="0">
-                <a:solidFill>
-                  <a:srgbClr val="1A1A18"/>
-                </a:solidFill>
-                <a:latin typeface="Cambria" pitchFamily="34" charset="0"/>
-                <a:ea typeface="Cambria" pitchFamily="34" charset="-122"/>
-                <a:cs typeface="Cambria" pitchFamily="34" charset="-120"/>
-              </a:rPr>
-              <a:t>HumanReviewAgent: ON vs OFF</a:t>
-            </a:r>
-            <a:endParaRPr lang="en-US" sz="1450" dirty="0"/>
-          </a:p>
-        </p:txBody>
-      </p:sp>
-      <p:sp>
-        <p:nvSpPr>
-          <p:cNvPr id="6" name="Text 4"/>
-          <p:cNvSpPr/>
-          <p:nvPr/>
-        </p:nvSpPr>
-        <p:spPr>
-          <a:xfrm>
-            <a:off x="822960" y="2194560"/>
-            <a:ext cx="5029200" cy="640080"/>
-          </a:xfrm>
-          <a:prstGeom prst="rect">
-            <a:avLst/>
-          </a:prstGeom>
-          <a:noFill/>
-          <a:ln/>
-        </p:spPr>
-        <p:txBody>
-          <a:bodyPr wrap="square" rtlCol="0" anchor="ctr"/>
-          <a:lstStyle/>
-          <a:p>
-            <a:pPr indent="0" marL="0">
-              <a:buNone/>
-            </a:pPr>
-            <a:r>
-              <a:rPr lang="en-US" sz="1100" dirty="0">
-                <a:solidFill>
-                  <a:srgbClr val="5F5E5A"/>
-                </a:solidFill>
-                <a:latin typeface="Calibri" pitchFamily="34" charset="0"/>
-                <a:ea typeface="Calibri" pitchFamily="34" charset="-122"/>
-                <a:cs typeface="Calibri" pitchFamily="34" charset="-120"/>
-              </a:rPr>
-              <a:t>ON: low-confidence spans routed to a reviewer, correctly approved.</a:t>
-            </a:r>
-            <a:endParaRPr lang="en-US" sz="1100" dirty="0"/>
-          </a:p>
-          <a:p>
-            <a:pPr indent="0" marL="0">
-              <a:buNone/>
-            </a:pPr>
-            <a:r>
-              <a:rPr lang="en-US" sz="1100" dirty="0">
-                <a:solidFill>
-                  <a:srgbClr val="5F5E5A"/>
-                </a:solidFill>
-                <a:latin typeface="Calibri" pitchFamily="34" charset="0"/>
-                <a:ea typeface="Calibri" pitchFamily="34" charset="-122"/>
-                <a:cs typeface="Calibri" pitchFamily="34" charset="-120"/>
-              </a:rPr>
-              <a:t>OFF: low-confidence spans left un-redacted entirely.</a:t>
-            </a:r>
-            <a:endParaRPr lang="en-US" sz="1100" dirty="0"/>
-          </a:p>
-        </p:txBody>
-      </p:sp>
-      <p:sp>
-        <p:nvSpPr>
-          <p:cNvPr id="7" name="Text 5"/>
-          <p:cNvSpPr/>
-          <p:nvPr/>
-        </p:nvSpPr>
-        <p:spPr>
-          <a:xfrm>
-            <a:off x="822960" y="2926080"/>
-            <a:ext cx="3291840" cy="411480"/>
-          </a:xfrm>
-          <a:prstGeom prst="rect">
-            <a:avLst/>
-          </a:prstGeom>
-          <a:noFill/>
-          <a:ln/>
-        </p:spPr>
-        <p:txBody>
-          <a:bodyPr wrap="square" rtlCol="0" anchor="ctr"/>
-          <a:lstStyle/>
-          <a:p>
-            <a:pPr indent="0" marL="0">
-              <a:buNone/>
-            </a:pPr>
-            <a:r>
-              <a:rPr lang="en-US" sz="1250" dirty="0">
-                <a:solidFill>
-                  <a:srgbClr val="1A1A18"/>
-                </a:solidFill>
-                <a:latin typeface="Calibri" pitchFamily="34" charset="0"/>
-                <a:ea typeface="Calibri" pitchFamily="34" charset="-122"/>
-                <a:cs typeface="Calibri" pitchFamily="34" charset="-120"/>
-              </a:rPr>
-              <a:t>OVERLAP F1 — ON</a:t>
-            </a:r>
-            <a:endParaRPr lang="en-US" sz="1250" dirty="0"/>
-          </a:p>
-        </p:txBody>
-      </p:sp>
-      <p:sp>
-        <p:nvSpPr>
-          <p:cNvPr id="8" name="Text 6"/>
-          <p:cNvSpPr/>
-          <p:nvPr/>
-        </p:nvSpPr>
-        <p:spPr>
-          <a:xfrm>
-            <a:off x="4206240" y="2926080"/>
-            <a:ext cx="1645920" cy="411480"/>
-          </a:xfrm>
-          <a:prstGeom prst="rect">
-            <a:avLst/>
-          </a:prstGeom>
-          <a:noFill/>
-          <a:ln/>
-        </p:spPr>
-        <p:txBody>
-          <a:bodyPr wrap="square" rtlCol="0" anchor="ctr"/>
-          <a:lstStyle/>
-          <a:p>
-            <a:pPr algn="r" indent="0" marL="0">
-              <a:buNone/>
-            </a:pPr>
-            <a:r>
-              <a:rPr lang="en-US" sz="1300" b="1" dirty="0">
-                <a:solidFill>
-                  <a:srgbClr val="1A1A18"/>
-                </a:solidFill>
-                <a:latin typeface="Cambria" pitchFamily="34" charset="0"/>
-                <a:ea typeface="Cambria" pitchFamily="34" charset="-122"/>
-                <a:cs typeface="Cambria" pitchFamily="34" charset="-120"/>
-              </a:rPr>
-              <a:t>0.6599</a:t>
-            </a:r>
-            <a:endParaRPr lang="en-US" sz="1300" dirty="0"/>
-          </a:p>
-        </p:txBody>
-      </p:sp>
-      <p:sp>
-        <p:nvSpPr>
-          <p:cNvPr id="9" name="Text 7"/>
-          <p:cNvSpPr/>
-          <p:nvPr/>
-        </p:nvSpPr>
-        <p:spPr>
-          <a:xfrm>
-            <a:off x="822960" y="3383280"/>
-            <a:ext cx="3291840" cy="411480"/>
-          </a:xfrm>
-          <a:prstGeom prst="rect">
-            <a:avLst/>
-          </a:prstGeom>
-          <a:noFill/>
-          <a:ln/>
-        </p:spPr>
-        <p:txBody>
-          <a:bodyPr wrap="square" rtlCol="0" anchor="ctr"/>
-          <a:lstStyle/>
-          <a:p>
-            <a:pPr indent="0" marL="0">
-              <a:buNone/>
-            </a:pPr>
-            <a:r>
-              <a:rPr lang="en-US" sz="1250" dirty="0">
-                <a:solidFill>
-                  <a:srgbClr val="1A1A18"/>
-                </a:solidFill>
-                <a:latin typeface="Calibri" pitchFamily="34" charset="0"/>
-                <a:ea typeface="Calibri" pitchFamily="34" charset="-122"/>
-                <a:cs typeface="Calibri" pitchFamily="34" charset="-120"/>
-              </a:rPr>
-              <a:t>OVERLAP F1 — OFF</a:t>
-            </a:r>
-            <a:endParaRPr lang="en-US" sz="1250" dirty="0"/>
-          </a:p>
-        </p:txBody>
-      </p:sp>
-      <p:sp>
-        <p:nvSpPr>
-          <p:cNvPr id="10" name="Text 8"/>
-          <p:cNvSpPr/>
-          <p:nvPr/>
-        </p:nvSpPr>
-        <p:spPr>
-          <a:xfrm>
-            <a:off x="4206240" y="3383280"/>
-            <a:ext cx="1645920" cy="411480"/>
-          </a:xfrm>
-          <a:prstGeom prst="rect">
-            <a:avLst/>
-          </a:prstGeom>
-          <a:noFill/>
-          <a:ln/>
-        </p:spPr>
-        <p:txBody>
-          <a:bodyPr wrap="square" rtlCol="0" anchor="ctr"/>
-          <a:lstStyle/>
-          <a:p>
-            <a:pPr algn="r" indent="0" marL="0">
-              <a:buNone/>
-            </a:pPr>
-            <a:r>
-              <a:rPr lang="en-US" sz="1300" b="1" dirty="0">
-                <a:solidFill>
-                  <a:srgbClr val="1A1A18"/>
-                </a:solidFill>
-                <a:latin typeface="Cambria" pitchFamily="34" charset="0"/>
-                <a:ea typeface="Cambria" pitchFamily="34" charset="-122"/>
-                <a:cs typeface="Cambria" pitchFamily="34" charset="-120"/>
-              </a:rPr>
-              <a:t>0.6304</a:t>
-            </a:r>
-            <a:endParaRPr lang="en-US" sz="1300" dirty="0"/>
-          </a:p>
-        </p:txBody>
-      </p:sp>
-      <p:sp>
-        <p:nvSpPr>
-          <p:cNvPr id="11" name="Text 9"/>
-          <p:cNvSpPr/>
-          <p:nvPr/>
-        </p:nvSpPr>
-        <p:spPr>
-          <a:xfrm>
-            <a:off x="822960" y="3840480"/>
-            <a:ext cx="3291840" cy="411480"/>
-          </a:xfrm>
-          <a:prstGeom prst="rect">
-            <a:avLst/>
-          </a:prstGeom>
-          <a:noFill/>
-          <a:ln/>
-        </p:spPr>
-        <p:txBody>
-          <a:bodyPr wrap="square" rtlCol="0" anchor="ctr"/>
-          <a:lstStyle/>
-          <a:p>
-            <a:pPr indent="0" marL="0">
-              <a:buNone/>
-            </a:pPr>
-            <a:r>
-              <a:rPr lang="en-US" sz="1250" b="1" dirty="0">
-                <a:solidFill>
-                  <a:srgbClr val="0F6E56"/>
-                </a:solidFill>
-                <a:latin typeface="Calibri" pitchFamily="34" charset="0"/>
-                <a:ea typeface="Calibri" pitchFamily="34" charset="-122"/>
-                <a:cs typeface="Calibri" pitchFamily="34" charset="-120"/>
-              </a:rPr>
-              <a:t>F1 delta (ON − OFF)</a:t>
-            </a:r>
-            <a:endParaRPr lang="en-US" sz="1250" dirty="0"/>
-          </a:p>
-        </p:txBody>
-      </p:sp>
-      <p:sp>
-        <p:nvSpPr>
-          <p:cNvPr id="12" name="Text 10"/>
-          <p:cNvSpPr/>
-          <p:nvPr/>
-        </p:nvSpPr>
-        <p:spPr>
-          <a:xfrm>
-            <a:off x="4206240" y="3840480"/>
-            <a:ext cx="1645920" cy="411480"/>
-          </a:xfrm>
-          <a:prstGeom prst="rect">
-            <a:avLst/>
-          </a:prstGeom>
-          <a:noFill/>
-          <a:ln/>
-        </p:spPr>
-        <p:txBody>
-          <a:bodyPr wrap="square" rtlCol="0" anchor="ctr"/>
-          <a:lstStyle/>
-          <a:p>
-            <a:pPr algn="r" indent="0" marL="0">
-              <a:buNone/>
-            </a:pPr>
-            <a:r>
-              <a:rPr lang="en-US" sz="1300" b="1" dirty="0">
-                <a:solidFill>
-                  <a:srgbClr val="0F6E56"/>
-                </a:solidFill>
-                <a:latin typeface="Cambria" pitchFamily="34" charset="0"/>
-                <a:ea typeface="Cambria" pitchFamily="34" charset="-122"/>
-                <a:cs typeface="Cambria" pitchFamily="34" charset="-120"/>
-              </a:rPr>
-              <a:t>+0.0295</a:t>
-            </a:r>
-            <a:endParaRPr lang="en-US" sz="1300" dirty="0"/>
-          </a:p>
-        </p:txBody>
-      </p:sp>
-      <p:sp>
-        <p:nvSpPr>
-          <p:cNvPr id="13" name="Text 11"/>
-          <p:cNvSpPr/>
-          <p:nvPr/>
-        </p:nvSpPr>
-        <p:spPr>
-          <a:xfrm>
-            <a:off x="822960" y="4160520"/>
-            <a:ext cx="5029200" cy="228600"/>
-          </a:xfrm>
-          <a:prstGeom prst="rect">
-            <a:avLst/>
-          </a:prstGeom>
-          <a:noFill/>
-          <a:ln/>
-        </p:spPr>
-        <p:txBody>
-          <a:bodyPr wrap="square" rtlCol="0" anchor="ctr"/>
-          <a:lstStyle/>
-          <a:p>
-            <a:pPr indent="0" marL="0">
-              <a:buNone/>
-            </a:pPr>
-            <a:r>
-              <a:rPr lang="en-US" sz="1000" i="1" dirty="0">
-                <a:solidFill>
-                  <a:srgbClr val="5F5E5A"/>
-                </a:solidFill>
-                <a:latin typeface="Calibri" pitchFamily="34" charset="0"/>
-                <a:ea typeface="Calibri" pitchFamily="34" charset="-122"/>
-                <a:cs typeface="Calibri" pitchFamily="34" charset="-120"/>
-              </a:rPr>
-              <a:t>Positive delta both ways (STRICT +0.0471, OVERLAP +0.0295) — human review is measurably load-bearing, not decorative.</a:t>
-            </a:r>
-            <a:endParaRPr lang="en-US" sz="1000" dirty="0"/>
-          </a:p>
-        </p:txBody>
-      </p:sp>
-      <p:sp>
-        <p:nvSpPr>
-          <p:cNvPr id="14" name="Shape 12"/>
-          <p:cNvSpPr/>
-          <p:nvPr/>
-        </p:nvSpPr>
-        <p:spPr>
-          <a:xfrm>
-            <a:off x="6309360" y="1645920"/>
-            <a:ext cx="5303520" cy="2788920"/>
-          </a:xfrm>
-          <a:prstGeom prst="roundRect">
-            <a:avLst>
-              <a:gd name="adj" fmla="val 2623"/>
-            </a:avLst>
-          </a:prstGeom>
-          <a:solidFill>
-            <a:srgbClr val="FAEEDA"/>
-          </a:solidFill>
-          <a:ln w="12700">
-            <a:solidFill>
-              <a:srgbClr val="FAEEDA"/>
-            </a:solidFill>
-            <a:prstDash val="solid"/>
-          </a:ln>
-        </p:spPr>
-      </p:sp>
-      <p:sp>
-        <p:nvSpPr>
-          <p:cNvPr id="15" name="Text 13"/>
-          <p:cNvSpPr/>
-          <p:nvPr/>
-        </p:nvSpPr>
-        <p:spPr>
-          <a:xfrm>
-            <a:off x="6583680" y="1783080"/>
-            <a:ext cx="4754880" cy="548640"/>
-          </a:xfrm>
-          <a:prstGeom prst="rect">
-            <a:avLst/>
-          </a:prstGeom>
-          <a:noFill/>
-          <a:ln/>
-        </p:spPr>
-        <p:txBody>
-          <a:bodyPr wrap="square" rtlCol="0" anchor="ctr"/>
-          <a:lstStyle/>
-          <a:p>
-            <a:pPr indent="0" marL="0">
-              <a:buNone/>
-            </a:pPr>
-            <a:r>
-              <a:rPr lang="en-US" sz="1350" b="1" dirty="0">
-                <a:solidFill>
-                  <a:srgbClr val="7A4D08"/>
-                </a:solidFill>
-                <a:latin typeface="Cambria" pitchFamily="34" charset="0"/>
-                <a:ea typeface="Cambria" pitchFamily="34" charset="-122"/>
-                <a:cs typeface="Cambria" pitchFamily="34" charset="-120"/>
-              </a:rPr>
-              <a:t>Error analysis: real FP/FN examples, not aggregate counts</a:t>
-            </a:r>
-            <a:endParaRPr lang="en-US" sz="1350" dirty="0"/>
-          </a:p>
-        </p:txBody>
-      </p:sp>
-      <p:sp>
-        <p:nvSpPr>
-          <p:cNvPr id="16" name="Text 14"/>
-          <p:cNvSpPr/>
-          <p:nvPr/>
-        </p:nvSpPr>
-        <p:spPr>
-          <a:xfrm>
-            <a:off x="6583680" y="2377440"/>
-            <a:ext cx="4754880" cy="1371600"/>
-          </a:xfrm>
-          <a:prstGeom prst="rect">
-            <a:avLst/>
-          </a:prstGeom>
-          <a:noFill/>
-          <a:ln/>
-        </p:spPr>
-        <p:txBody>
-          <a:bodyPr wrap="square" rtlCol="0" anchor="ctr"/>
-          <a:lstStyle/>
-          <a:p>
-            <a:pPr indent="0" marL="0">
-              <a:buNone/>
-            </a:pPr>
-            <a:r>
-              <a:rPr lang="en-US" sz="1150" dirty="0">
-                <a:solidFill>
-                  <a:srgbClr val="7A4D08"/>
-                </a:solidFill>
-                <a:latin typeface="Calibri" pitchFamily="34" charset="0"/>
-                <a:ea typeface="Calibri" pitchFamily="34" charset="-122"/>
-                <a:cs typeface="Calibri" pitchFamily="34" charset="-120"/>
-              </a:rPr>
-              <a:t>eval/error_analysis.py pulls real spans with surrounding document context. Most FPs confirmed the known out-of-taxonomy story. One systematic FN pattern was new — see next slide.</a:t>
-            </a:r>
-            <a:endParaRPr lang="en-US" sz="1150" dirty="0"/>
-          </a:p>
-        </p:txBody>
-      </p:sp>
-      <p:sp>
-        <p:nvSpPr>
-          <p:cNvPr id="17" name="Shape 15"/>
-          <p:cNvSpPr/>
-          <p:nvPr/>
-        </p:nvSpPr>
-        <p:spPr>
-          <a:xfrm>
-            <a:off x="548640" y="4617720"/>
-            <a:ext cx="11064240" cy="1371600"/>
-          </a:xfrm>
-          <a:prstGeom prst="roundRect">
-            <a:avLst>
-              <a:gd name="adj" fmla="val 5333"/>
-            </a:avLst>
-          </a:prstGeom>
-          <a:solidFill>
-            <a:srgbClr val="E1F5EE"/>
-          </a:solidFill>
-          <a:ln w="12700">
-            <a:solidFill>
-              <a:srgbClr val="E1F5EE"/>
-            </a:solidFill>
-            <a:prstDash val="solid"/>
-          </a:ln>
-        </p:spPr>
-      </p:sp>
-      <p:sp>
-        <p:nvSpPr>
-          <p:cNvPr id="18" name="Text 16"/>
-          <p:cNvSpPr/>
-          <p:nvPr/>
-        </p:nvSpPr>
-        <p:spPr>
-          <a:xfrm>
-            <a:off x="822960" y="4617720"/>
-            <a:ext cx="10515600" cy="1371600"/>
-          </a:xfrm>
-          <a:prstGeom prst="rect">
-            <a:avLst/>
-          </a:prstGeom>
-          <a:noFill/>
-          <a:ln/>
-        </p:spPr>
-        <p:txBody>
-          <a:bodyPr wrap="square" rtlCol="0" anchor="ctr"/>
-          <a:lstStyle/>
-          <a:p>
-            <a:pPr indent="0" marL="0">
-              <a:buNone/>
-            </a:pPr>
-            <a:r>
-              <a:rPr lang="en-US" sz="1300" i="1" dirty="0">
-                <a:solidFill>
-                  <a:srgbClr val="0D5040"/>
-                </a:solidFill>
-                <a:latin typeface="Calibri" pitchFamily="34" charset="0"/>
-                <a:ea typeface="Calibri" pitchFamily="34" charset="-122"/>
-                <a:cs typeface="Calibri" pitchFamily="34" charset="-120"/>
-              </a:rPr>
-              <a:t>Both scripts run against the real 350-document Presidio-backend set — evidence, not estimation. Viewable live in the Streamlit UI's Evaluation dashboard.</a:t>
-            </a:r>
-            <a:endParaRPr lang="en-US" sz="1300" dirty="0"/>
-          </a:p>
-        </p:txBody>
-      </p:sp>
-      <p:sp>
-        <p:nvSpPr>
-          <p:cNvPr id="19" name="Text 17"/>
-          <p:cNvSpPr/>
-          <p:nvPr/>
-        </p:nvSpPr>
-        <p:spPr>
-          <a:xfrm>
-            <a:off x="11612880" y="6492240"/>
-            <a:ext cx="457200" cy="274320"/>
-          </a:xfrm>
-          <a:prstGeom prst="rect">
-            <a:avLst/>
-          </a:prstGeom>
-          <a:noFill/>
-          <a:ln/>
-        </p:spPr>
-        <p:txBody>
-          <a:bodyPr wrap="square" rtlCol="0" anchor="ctr"/>
-          <a:lstStyle/>
-          <a:p>
-            <a:pPr algn="r" indent="0" marL="0">
-              <a:buNone/>
-            </a:pPr>
-            <a:r>
-              <a:rPr lang="en-US" sz="1000" dirty="0">
-                <a:solidFill>
-                  <a:srgbClr val="5F5E5A"/>
-                </a:solidFill>
-                <a:latin typeface="Calibri" pitchFamily="34" charset="0"/>
-                <a:ea typeface="Calibri" pitchFamily="34" charset="-122"/>
-                <a:cs typeface="Calibri" pitchFamily="34" charset="-120"/>
-              </a:rPr>
-              <a:t>10</a:t>
             </a:r>
             <a:endParaRPr lang="en-US" sz="1000" dirty="0"/>
           </a:p>
